--- a/design/pageDesign.pptx
+++ b/design/pageDesign.pptx
@@ -21,28 +21,29 @@
     <p:sldId id="264" r:id="rId13"/>
     <p:sldId id="304" r:id="rId14"/>
     <p:sldId id="267" r:id="rId15"/>
-    <p:sldId id="316" r:id="rId16"/>
-    <p:sldId id="305" r:id="rId17"/>
-    <p:sldId id="268" r:id="rId18"/>
-    <p:sldId id="306" r:id="rId19"/>
-    <p:sldId id="270" r:id="rId20"/>
-    <p:sldId id="307" r:id="rId21"/>
-    <p:sldId id="274" r:id="rId22"/>
-    <p:sldId id="308" r:id="rId23"/>
-    <p:sldId id="287" r:id="rId24"/>
-    <p:sldId id="309" r:id="rId25"/>
-    <p:sldId id="276" r:id="rId26"/>
-    <p:sldId id="310" r:id="rId27"/>
-    <p:sldId id="273" r:id="rId28"/>
-    <p:sldId id="311" r:id="rId29"/>
-    <p:sldId id="277" r:id="rId30"/>
-    <p:sldId id="312" r:id="rId31"/>
-    <p:sldId id="279" r:id="rId32"/>
-    <p:sldId id="313" r:id="rId33"/>
-    <p:sldId id="282" r:id="rId34"/>
-    <p:sldId id="314" r:id="rId35"/>
-    <p:sldId id="284" r:id="rId36"/>
-    <p:sldId id="315" r:id="rId37"/>
+    <p:sldId id="305" r:id="rId16"/>
+    <p:sldId id="316" r:id="rId17"/>
+    <p:sldId id="318" r:id="rId18"/>
+    <p:sldId id="268" r:id="rId19"/>
+    <p:sldId id="306" r:id="rId20"/>
+    <p:sldId id="270" r:id="rId21"/>
+    <p:sldId id="307" r:id="rId22"/>
+    <p:sldId id="274" r:id="rId23"/>
+    <p:sldId id="308" r:id="rId24"/>
+    <p:sldId id="287" r:id="rId25"/>
+    <p:sldId id="309" r:id="rId26"/>
+    <p:sldId id="276" r:id="rId27"/>
+    <p:sldId id="310" r:id="rId28"/>
+    <p:sldId id="273" r:id="rId29"/>
+    <p:sldId id="311" r:id="rId30"/>
+    <p:sldId id="277" r:id="rId31"/>
+    <p:sldId id="312" r:id="rId32"/>
+    <p:sldId id="279" r:id="rId33"/>
+    <p:sldId id="313" r:id="rId34"/>
+    <p:sldId id="282" r:id="rId35"/>
+    <p:sldId id="314" r:id="rId36"/>
+    <p:sldId id="284" r:id="rId37"/>
+    <p:sldId id="315" r:id="rId38"/>
   </p:sldIdLst>
   <p:sldSz cx="12192000" cy="6858000" type="screen4x3"/>
   <p:notesSz cx="6858000" cy="9144000"/>
@@ -899,6 +900,101 @@
 </file>
 
 <file path=ppt/notesSlides/notesSlide5.xml><?xml version="1.0" encoding="utf-8"?>
+<p:notes xmlns:r="http://schemas.openxmlformats.org/officeDocument/2006/relationships" xmlns:c="http://schemas.openxmlformats.org/drawingml/2006/chart" xmlns:a="http://schemas.openxmlformats.org/drawingml/2006/main" xmlns:dgm="http://schemas.openxmlformats.org/drawingml/2006/diagram" xmlns:dsp="http://schemas.microsoft.com/office/drawing/2008/diagram" xmlns:p="http://schemas.openxmlformats.org/presentationml/2006/main">
+  <p:cSld>
+    <p:spTree>
+      <p:nvGrpSpPr>
+        <p:cNvPr id="1" name=""/>
+        <p:cNvGrpSpPr/>
+        <p:nvPr/>
+      </p:nvGrpSpPr>
+      <p:grpSpPr>
+        <a:xfrm>
+          <a:off x="0" y="0"/>
+          <a:ext cx="0" cy="0"/>
+          <a:chOff x="0" y="0"/>
+          <a:chExt cx="0" cy="0"/>
+        </a:xfrm>
+      </p:grpSpPr>
+      <p:sp>
+        <p:nvSpPr>
+          <p:cNvPr id="2" name="슬라이드 이미지 개체 틀 3"/>
+          <p:cNvSpPr>
+            <a:spLocks noGrp="1" noRot="1" noChangeAspect="1" noTextEdit="1"/>
+          </p:cNvSpPr>
+          <p:nvPr>
+            <p:ph type="sldImg" idx="2"/>
+          </p:nvPr>
+        </p:nvSpPr>
+        <p:spPr/>
+        <p:txBody>
+          <a:bodyPr/>
+          <a:p>
+            <a:pPr lvl="0">
+              <a:defRPr/>
+            </a:pPr>
+            <a:endParaRPr lang="ko-KR" altLang="en-US"/>
+          </a:p>
+        </p:txBody>
+      </p:sp>
+      <p:sp>
+        <p:nvSpPr>
+          <p:cNvPr id="3" name="슬라이드 노트 개체 틀 4"/>
+          <p:cNvSpPr>
+            <a:spLocks noGrp="1"/>
+          </p:cNvSpPr>
+          <p:nvPr>
+            <p:ph type="body" sz="quarter" idx="3"/>
+          </p:nvPr>
+        </p:nvSpPr>
+        <p:spPr/>
+        <p:txBody>
+          <a:bodyPr/>
+          <a:p>
+            <a:pPr lvl="0">
+              <a:defRPr/>
+            </a:pPr>
+            <a:endParaRPr lang="ko-KR" altLang="en-US"/>
+          </a:p>
+        </p:txBody>
+      </p:sp>
+      <p:sp>
+        <p:nvSpPr>
+          <p:cNvPr id="4" name="슬라이드 번호 개체 틀 6"/>
+          <p:cNvSpPr>
+            <a:spLocks noGrp="1"/>
+          </p:cNvSpPr>
+          <p:nvPr>
+            <p:ph type="sldNum" sz="quarter" idx="5"/>
+          </p:nvPr>
+        </p:nvSpPr>
+        <p:spPr/>
+        <p:txBody>
+          <a:bodyPr/>
+          <a:p>
+            <a:pPr lvl="0">
+              <a:defRPr/>
+            </a:pPr>
+            <a:fld id="{09F4262C-968C-4EE9-8164-CE16364706B3}" type="slidenum">
+              <a:rPr lang="ko-KR" altLang="en-US"/>
+              <a:pPr lvl="0">
+                <a:defRPr/>
+              </a:pPr>
+              <a:t>1</a:t>
+            </a:fld>
+            <a:endParaRPr lang="ko-KR" altLang="en-US"/>
+          </a:p>
+        </p:txBody>
+      </p:sp>
+    </p:spTree>
+  </p:cSld>
+  <p:clrMapOvr>
+    <a:masterClrMapping/>
+  </p:clrMapOvr>
+</p:notes>
+</file>
+
+<file path=ppt/notesSlides/notesSlide6.xml><?xml version="1.0" encoding="utf-8"?>
 <p:notes xmlns:r="http://schemas.openxmlformats.org/officeDocument/2006/relationships" xmlns:c="http://schemas.openxmlformats.org/drawingml/2006/chart" xmlns:a="http://schemas.openxmlformats.org/drawingml/2006/main" xmlns:dgm="http://schemas.openxmlformats.org/drawingml/2006/diagram" xmlns:dsp="http://schemas.microsoft.com/office/drawing/2008/diagram" xmlns:p="http://schemas.openxmlformats.org/presentationml/2006/main">
   <p:cSld>
     <p:spTree>
@@ -4662,6 +4758,24 @@
                         </a:rPr>
                         <a:t>front/main</a:t>
                       </a:r>
+                      <a:endParaRPr lang="en-US" altLang="ko-KR" sz="1700">
+                        <a:solidFill>
+                          <a:srgbClr val="000000"/>
+                        </a:solidFill>
+                      </a:endParaRPr>
+                    </a:p>
+                    <a:p>
+                      <a:pPr latinLnBrk="1">
+                        <a:defRPr/>
+                      </a:pPr>
+                      <a:r>
+                        <a:rPr lang="en-US" altLang="ko-KR" sz="1700">
+                          <a:solidFill>
+                            <a:srgbClr val="000000"/>
+                          </a:solidFill>
+                        </a:rPr>
+                        <a:t>./front.html</a:t>
+                      </a:r>
                       <a:endParaRPr lang="ko-KR" altLang="en-US" sz="1700">
                         <a:solidFill>
                           <a:srgbClr val="000000"/>
@@ -4848,7 +4962,7 @@
                             <a:srgbClr val="000000"/>
                           </a:solidFill>
                         </a:rPr>
-                        <a:t>update/main</a:t>
+                        <a:t>update/checkPass</a:t>
                       </a:r>
                       <a:endParaRPr lang="ko-KR" altLang="en-US" sz="1700">
                         <a:solidFill>
@@ -4910,7 +5024,7 @@
                             <a:srgbClr val="000000"/>
                           </a:solidFill>
                         </a:rPr>
-                        <a:t>PATCH</a:t>
+                        <a:t>GET</a:t>
                       </a:r>
                       <a:endParaRPr lang="ko-KR" altLang="en-US" sz="1700">
                         <a:solidFill>
@@ -6963,6 +7077,24 @@
                         </a:rPr>
                         <a:t>front/main</a:t>
                       </a:r>
+                      <a:endParaRPr lang="en-US" altLang="ko-KR" sz="1700">
+                        <a:solidFill>
+                          <a:srgbClr val="000000"/>
+                        </a:solidFill>
+                      </a:endParaRPr>
+                    </a:p>
+                    <a:p>
+                      <a:pPr latinLnBrk="1">
+                        <a:defRPr/>
+                      </a:pPr>
+                      <a:r>
+                        <a:rPr lang="en-US" altLang="ko-KR" sz="1700">
+                          <a:solidFill>
+                            <a:srgbClr val="000000"/>
+                          </a:solidFill>
+                        </a:rPr>
+                        <a:t>./front.html</a:t>
+                      </a:r>
                       <a:endParaRPr lang="ko-KR" altLang="en-US" sz="1700">
                         <a:solidFill>
                           <a:srgbClr val="000000"/>
@@ -7149,7 +7281,7 @@
                             <a:srgbClr val="000000"/>
                           </a:solidFill>
                         </a:rPr>
-                        <a:t>update/main</a:t>
+                        <a:t>update/checkPass</a:t>
                       </a:r>
                       <a:endParaRPr lang="ko-KR" altLang="en-US" sz="1700">
                         <a:solidFill>
@@ -7211,7 +7343,7 @@
                             <a:srgbClr val="000000"/>
                           </a:solidFill>
                         </a:rPr>
-                        <a:t>PATCH</a:t>
+                        <a:t>GET</a:t>
                       </a:r>
                       <a:endParaRPr lang="ko-KR" altLang="en-US" sz="1700">
                         <a:solidFill>
@@ -7416,6 +7548,210 @@
                           </a:solidFill>
                         </a:rPr>
                         <a:t>POST</a:t>
+                      </a:r>
+                      <a:endParaRPr lang="ko-KR" altLang="en-US" sz="1700">
+                        <a:solidFill>
+                          <a:srgbClr val="000000"/>
+                        </a:solidFill>
+                      </a:endParaRPr>
+                    </a:p>
+                  </a:txBody>
+                  <a:tcPr marL="91440" marR="91440">
+                    <a:lnL w="15240">
+                      <a:solidFill>
+                        <a:srgbClr val="000000">
+                          <a:alpha val="100000"/>
+                        </a:srgbClr>
+                      </a:solidFill>
+                      <a:prstDash val="solid"/>
+                    </a:lnL>
+                    <a:lnR w="15240">
+                      <a:solidFill>
+                        <a:srgbClr val="000000">
+                          <a:alpha val="100000"/>
+                        </a:srgbClr>
+                      </a:solidFill>
+                      <a:prstDash val="solid"/>
+                    </a:lnR>
+                    <a:lnT w="15240">
+                      <a:solidFill>
+                        <a:srgbClr val="000000">
+                          <a:alpha val="100000"/>
+                        </a:srgbClr>
+                      </a:solidFill>
+                      <a:prstDash val="solid"/>
+                    </a:lnT>
+                    <a:lnB w="15240">
+                      <a:solidFill>
+                        <a:srgbClr val="000000">
+                          <a:alpha val="100000"/>
+                        </a:srgbClr>
+                      </a:solidFill>
+                      <a:prstDash val="solid"/>
+                    </a:lnB>
+                    <a:solidFill>
+                      <a:schemeClr val="bg1">
+                        <a:alpha val="100000"/>
+                      </a:schemeClr>
+                    </a:solidFill>
+                  </a:tcPr>
+                </a:tc>
+              </a:tr>
+              <a:tr h="270210">
+                <a:tc>
+                  <a:txBody>
+                    <a:bodyPr/>
+                    <a:p>
+                      <a:pPr latinLnBrk="1">
+                        <a:defRPr/>
+                      </a:pPr>
+                      <a:r>
+                        <a:rPr lang="ko-KR" altLang="en-US" sz="1700">
+                          <a:solidFill>
+                            <a:srgbClr val="000000"/>
+                          </a:solidFill>
+                        </a:rPr>
+                        <a:t>책</a:t>
+                      </a:r>
+                      <a:r>
+                        <a:rPr lang="en-US" altLang="ko-KR" sz="1700">
+                          <a:solidFill>
+                            <a:srgbClr val="000000"/>
+                          </a:solidFill>
+                        </a:rPr>
+                        <a:t> </a:t>
+                      </a:r>
+                      <a:r>
+                        <a:rPr lang="ko-KR" altLang="en-US" sz="1700">
+                          <a:solidFill>
+                            <a:srgbClr val="000000"/>
+                          </a:solidFill>
+                        </a:rPr>
+                        <a:t>이미지</a:t>
+                      </a:r>
+                      <a:endParaRPr lang="ko-KR" altLang="en-US" sz="1700">
+                        <a:solidFill>
+                          <a:srgbClr val="000000"/>
+                        </a:solidFill>
+                      </a:endParaRPr>
+                    </a:p>
+                  </a:txBody>
+                  <a:tcPr marL="91440" marR="91440">
+                    <a:lnL w="15240">
+                      <a:solidFill>
+                        <a:srgbClr val="000000">
+                          <a:alpha val="100000"/>
+                        </a:srgbClr>
+                      </a:solidFill>
+                      <a:prstDash val="solid"/>
+                    </a:lnL>
+                    <a:lnR w="15240">
+                      <a:solidFill>
+                        <a:srgbClr val="000000">
+                          <a:alpha val="100000"/>
+                        </a:srgbClr>
+                      </a:solidFill>
+                      <a:prstDash val="solid"/>
+                    </a:lnR>
+                    <a:lnT w="15240">
+                      <a:solidFill>
+                        <a:srgbClr val="000000">
+                          <a:alpha val="100000"/>
+                        </a:srgbClr>
+                      </a:solidFill>
+                      <a:prstDash val="solid"/>
+                    </a:lnT>
+                    <a:lnB w="15240">
+                      <a:solidFill>
+                        <a:srgbClr val="000000">
+                          <a:alpha val="100000"/>
+                        </a:srgbClr>
+                      </a:solidFill>
+                      <a:prstDash val="solid"/>
+                    </a:lnB>
+                    <a:solidFill>
+                      <a:schemeClr val="bg1">
+                        <a:alpha val="100000"/>
+                      </a:schemeClr>
+                    </a:solidFill>
+                  </a:tcPr>
+                </a:tc>
+                <a:tc>
+                  <a:txBody>
+                    <a:bodyPr/>
+                    <a:p>
+                      <a:pPr latinLnBrk="1">
+                        <a:defRPr/>
+                      </a:pPr>
+                      <a:r>
+                        <a:rPr lang="en-US" altLang="ko-KR" sz="1700">
+                          <a:solidFill>
+                            <a:srgbClr val="000000"/>
+                          </a:solidFill>
+                        </a:rPr>
+                        <a:t>book/{0} - pathparameter</a:t>
+                      </a:r>
+                      <a:endParaRPr lang="ko-KR" altLang="en-US" sz="1700">
+                        <a:solidFill>
+                          <a:srgbClr val="000000"/>
+                        </a:solidFill>
+                      </a:endParaRPr>
+                    </a:p>
+                  </a:txBody>
+                  <a:tcPr marL="91440" marR="91440">
+                    <a:lnL w="15240">
+                      <a:solidFill>
+                        <a:srgbClr val="000000">
+                          <a:alpha val="100000"/>
+                        </a:srgbClr>
+                      </a:solidFill>
+                      <a:prstDash val="solid"/>
+                    </a:lnL>
+                    <a:lnR w="15240">
+                      <a:solidFill>
+                        <a:srgbClr val="000000">
+                          <a:alpha val="100000"/>
+                        </a:srgbClr>
+                      </a:solidFill>
+                      <a:prstDash val="solid"/>
+                    </a:lnR>
+                    <a:lnT w="15240">
+                      <a:solidFill>
+                        <a:srgbClr val="000000">
+                          <a:alpha val="100000"/>
+                        </a:srgbClr>
+                      </a:solidFill>
+                      <a:prstDash val="solid"/>
+                    </a:lnT>
+                    <a:lnB w="15240">
+                      <a:solidFill>
+                        <a:srgbClr val="000000">
+                          <a:alpha val="100000"/>
+                        </a:srgbClr>
+                      </a:solidFill>
+                      <a:prstDash val="solid"/>
+                    </a:lnB>
+                    <a:solidFill>
+                      <a:schemeClr val="bg1">
+                        <a:alpha val="100000"/>
+                      </a:schemeClr>
+                    </a:solidFill>
+                  </a:tcPr>
+                </a:tc>
+                <a:tc>
+                  <a:txBody>
+                    <a:bodyPr/>
+                    <a:p>
+                      <a:pPr latinLnBrk="1">
+                        <a:defRPr/>
+                      </a:pPr>
+                      <a:r>
+                        <a:rPr lang="en-US" altLang="ko-KR" sz="1700">
+                          <a:solidFill>
+                            <a:srgbClr val="000000"/>
+                          </a:solidFill>
+                        </a:rPr>
+                        <a:t>GET</a:t>
                       </a:r>
                       <a:endParaRPr lang="ko-KR" altLang="en-US" sz="1700">
                         <a:solidFill>
@@ -8770,6 +9106,1211 @@
           <a:chExt cx="0" cy="0"/>
         </a:xfrm>
       </p:grpSpPr>
+      <p:graphicFrame>
+        <p:nvGraphicFramePr>
+          <p:cNvPr id="2" name="Table"/>
+          <p:cNvGraphicFramePr>
+            <a:graphicFrameLocks noGrp="1"/>
+          </p:cNvGraphicFramePr>
+          <p:nvPr/>
+        </p:nvGraphicFramePr>
+        <p:xfrm>
+          <a:off x="2032052" y="2377714"/>
+          <a:ext cx="8128000" cy="1854200"/>
+        </p:xfrm>
+        <a:graphic>
+          <a:graphicData uri="http://schemas.openxmlformats.org/drawingml/2006/table">
+            <a:tbl>
+              <a:tblPr firstRow="1" bandRow="1">
+                <a:tableStyleId>{01A66EDD-3DAB-4C5B-A090-DC80EC1FD486}</a:tableStyleId>
+              </a:tblPr>
+              <a:tblGrid>
+                <a:gridCol w="2709333"/>
+                <a:gridCol w="2709333"/>
+                <a:gridCol w="2709333"/>
+              </a:tblGrid>
+              <a:tr h="270210">
+                <a:tc gridSpan="3">
+                  <a:txBody>
+                    <a:bodyPr/>
+                    <a:p>
+                      <a:pPr latinLnBrk="1">
+                        <a:defRPr/>
+                      </a:pPr>
+                      <a:r>
+                        <a:rPr lang="ko-KR" altLang="en-US" sz="1700">
+                          <a:solidFill>
+                            <a:srgbClr val="000000"/>
+                          </a:solidFill>
+                        </a:rPr>
+                        <a:t>버튼</a:t>
+                      </a:r>
+                      <a:r>
+                        <a:rPr lang="en-US" altLang="ko-KR" sz="1700">
+                          <a:solidFill>
+                            <a:srgbClr val="000000"/>
+                          </a:solidFill>
+                        </a:rPr>
+                        <a:t> URL</a:t>
+                      </a:r>
+                      <a:endParaRPr lang="ko-KR" altLang="en-US" sz="1700">
+                        <a:solidFill>
+                          <a:srgbClr val="000000"/>
+                        </a:solidFill>
+                      </a:endParaRPr>
+                    </a:p>
+                  </a:txBody>
+                  <a:tcPr marL="91440" marR="91440">
+                    <a:lnL w="15240">
+                      <a:solidFill>
+                        <a:srgbClr val="000000">
+                          <a:alpha val="100000"/>
+                        </a:srgbClr>
+                      </a:solidFill>
+                      <a:prstDash val="solid"/>
+                    </a:lnL>
+                    <a:lnR w="15240">
+                      <a:solidFill>
+                        <a:srgbClr val="000000">
+                          <a:alpha val="100000"/>
+                        </a:srgbClr>
+                      </a:solidFill>
+                      <a:prstDash val="solid"/>
+                    </a:lnR>
+                    <a:lnT w="15240">
+                      <a:solidFill>
+                        <a:srgbClr val="000000">
+                          <a:alpha val="100000"/>
+                        </a:srgbClr>
+                      </a:solidFill>
+                      <a:prstDash val="solid"/>
+                    </a:lnT>
+                    <a:lnB w="15240">
+                      <a:solidFill>
+                        <a:srgbClr val="000000">
+                          <a:alpha val="100000"/>
+                        </a:srgbClr>
+                      </a:solidFill>
+                      <a:prstDash val="solid"/>
+                    </a:lnB>
+                    <a:solidFill>
+                      <a:schemeClr val="bg1">
+                        <a:alpha val="100000"/>
+                      </a:schemeClr>
+                    </a:solidFill>
+                  </a:tcPr>
+                </a:tc>
+                <a:tc hMerge="1">
+                  <a:txBody>
+                    <a:bodyPr/>
+                    <a:p>
+                      <a:pPr latinLnBrk="1">
+                        <a:defRPr/>
+                      </a:pPr>
+                      <a:endParaRPr lang="ko-KR" altLang="en-US"/>
+                    </a:p>
+                  </a:txBody>
+                  <a:tcPr marL="91440" marR="91440">
+                    <a:lnL w="15240">
+                      <a:solidFill>
+                        <a:srgbClr val="000000">
+                          <a:alpha val="100000"/>
+                        </a:srgbClr>
+                      </a:solidFill>
+                      <a:prstDash val="solid"/>
+                    </a:lnL>
+                    <a:lnR w="15240">
+                      <a:solidFill>
+                        <a:srgbClr val="000000">
+                          <a:alpha val="100000"/>
+                        </a:srgbClr>
+                      </a:solidFill>
+                      <a:prstDash val="solid"/>
+                    </a:lnR>
+                    <a:lnT w="15240">
+                      <a:solidFill>
+                        <a:srgbClr val="000000">
+                          <a:alpha val="100000"/>
+                        </a:srgbClr>
+                      </a:solidFill>
+                      <a:prstDash val="solid"/>
+                    </a:lnT>
+                    <a:lnB w="15240">
+                      <a:solidFill>
+                        <a:srgbClr val="000000">
+                          <a:alpha val="100000"/>
+                        </a:srgbClr>
+                      </a:solidFill>
+                      <a:prstDash val="solid"/>
+                    </a:lnB>
+                    <a:solidFill>
+                      <a:schemeClr val="bg1">
+                        <a:alpha val="100000"/>
+                      </a:schemeClr>
+                    </a:solidFill>
+                  </a:tcPr>
+                </a:tc>
+                <a:tc hMerge="1">
+                  <a:txBody>
+                    <a:bodyPr/>
+                    <a:p>
+                      <a:pPr latinLnBrk="1">
+                        <a:defRPr/>
+                      </a:pPr>
+                      <a:endParaRPr lang="ko-KR" altLang="en-US"/>
+                    </a:p>
+                  </a:txBody>
+                  <a:tcPr marL="91440" marR="91440">
+                    <a:lnL w="15240">
+                      <a:solidFill>
+                        <a:srgbClr val="000000">
+                          <a:alpha val="100000"/>
+                        </a:srgbClr>
+                      </a:solidFill>
+                      <a:prstDash val="solid"/>
+                    </a:lnL>
+                    <a:lnR w="15240">
+                      <a:solidFill>
+                        <a:srgbClr val="000000">
+                          <a:alpha val="100000"/>
+                        </a:srgbClr>
+                      </a:solidFill>
+                      <a:prstDash val="solid"/>
+                    </a:lnR>
+                    <a:lnT w="15240">
+                      <a:solidFill>
+                        <a:srgbClr val="000000">
+                          <a:alpha val="100000"/>
+                        </a:srgbClr>
+                      </a:solidFill>
+                      <a:prstDash val="solid"/>
+                    </a:lnT>
+                    <a:lnB w="15240">
+                      <a:solidFill>
+                        <a:srgbClr val="000000">
+                          <a:alpha val="100000"/>
+                        </a:srgbClr>
+                      </a:solidFill>
+                      <a:prstDash val="solid"/>
+                    </a:lnB>
+                    <a:solidFill>
+                      <a:schemeClr val="bg1">
+                        <a:alpha val="100000"/>
+                      </a:schemeClr>
+                    </a:solidFill>
+                  </a:tcPr>
+                </a:tc>
+              </a:tr>
+              <a:tr h="270210">
+                <a:tc>
+                  <a:txBody>
+                    <a:bodyPr/>
+                    <a:p>
+                      <a:pPr latinLnBrk="1">
+                        <a:defRPr/>
+                      </a:pPr>
+                      <a:r>
+                        <a:rPr lang="ko-KR" altLang="en-US" sz="1700" b="1">
+                          <a:solidFill>
+                            <a:srgbClr val="000000"/>
+                          </a:solidFill>
+                        </a:rPr>
+                        <a:t>버튼명</a:t>
+                      </a:r>
+                      <a:endParaRPr lang="ko-KR" altLang="en-US" sz="1700" b="1">
+                        <a:solidFill>
+                          <a:srgbClr val="000000"/>
+                        </a:solidFill>
+                      </a:endParaRPr>
+                    </a:p>
+                  </a:txBody>
+                  <a:tcPr marL="91440" marR="91440">
+                    <a:lnL w="15240">
+                      <a:solidFill>
+                        <a:srgbClr val="000000">
+                          <a:alpha val="100000"/>
+                        </a:srgbClr>
+                      </a:solidFill>
+                      <a:prstDash val="solid"/>
+                    </a:lnL>
+                    <a:lnR w="15240">
+                      <a:solidFill>
+                        <a:srgbClr val="000000">
+                          <a:alpha val="100000"/>
+                        </a:srgbClr>
+                      </a:solidFill>
+                      <a:prstDash val="solid"/>
+                    </a:lnR>
+                    <a:lnT w="15240">
+                      <a:solidFill>
+                        <a:srgbClr val="000000">
+                          <a:alpha val="100000"/>
+                        </a:srgbClr>
+                      </a:solidFill>
+                      <a:prstDash val="solid"/>
+                    </a:lnT>
+                    <a:lnB w="15240">
+                      <a:solidFill>
+                        <a:srgbClr val="000000">
+                          <a:alpha val="100000"/>
+                        </a:srgbClr>
+                      </a:solidFill>
+                      <a:prstDash val="solid"/>
+                    </a:lnB>
+                    <a:solidFill>
+                      <a:schemeClr val="bg1">
+                        <a:alpha val="100000"/>
+                      </a:schemeClr>
+                    </a:solidFill>
+                  </a:tcPr>
+                </a:tc>
+                <a:tc>
+                  <a:txBody>
+                    <a:bodyPr/>
+                    <a:p>
+                      <a:pPr latinLnBrk="1">
+                        <a:defRPr/>
+                      </a:pPr>
+                      <a:r>
+                        <a:rPr lang="en-US" altLang="ko-KR" sz="1700" b="1">
+                          <a:solidFill>
+                            <a:srgbClr val="000000"/>
+                          </a:solidFill>
+                        </a:rPr>
+                        <a:t>URL</a:t>
+                      </a:r>
+                      <a:endParaRPr lang="ko-KR" altLang="en-US" sz="1700" b="1">
+                        <a:solidFill>
+                          <a:srgbClr val="000000"/>
+                        </a:solidFill>
+                      </a:endParaRPr>
+                    </a:p>
+                  </a:txBody>
+                  <a:tcPr marL="91440" marR="91440">
+                    <a:lnL w="15240">
+                      <a:solidFill>
+                        <a:srgbClr val="000000">
+                          <a:alpha val="100000"/>
+                        </a:srgbClr>
+                      </a:solidFill>
+                      <a:prstDash val="solid"/>
+                    </a:lnL>
+                    <a:lnR w="15240">
+                      <a:solidFill>
+                        <a:srgbClr val="000000">
+                          <a:alpha val="100000"/>
+                        </a:srgbClr>
+                      </a:solidFill>
+                      <a:prstDash val="solid"/>
+                    </a:lnR>
+                    <a:lnT w="15240">
+                      <a:solidFill>
+                        <a:srgbClr val="000000">
+                          <a:alpha val="100000"/>
+                        </a:srgbClr>
+                      </a:solidFill>
+                      <a:prstDash val="solid"/>
+                    </a:lnT>
+                    <a:lnB w="15240">
+                      <a:solidFill>
+                        <a:srgbClr val="000000">
+                          <a:alpha val="100000"/>
+                        </a:srgbClr>
+                      </a:solidFill>
+                      <a:prstDash val="solid"/>
+                    </a:lnB>
+                    <a:solidFill>
+                      <a:schemeClr val="bg1">
+                        <a:alpha val="100000"/>
+                      </a:schemeClr>
+                    </a:solidFill>
+                  </a:tcPr>
+                </a:tc>
+                <a:tc>
+                  <a:txBody>
+                    <a:bodyPr/>
+                    <a:p>
+                      <a:pPr latinLnBrk="1">
+                        <a:defRPr/>
+                      </a:pPr>
+                      <a:r>
+                        <a:rPr lang="en-US" altLang="ko-KR" sz="1700" b="1">
+                          <a:solidFill>
+                            <a:srgbClr val="000000"/>
+                          </a:solidFill>
+                        </a:rPr>
+                        <a:t>METHOD</a:t>
+                      </a:r>
+                      <a:endParaRPr lang="ko-KR" altLang="en-US" sz="1700" b="1">
+                        <a:solidFill>
+                          <a:srgbClr val="000000"/>
+                        </a:solidFill>
+                      </a:endParaRPr>
+                    </a:p>
+                  </a:txBody>
+                  <a:tcPr marL="91440" marR="91440">
+                    <a:lnL w="15240">
+                      <a:solidFill>
+                        <a:srgbClr val="000000">
+                          <a:alpha val="100000"/>
+                        </a:srgbClr>
+                      </a:solidFill>
+                      <a:prstDash val="solid"/>
+                    </a:lnL>
+                    <a:lnR w="15240">
+                      <a:solidFill>
+                        <a:srgbClr val="000000">
+                          <a:alpha val="100000"/>
+                        </a:srgbClr>
+                      </a:solidFill>
+                      <a:prstDash val="solid"/>
+                    </a:lnR>
+                    <a:lnT w="15240">
+                      <a:solidFill>
+                        <a:srgbClr val="000000">
+                          <a:alpha val="100000"/>
+                        </a:srgbClr>
+                      </a:solidFill>
+                      <a:prstDash val="solid"/>
+                    </a:lnT>
+                    <a:lnB w="15240">
+                      <a:solidFill>
+                        <a:srgbClr val="000000">
+                          <a:alpha val="100000"/>
+                        </a:srgbClr>
+                      </a:solidFill>
+                      <a:prstDash val="solid"/>
+                    </a:lnB>
+                    <a:solidFill>
+                      <a:schemeClr val="bg1">
+                        <a:alpha val="100000"/>
+                      </a:schemeClr>
+                    </a:solidFill>
+                  </a:tcPr>
+                </a:tc>
+              </a:tr>
+              <a:tr h="270210">
+                <a:tc>
+                  <a:txBody>
+                    <a:bodyPr/>
+                    <a:p>
+                      <a:pPr latinLnBrk="1">
+                        <a:defRPr/>
+                      </a:pPr>
+                      <a:r>
+                        <a:rPr lang="ko-KR" altLang="en-US" sz="1700">
+                          <a:solidFill>
+                            <a:srgbClr val="000000"/>
+                          </a:solidFill>
+                        </a:rPr>
+                        <a:t>홈</a:t>
+                      </a:r>
+                      <a:endParaRPr lang="ko-KR" altLang="en-US" sz="1700">
+                        <a:solidFill>
+                          <a:srgbClr val="000000"/>
+                        </a:solidFill>
+                      </a:endParaRPr>
+                    </a:p>
+                  </a:txBody>
+                  <a:tcPr marL="91440" marR="91440">
+                    <a:lnL w="15240">
+                      <a:solidFill>
+                        <a:srgbClr val="000000">
+                          <a:alpha val="100000"/>
+                        </a:srgbClr>
+                      </a:solidFill>
+                      <a:prstDash val="solid"/>
+                    </a:lnL>
+                    <a:lnR w="15240">
+                      <a:solidFill>
+                        <a:srgbClr val="000000">
+                          <a:alpha val="100000"/>
+                        </a:srgbClr>
+                      </a:solidFill>
+                      <a:prstDash val="solid"/>
+                    </a:lnR>
+                    <a:lnT w="15240">
+                      <a:solidFill>
+                        <a:srgbClr val="000000">
+                          <a:alpha val="100000"/>
+                        </a:srgbClr>
+                      </a:solidFill>
+                      <a:prstDash val="solid"/>
+                    </a:lnT>
+                    <a:lnB w="15240">
+                      <a:solidFill>
+                        <a:srgbClr val="000000">
+                          <a:alpha val="100000"/>
+                        </a:srgbClr>
+                      </a:solidFill>
+                      <a:prstDash val="solid"/>
+                    </a:lnB>
+                    <a:solidFill>
+                      <a:schemeClr val="bg1">
+                        <a:alpha val="100000"/>
+                      </a:schemeClr>
+                    </a:solidFill>
+                  </a:tcPr>
+                </a:tc>
+                <a:tc>
+                  <a:txBody>
+                    <a:bodyPr/>
+                    <a:p>
+                      <a:pPr latinLnBrk="1">
+                        <a:defRPr/>
+                      </a:pPr>
+                      <a:r>
+                        <a:rPr lang="en-US" altLang="ko-KR" sz="1700">
+                          <a:solidFill>
+                            <a:srgbClr val="000000"/>
+                          </a:solidFill>
+                        </a:rPr>
+                        <a:t>front/main</a:t>
+                      </a:r>
+                      <a:endParaRPr lang="en-US" altLang="ko-KR" sz="1700">
+                        <a:solidFill>
+                          <a:srgbClr val="000000"/>
+                        </a:solidFill>
+                      </a:endParaRPr>
+                    </a:p>
+                    <a:p>
+                      <a:pPr latinLnBrk="1">
+                        <a:defRPr/>
+                      </a:pPr>
+                      <a:r>
+                        <a:rPr lang="en-US" altLang="ko-KR" sz="1700">
+                          <a:solidFill>
+                            <a:srgbClr val="000000"/>
+                          </a:solidFill>
+                        </a:rPr>
+                        <a:t>./front.html</a:t>
+                      </a:r>
+                      <a:endParaRPr lang="ko-KR" altLang="en-US" sz="1700">
+                        <a:solidFill>
+                          <a:srgbClr val="000000"/>
+                        </a:solidFill>
+                      </a:endParaRPr>
+                    </a:p>
+                  </a:txBody>
+                  <a:tcPr marL="91440" marR="91440">
+                    <a:lnL w="15240">
+                      <a:solidFill>
+                        <a:srgbClr val="000000">
+                          <a:alpha val="100000"/>
+                        </a:srgbClr>
+                      </a:solidFill>
+                      <a:prstDash val="solid"/>
+                    </a:lnL>
+                    <a:lnR w="15240">
+                      <a:solidFill>
+                        <a:srgbClr val="000000">
+                          <a:alpha val="100000"/>
+                        </a:srgbClr>
+                      </a:solidFill>
+                      <a:prstDash val="solid"/>
+                    </a:lnR>
+                    <a:lnT w="15240">
+                      <a:solidFill>
+                        <a:srgbClr val="000000">
+                          <a:alpha val="100000"/>
+                        </a:srgbClr>
+                      </a:solidFill>
+                      <a:prstDash val="solid"/>
+                    </a:lnT>
+                    <a:lnB w="15240">
+                      <a:solidFill>
+                        <a:srgbClr val="000000">
+                          <a:alpha val="100000"/>
+                        </a:srgbClr>
+                      </a:solidFill>
+                      <a:prstDash val="solid"/>
+                    </a:lnB>
+                    <a:solidFill>
+                      <a:schemeClr val="bg1">
+                        <a:alpha val="100000"/>
+                      </a:schemeClr>
+                    </a:solidFill>
+                  </a:tcPr>
+                </a:tc>
+                <a:tc>
+                  <a:txBody>
+                    <a:bodyPr/>
+                    <a:p>
+                      <a:pPr latinLnBrk="1">
+                        <a:defRPr/>
+                      </a:pPr>
+                      <a:r>
+                        <a:rPr lang="en-US" altLang="ko-KR" sz="1700">
+                          <a:solidFill>
+                            <a:srgbClr val="000000"/>
+                          </a:solidFill>
+                        </a:rPr>
+                        <a:t>GET</a:t>
+                      </a:r>
+                      <a:endParaRPr lang="ko-KR" altLang="en-US" sz="1700">
+                        <a:solidFill>
+                          <a:srgbClr val="000000"/>
+                        </a:solidFill>
+                      </a:endParaRPr>
+                    </a:p>
+                  </a:txBody>
+                  <a:tcPr marL="91440" marR="91440">
+                    <a:lnL w="15240">
+                      <a:solidFill>
+                        <a:srgbClr val="000000">
+                          <a:alpha val="100000"/>
+                        </a:srgbClr>
+                      </a:solidFill>
+                      <a:prstDash val="solid"/>
+                    </a:lnL>
+                    <a:lnR w="15240">
+                      <a:solidFill>
+                        <a:srgbClr val="000000">
+                          <a:alpha val="100000"/>
+                        </a:srgbClr>
+                      </a:solidFill>
+                      <a:prstDash val="solid"/>
+                    </a:lnR>
+                    <a:lnT w="15240">
+                      <a:solidFill>
+                        <a:srgbClr val="000000">
+                          <a:alpha val="100000"/>
+                        </a:srgbClr>
+                      </a:solidFill>
+                      <a:prstDash val="solid"/>
+                    </a:lnT>
+                    <a:lnB w="15240">
+                      <a:solidFill>
+                        <a:srgbClr val="000000">
+                          <a:alpha val="100000"/>
+                        </a:srgbClr>
+                      </a:solidFill>
+                      <a:prstDash val="solid"/>
+                    </a:lnB>
+                    <a:solidFill>
+                      <a:schemeClr val="bg1">
+                        <a:alpha val="100000"/>
+                      </a:schemeClr>
+                    </a:solidFill>
+                  </a:tcPr>
+                </a:tc>
+              </a:tr>
+              <a:tr h="270210">
+                <a:tc>
+                  <a:txBody>
+                    <a:bodyPr/>
+                    <a:p>
+                      <a:pPr latinLnBrk="1">
+                        <a:defRPr/>
+                      </a:pPr>
+                      <a:r>
+                        <a:rPr lang="ko-KR" altLang="en-US" sz="1700">
+                          <a:solidFill>
+                            <a:srgbClr val="000000"/>
+                          </a:solidFill>
+                        </a:rPr>
+                        <a:t>정보수정</a:t>
+                      </a:r>
+                      <a:endParaRPr lang="ko-KR" altLang="en-US" sz="1700">
+                        <a:solidFill>
+                          <a:srgbClr val="000000"/>
+                        </a:solidFill>
+                      </a:endParaRPr>
+                    </a:p>
+                  </a:txBody>
+                  <a:tcPr marL="91440" marR="91440">
+                    <a:lnL w="15240">
+                      <a:solidFill>
+                        <a:srgbClr val="000000">
+                          <a:alpha val="100000"/>
+                        </a:srgbClr>
+                      </a:solidFill>
+                      <a:prstDash val="solid"/>
+                    </a:lnL>
+                    <a:lnR w="15240">
+                      <a:solidFill>
+                        <a:srgbClr val="000000">
+                          <a:alpha val="100000"/>
+                        </a:srgbClr>
+                      </a:solidFill>
+                      <a:prstDash val="solid"/>
+                    </a:lnR>
+                    <a:lnT w="15240">
+                      <a:solidFill>
+                        <a:srgbClr val="000000">
+                          <a:alpha val="100000"/>
+                        </a:srgbClr>
+                      </a:solidFill>
+                      <a:prstDash val="solid"/>
+                    </a:lnT>
+                    <a:lnB w="15240">
+                      <a:solidFill>
+                        <a:srgbClr val="000000">
+                          <a:alpha val="100000"/>
+                        </a:srgbClr>
+                      </a:solidFill>
+                      <a:prstDash val="solid"/>
+                    </a:lnB>
+                    <a:solidFill>
+                      <a:schemeClr val="bg1">
+                        <a:alpha val="100000"/>
+                      </a:schemeClr>
+                    </a:solidFill>
+                  </a:tcPr>
+                </a:tc>
+                <a:tc>
+                  <a:txBody>
+                    <a:bodyPr/>
+                    <a:p>
+                      <a:pPr latinLnBrk="1">
+                        <a:defRPr/>
+                      </a:pPr>
+                      <a:r>
+                        <a:rPr lang="en-US" altLang="ko-KR" sz="1700">
+                          <a:solidFill>
+                            <a:srgbClr val="000000"/>
+                          </a:solidFill>
+                        </a:rPr>
+                        <a:t>update/checkPass</a:t>
+                      </a:r>
+                      <a:endParaRPr lang="ko-KR" altLang="en-US" sz="1700">
+                        <a:solidFill>
+                          <a:srgbClr val="000000"/>
+                        </a:solidFill>
+                      </a:endParaRPr>
+                    </a:p>
+                  </a:txBody>
+                  <a:tcPr marL="91440" marR="91440">
+                    <a:lnL w="15240">
+                      <a:solidFill>
+                        <a:srgbClr val="000000">
+                          <a:alpha val="100000"/>
+                        </a:srgbClr>
+                      </a:solidFill>
+                      <a:prstDash val="solid"/>
+                    </a:lnL>
+                    <a:lnR w="15240">
+                      <a:solidFill>
+                        <a:srgbClr val="000000">
+                          <a:alpha val="100000"/>
+                        </a:srgbClr>
+                      </a:solidFill>
+                      <a:prstDash val="solid"/>
+                    </a:lnR>
+                    <a:lnT w="15240">
+                      <a:solidFill>
+                        <a:srgbClr val="000000">
+                          <a:alpha val="100000"/>
+                        </a:srgbClr>
+                      </a:solidFill>
+                      <a:prstDash val="solid"/>
+                    </a:lnT>
+                    <a:lnB w="15240">
+                      <a:solidFill>
+                        <a:srgbClr val="000000">
+                          <a:alpha val="100000"/>
+                        </a:srgbClr>
+                      </a:solidFill>
+                      <a:prstDash val="solid"/>
+                    </a:lnB>
+                    <a:solidFill>
+                      <a:schemeClr val="bg1">
+                        <a:alpha val="100000"/>
+                      </a:schemeClr>
+                    </a:solidFill>
+                  </a:tcPr>
+                </a:tc>
+                <a:tc>
+                  <a:txBody>
+                    <a:bodyPr/>
+                    <a:p>
+                      <a:pPr latinLnBrk="1">
+                        <a:defRPr/>
+                      </a:pPr>
+                      <a:r>
+                        <a:rPr lang="en-US" altLang="ko-KR" sz="1700">
+                          <a:solidFill>
+                            <a:srgbClr val="000000"/>
+                          </a:solidFill>
+                        </a:rPr>
+                        <a:t>GET</a:t>
+                      </a:r>
+                      <a:endParaRPr lang="ko-KR" altLang="en-US" sz="1700">
+                        <a:solidFill>
+                          <a:srgbClr val="000000"/>
+                        </a:solidFill>
+                      </a:endParaRPr>
+                    </a:p>
+                  </a:txBody>
+                  <a:tcPr marL="91440" marR="91440">
+                    <a:lnL w="15240">
+                      <a:solidFill>
+                        <a:srgbClr val="000000">
+                          <a:alpha val="100000"/>
+                        </a:srgbClr>
+                      </a:solidFill>
+                      <a:prstDash val="solid"/>
+                    </a:lnL>
+                    <a:lnR w="15240">
+                      <a:solidFill>
+                        <a:srgbClr val="000000">
+                          <a:alpha val="100000"/>
+                        </a:srgbClr>
+                      </a:solidFill>
+                      <a:prstDash val="solid"/>
+                    </a:lnR>
+                    <a:lnT w="15240">
+                      <a:solidFill>
+                        <a:srgbClr val="000000">
+                          <a:alpha val="100000"/>
+                        </a:srgbClr>
+                      </a:solidFill>
+                      <a:prstDash val="solid"/>
+                    </a:lnT>
+                    <a:lnB w="15240">
+                      <a:solidFill>
+                        <a:srgbClr val="000000">
+                          <a:alpha val="100000"/>
+                        </a:srgbClr>
+                      </a:solidFill>
+                      <a:prstDash val="solid"/>
+                    </a:lnB>
+                    <a:solidFill>
+                      <a:schemeClr val="bg1">
+                        <a:alpha val="100000"/>
+                      </a:schemeClr>
+                    </a:solidFill>
+                  </a:tcPr>
+                </a:tc>
+              </a:tr>
+              <a:tr h="270210">
+                <a:tc>
+                  <a:txBody>
+                    <a:bodyPr/>
+                    <a:p>
+                      <a:pPr latinLnBrk="1">
+                        <a:defRPr/>
+                      </a:pPr>
+                      <a:r>
+                        <a:rPr lang="ko-KR" altLang="en-US" sz="1700">
+                          <a:solidFill>
+                            <a:srgbClr val="000000"/>
+                          </a:solidFill>
+                        </a:rPr>
+                        <a:t>예약</a:t>
+                      </a:r>
+                      <a:endParaRPr lang="ko-KR" altLang="en-US" sz="1700">
+                        <a:solidFill>
+                          <a:srgbClr val="000000"/>
+                        </a:solidFill>
+                      </a:endParaRPr>
+                    </a:p>
+                  </a:txBody>
+                  <a:tcPr marL="91440" marR="91440">
+                    <a:lnL w="15240">
+                      <a:solidFill>
+                        <a:srgbClr val="000000">
+                          <a:alpha val="100000"/>
+                        </a:srgbClr>
+                      </a:solidFill>
+                      <a:prstDash val="solid"/>
+                    </a:lnL>
+                    <a:lnR w="15240">
+                      <a:solidFill>
+                        <a:srgbClr val="000000">
+                          <a:alpha val="100000"/>
+                        </a:srgbClr>
+                      </a:solidFill>
+                      <a:prstDash val="solid"/>
+                    </a:lnR>
+                    <a:lnT w="15240">
+                      <a:solidFill>
+                        <a:srgbClr val="000000">
+                          <a:alpha val="100000"/>
+                        </a:srgbClr>
+                      </a:solidFill>
+                      <a:prstDash val="solid"/>
+                    </a:lnT>
+                    <a:lnB w="15240">
+                      <a:solidFill>
+                        <a:srgbClr val="000000">
+                          <a:alpha val="100000"/>
+                        </a:srgbClr>
+                      </a:solidFill>
+                      <a:prstDash val="solid"/>
+                    </a:lnB>
+                    <a:solidFill>
+                      <a:schemeClr val="bg1">
+                        <a:alpha val="100000"/>
+                      </a:schemeClr>
+                    </a:solidFill>
+                  </a:tcPr>
+                </a:tc>
+                <a:tc>
+                  <a:txBody>
+                    <a:bodyPr/>
+                    <a:p>
+                      <a:pPr latinLnBrk="1">
+                        <a:defRPr/>
+                      </a:pPr>
+                      <a:r>
+                        <a:rPr lang="en-US" altLang="ko-KR" sz="1700">
+                          <a:solidFill>
+                            <a:srgbClr val="000000"/>
+                          </a:solidFill>
+                        </a:rPr>
+                        <a:t>my_library/reservation</a:t>
+                      </a:r>
+                      <a:endParaRPr lang="ko-KR" altLang="en-US" sz="1700">
+                        <a:solidFill>
+                          <a:srgbClr val="000000"/>
+                        </a:solidFill>
+                      </a:endParaRPr>
+                    </a:p>
+                  </a:txBody>
+                  <a:tcPr marL="91440" marR="91440">
+                    <a:lnL w="15240">
+                      <a:solidFill>
+                        <a:srgbClr val="000000">
+                          <a:alpha val="100000"/>
+                        </a:srgbClr>
+                      </a:solidFill>
+                      <a:prstDash val="solid"/>
+                    </a:lnL>
+                    <a:lnR w="15240">
+                      <a:solidFill>
+                        <a:srgbClr val="000000">
+                          <a:alpha val="100000"/>
+                        </a:srgbClr>
+                      </a:solidFill>
+                      <a:prstDash val="solid"/>
+                    </a:lnR>
+                    <a:lnT w="15240">
+                      <a:solidFill>
+                        <a:srgbClr val="000000">
+                          <a:alpha val="100000"/>
+                        </a:srgbClr>
+                      </a:solidFill>
+                      <a:prstDash val="solid"/>
+                    </a:lnT>
+                    <a:lnB w="15240">
+                      <a:solidFill>
+                        <a:srgbClr val="000000">
+                          <a:alpha val="100000"/>
+                        </a:srgbClr>
+                      </a:solidFill>
+                      <a:prstDash val="solid"/>
+                    </a:lnB>
+                    <a:solidFill>
+                      <a:schemeClr val="bg1">
+                        <a:alpha val="100000"/>
+                      </a:schemeClr>
+                    </a:solidFill>
+                  </a:tcPr>
+                </a:tc>
+                <a:tc>
+                  <a:txBody>
+                    <a:bodyPr/>
+                    <a:p>
+                      <a:pPr latinLnBrk="1">
+                        <a:defRPr/>
+                      </a:pPr>
+                      <a:r>
+                        <a:rPr lang="en-US" altLang="ko-KR" sz="1700">
+                          <a:solidFill>
+                            <a:srgbClr val="000000"/>
+                          </a:solidFill>
+                        </a:rPr>
+                        <a:t>POST</a:t>
+                      </a:r>
+                      <a:endParaRPr lang="ko-KR" altLang="en-US" sz="1700">
+                        <a:solidFill>
+                          <a:srgbClr val="000000"/>
+                        </a:solidFill>
+                      </a:endParaRPr>
+                    </a:p>
+                  </a:txBody>
+                  <a:tcPr marL="91440" marR="91440">
+                    <a:lnL w="15240">
+                      <a:solidFill>
+                        <a:srgbClr val="000000">
+                          <a:alpha val="100000"/>
+                        </a:srgbClr>
+                      </a:solidFill>
+                      <a:prstDash val="solid"/>
+                    </a:lnL>
+                    <a:lnR w="15240">
+                      <a:solidFill>
+                        <a:srgbClr val="000000">
+                          <a:alpha val="100000"/>
+                        </a:srgbClr>
+                      </a:solidFill>
+                      <a:prstDash val="solid"/>
+                    </a:lnR>
+                    <a:lnT w="15240">
+                      <a:solidFill>
+                        <a:srgbClr val="000000">
+                          <a:alpha val="100000"/>
+                        </a:srgbClr>
+                      </a:solidFill>
+                      <a:prstDash val="solid"/>
+                    </a:lnT>
+                    <a:lnB w="15240">
+                      <a:solidFill>
+                        <a:srgbClr val="000000">
+                          <a:alpha val="100000"/>
+                        </a:srgbClr>
+                      </a:solidFill>
+                      <a:prstDash val="solid"/>
+                    </a:lnB>
+                    <a:solidFill>
+                      <a:schemeClr val="bg1">
+                        <a:alpha val="100000"/>
+                      </a:schemeClr>
+                    </a:solidFill>
+                  </a:tcPr>
+                </a:tc>
+              </a:tr>
+              <a:tr h="270210">
+                <a:tc>
+                  <a:txBody>
+                    <a:bodyPr/>
+                    <a:p>
+                      <a:pPr latinLnBrk="1">
+                        <a:defRPr/>
+                      </a:pPr>
+                      <a:r>
+                        <a:rPr lang="ko-KR" altLang="en-US" sz="1700">
+                          <a:solidFill>
+                            <a:srgbClr val="000000"/>
+                          </a:solidFill>
+                        </a:rPr>
+                        <a:t>상호대차</a:t>
+                      </a:r>
+                      <a:endParaRPr lang="ko-KR" altLang="en-US" sz="1700">
+                        <a:solidFill>
+                          <a:srgbClr val="000000"/>
+                        </a:solidFill>
+                      </a:endParaRPr>
+                    </a:p>
+                  </a:txBody>
+                  <a:tcPr marL="91440" marR="91440">
+                    <a:lnL w="15240">
+                      <a:solidFill>
+                        <a:srgbClr val="000000">
+                          <a:alpha val="100000"/>
+                        </a:srgbClr>
+                      </a:solidFill>
+                      <a:prstDash val="solid"/>
+                    </a:lnL>
+                    <a:lnR w="15240">
+                      <a:solidFill>
+                        <a:srgbClr val="000000">
+                          <a:alpha val="100000"/>
+                        </a:srgbClr>
+                      </a:solidFill>
+                      <a:prstDash val="solid"/>
+                    </a:lnR>
+                    <a:lnT w="15240">
+                      <a:solidFill>
+                        <a:srgbClr val="000000">
+                          <a:alpha val="100000"/>
+                        </a:srgbClr>
+                      </a:solidFill>
+                      <a:prstDash val="solid"/>
+                    </a:lnT>
+                    <a:lnB w="15240">
+                      <a:solidFill>
+                        <a:srgbClr val="000000">
+                          <a:alpha val="100000"/>
+                        </a:srgbClr>
+                      </a:solidFill>
+                      <a:prstDash val="solid"/>
+                    </a:lnB>
+                    <a:solidFill>
+                      <a:schemeClr val="bg1">
+                        <a:alpha val="100000"/>
+                      </a:schemeClr>
+                    </a:solidFill>
+                  </a:tcPr>
+                </a:tc>
+                <a:tc>
+                  <a:txBody>
+                    <a:bodyPr/>
+                    <a:p>
+                      <a:pPr latinLnBrk="1">
+                        <a:defRPr/>
+                      </a:pPr>
+                      <a:r>
+                        <a:rPr lang="en-US" altLang="ko-KR" sz="1700">
+                          <a:solidFill>
+                            <a:srgbClr val="000000"/>
+                          </a:solidFill>
+                        </a:rPr>
+                        <a:t>my_library/interlibrary</a:t>
+                      </a:r>
+                      <a:endParaRPr lang="en-US" altLang="ko-KR" sz="1700">
+                        <a:solidFill>
+                          <a:srgbClr val="000000"/>
+                        </a:solidFill>
+                      </a:endParaRPr>
+                    </a:p>
+                    <a:p>
+                      <a:pPr latinLnBrk="1">
+                        <a:defRPr/>
+                      </a:pPr>
+                      <a:r>
+                        <a:rPr lang="en-US" altLang="ko-KR" sz="1700">
+                          <a:solidFill>
+                            <a:srgbClr val="000000"/>
+                          </a:solidFill>
+                        </a:rPr>
+                        <a:t>./clickInterLibrary.html</a:t>
+                      </a:r>
+                      <a:endParaRPr lang="ko-KR" altLang="en-US" sz="1700">
+                        <a:solidFill>
+                          <a:srgbClr val="000000"/>
+                        </a:solidFill>
+                      </a:endParaRPr>
+                    </a:p>
+                  </a:txBody>
+                  <a:tcPr marL="91440" marR="91440">
+                    <a:lnL w="15240">
+                      <a:solidFill>
+                        <a:srgbClr val="000000">
+                          <a:alpha val="100000"/>
+                        </a:srgbClr>
+                      </a:solidFill>
+                      <a:prstDash val="solid"/>
+                    </a:lnL>
+                    <a:lnR w="15240">
+                      <a:solidFill>
+                        <a:srgbClr val="000000">
+                          <a:alpha val="100000"/>
+                        </a:srgbClr>
+                      </a:solidFill>
+                      <a:prstDash val="solid"/>
+                    </a:lnR>
+                    <a:lnT w="15240">
+                      <a:solidFill>
+                        <a:srgbClr val="000000">
+                          <a:alpha val="100000"/>
+                        </a:srgbClr>
+                      </a:solidFill>
+                      <a:prstDash val="solid"/>
+                    </a:lnT>
+                    <a:lnB w="15240">
+                      <a:solidFill>
+                        <a:srgbClr val="000000">
+                          <a:alpha val="100000"/>
+                        </a:srgbClr>
+                      </a:solidFill>
+                      <a:prstDash val="solid"/>
+                    </a:lnB>
+                    <a:solidFill>
+                      <a:schemeClr val="bg1">
+                        <a:alpha val="100000"/>
+                      </a:schemeClr>
+                    </a:solidFill>
+                  </a:tcPr>
+                </a:tc>
+                <a:tc>
+                  <a:txBody>
+                    <a:bodyPr/>
+                    <a:p>
+                      <a:pPr latinLnBrk="1">
+                        <a:defRPr/>
+                      </a:pPr>
+                      <a:r>
+                        <a:rPr lang="en-US" altLang="ko-KR" sz="1700">
+                          <a:solidFill>
+                            <a:srgbClr val="000000"/>
+                          </a:solidFill>
+                        </a:rPr>
+                        <a:t>GET</a:t>
+                      </a:r>
+                      <a:endParaRPr lang="ko-KR" altLang="en-US" sz="1700">
+                        <a:solidFill>
+                          <a:srgbClr val="000000"/>
+                        </a:solidFill>
+                      </a:endParaRPr>
+                    </a:p>
+                  </a:txBody>
+                  <a:tcPr marL="91440" marR="91440">
+                    <a:lnL w="15240">
+                      <a:solidFill>
+                        <a:srgbClr val="000000">
+                          <a:alpha val="100000"/>
+                        </a:srgbClr>
+                      </a:solidFill>
+                      <a:prstDash val="solid"/>
+                    </a:lnL>
+                    <a:lnR w="15240">
+                      <a:solidFill>
+                        <a:srgbClr val="000000">
+                          <a:alpha val="100000"/>
+                        </a:srgbClr>
+                      </a:solidFill>
+                      <a:prstDash val="solid"/>
+                    </a:lnR>
+                    <a:lnT w="15240">
+                      <a:solidFill>
+                        <a:srgbClr val="000000">
+                          <a:alpha val="100000"/>
+                        </a:srgbClr>
+                      </a:solidFill>
+                      <a:prstDash val="solid"/>
+                    </a:lnT>
+                    <a:lnB w="15240">
+                      <a:solidFill>
+                        <a:srgbClr val="000000">
+                          <a:alpha val="100000"/>
+                        </a:srgbClr>
+                      </a:solidFill>
+                      <a:prstDash val="solid"/>
+                    </a:lnB>
+                    <a:solidFill>
+                      <a:schemeClr val="bg1">
+                        <a:alpha val="100000"/>
+                      </a:schemeClr>
+                    </a:solidFill>
+                  </a:tcPr>
+                </a:tc>
+              </a:tr>
+            </a:tbl>
+          </a:graphicData>
+        </a:graphic>
+      </p:graphicFrame>
+    </p:spTree>
+    <p:extLst>
+      <p:ext uri="{BB962C8B-B14F-4D97-AF65-F5344CB8AC3E}">
+        <p14:creationId xmlns:p14="http://schemas.microsoft.com/office/powerpoint/2010/main" val="707992210"/>
+      </p:ext>
+    </p:extLst>
+  </p:cSld>
+  <p:clrMapOvr>
+    <a:masterClrMapping/>
+  </p:clrMapOvr>
+</p:sld>
+</file>
+
+<file path=ppt/slides/slide15.xml><?xml version="1.0" encoding="utf-8"?>
+<p:sld xmlns:r="http://schemas.openxmlformats.org/officeDocument/2006/relationships" xmlns:c="http://schemas.openxmlformats.org/drawingml/2006/chart" xmlns:a="http://schemas.openxmlformats.org/drawingml/2006/main" xmlns:dgm="http://schemas.openxmlformats.org/drawingml/2006/diagram" xmlns:dsp="http://schemas.microsoft.com/office/drawing/2008/diagram" xmlns:p="http://schemas.openxmlformats.org/presentationml/2006/main">
+  <p:cSld>
+    <p:spTree>
+      <p:nvGrpSpPr>
+        <p:cNvPr id="1" name=""/>
+        <p:cNvGrpSpPr/>
+        <p:nvPr/>
+      </p:nvGrpSpPr>
+      <p:grpSpPr>
+        <a:xfrm>
+          <a:off x="0" y="0"/>
+          <a:ext cx="0" cy="0"/>
+          <a:chOff x="0" y="0"/>
+          <a:chExt cx="0" cy="0"/>
+        </a:xfrm>
+      </p:grpSpPr>
       <p:sp>
         <p:nvSpPr>
           <p:cNvPr id="2" name="prstName"/>
@@ -9376,6 +10917,118 @@
           </a:graphicData>
         </a:graphic>
       </p:graphicFrame>
+      <p:sp>
+        <p:nvSpPr>
+          <p:cNvPr id="6" name="prstName"/>
+          <p:cNvSpPr/>
+          <p:nvPr/>
+        </p:nvSpPr>
+        <p:spPr>
+          <a:xfrm>
+            <a:off x="10856386" y="-1996"/>
+            <a:ext cx="1334772" cy="618553"/>
+          </a:xfrm>
+          <a:prstGeom prst="roundRect">
+            <a:avLst>
+              <a:gd name="adj" fmla="val 16667"/>
+            </a:avLst>
+          </a:prstGeom>
+          <a:noFill/>
+        </p:spPr>
+        <p:style>
+          <a:lnRef idx="2">
+            <a:schemeClr val="accent1">
+              <a:shade val="20000"/>
+            </a:schemeClr>
+          </a:lnRef>
+          <a:fillRef idx="1">
+            <a:schemeClr val="accent1"/>
+          </a:fillRef>
+          <a:effectRef idx="0">
+            <a:schemeClr val="accent1"/>
+          </a:effectRef>
+          <a:fontRef idx="minor">
+            <a:schemeClr val="lt1"/>
+          </a:fontRef>
+        </p:style>
+        <p:txBody>
+          <a:bodyPr anchor="ctr"/>
+          <a:p>
+            <a:pPr algn="ctr">
+              <a:defRPr/>
+            </a:pPr>
+            <a:r>
+              <a:rPr lang="ko-KR" altLang="en-US">
+                <a:solidFill>
+                  <a:srgbClr val="000000"/>
+                </a:solidFill>
+              </a:rPr>
+              <a:t>정보수정</a:t>
+            </a:r>
+            <a:endParaRPr lang="ko-KR" altLang="en-US">
+              <a:solidFill>
+                <a:srgbClr val="000000"/>
+              </a:solidFill>
+            </a:endParaRPr>
+          </a:p>
+        </p:txBody>
+      </p:sp>
+      <p:sp>
+        <p:nvSpPr>
+          <p:cNvPr id="7" name="prstName"/>
+          <p:cNvSpPr/>
+          <p:nvPr/>
+        </p:nvSpPr>
+        <p:spPr>
+          <a:xfrm>
+            <a:off x="10170908" y="10393"/>
+            <a:ext cx="685388" cy="617718"/>
+          </a:xfrm>
+          <a:prstGeom prst="roundRect">
+            <a:avLst>
+              <a:gd name="adj" fmla="val 16667"/>
+            </a:avLst>
+          </a:prstGeom>
+          <a:noFill/>
+        </p:spPr>
+        <p:style>
+          <a:lnRef idx="2">
+            <a:schemeClr val="accent1">
+              <a:shade val="20000"/>
+            </a:schemeClr>
+          </a:lnRef>
+          <a:fillRef idx="1">
+            <a:schemeClr val="accent1"/>
+          </a:fillRef>
+          <a:effectRef idx="0">
+            <a:schemeClr val="accent1"/>
+          </a:effectRef>
+          <a:fontRef idx="minor">
+            <a:schemeClr val="lt1"/>
+          </a:fontRef>
+        </p:style>
+        <p:txBody>
+          <a:bodyPr anchor="ctr"/>
+          <a:p>
+            <a:pPr algn="ctr">
+              <a:defRPr/>
+            </a:pPr>
+            <a:r>
+              <a:rPr lang="ko-KR" altLang="en-US">
+                <a:solidFill>
+                  <a:srgbClr val="000000"/>
+                </a:solidFill>
+              </a:rPr>
+              <a:t>홈</a:t>
+            </a:r>
+            <a:endParaRPr lang="ko-KR" altLang="en-US">
+              <a:solidFill>
+                <a:srgbClr val="000000"/>
+              </a:solidFill>
+            </a:endParaRPr>
+          </a:p>
+        </p:txBody>
+      </p:sp>
     </p:spTree>
     <p:extLst>
       <p:ext uri="{BB962C8B-B14F-4D97-AF65-F5344CB8AC3E}">
@@ -9389,7 +11042,7 @@
 </p:sld>
 </file>
 
-<file path=ppt/slides/slide15.xml><?xml version="1.0" encoding="utf-8"?>
+<file path=ppt/slides/slide16.xml><?xml version="1.0" encoding="utf-8"?>
 <p:sld xmlns:r="http://schemas.openxmlformats.org/officeDocument/2006/relationships" xmlns:c="http://schemas.openxmlformats.org/drawingml/2006/chart" xmlns:a="http://schemas.openxmlformats.org/drawingml/2006/main" xmlns:dgm="http://schemas.openxmlformats.org/drawingml/2006/diagram" xmlns:dsp="http://schemas.microsoft.com/office/drawing/2008/diagram" xmlns:p="http://schemas.openxmlformats.org/presentationml/2006/main">
   <p:cSld>
     <p:spTree>
@@ -9805,7 +11458,7 @@
                         </a:rPr>
                         <a:t>홈</a:t>
                       </a:r>
-                      <a:endParaRPr lang="ko-KR" altLang="en-US" sz="1700">
+                      <a:endParaRPr lang="ko-KR" altLang="en-US" sz="1700" b="1">
                         <a:solidFill>
                           <a:srgbClr val="000000"/>
                         </a:solidFill>
@@ -9867,7 +11520,25 @@
                         </a:rPr>
                         <a:t>front/main</a:t>
                       </a:r>
-                      <a:endParaRPr lang="ko-KR" altLang="en-US" sz="1700">
+                      <a:endParaRPr lang="en-US" altLang="ko-KR" sz="1700">
+                        <a:solidFill>
+                          <a:srgbClr val="000000"/>
+                        </a:solidFill>
+                      </a:endParaRPr>
+                    </a:p>
+                    <a:p>
+                      <a:pPr latinLnBrk="1">
+                        <a:defRPr/>
+                      </a:pPr>
+                      <a:r>
+                        <a:rPr lang="en-US" altLang="ko-KR" sz="1700">
+                          <a:solidFill>
+                            <a:srgbClr val="000000"/>
+                          </a:solidFill>
+                        </a:rPr>
+                        <a:t>./front.html</a:t>
+                      </a:r>
+                      <a:endParaRPr lang="ko-KR" altLang="en-US" sz="1700" b="1">
                         <a:solidFill>
                           <a:srgbClr val="000000"/>
                         </a:solidFill>
@@ -9929,7 +11600,7 @@
                         </a:rPr>
                         <a:t>GET</a:t>
                       </a:r>
-                      <a:endParaRPr lang="ko-KR" altLang="en-US" sz="1700">
+                      <a:endParaRPr lang="ko-KR" altLang="en-US" sz="1700" b="1">
                         <a:solidFill>
                           <a:srgbClr val="000000"/>
                         </a:solidFill>
@@ -9993,7 +11664,7 @@
                         </a:rPr>
                         <a:t>정보수정</a:t>
                       </a:r>
-                      <a:endParaRPr lang="ko-KR" altLang="en-US" sz="1700">
+                      <a:endParaRPr lang="ko-KR" altLang="en-US" sz="1700" b="1">
                         <a:solidFill>
                           <a:srgbClr val="000000"/>
                         </a:solidFill>
@@ -10053,9 +11724,9 @@
                             <a:srgbClr val="000000"/>
                           </a:solidFill>
                         </a:rPr>
-                        <a:t>update/main</a:t>
+                        <a:t>update/checkPass</a:t>
                       </a:r>
-                      <a:endParaRPr lang="ko-KR" altLang="en-US" sz="1700">
+                      <a:endParaRPr lang="ko-KR" altLang="en-US" sz="1700" b="1">
                         <a:solidFill>
                           <a:srgbClr val="000000"/>
                         </a:solidFill>
@@ -10115,9 +11786,9 @@
                             <a:srgbClr val="000000"/>
                           </a:solidFill>
                         </a:rPr>
-                        <a:t>PATCH</a:t>
+                        <a:t>GET</a:t>
                       </a:r>
-                      <a:endParaRPr lang="ko-KR" altLang="en-US" sz="1700">
+                      <a:endParaRPr lang="ko-KR" altLang="en-US" sz="1700" b="1">
                         <a:solidFill>
                           <a:srgbClr val="000000"/>
                         </a:solidFill>
@@ -10179,7 +11850,7 @@
                             <a:srgbClr val="000000"/>
                           </a:solidFill>
                         </a:rPr>
-                        <a:t>예약</a:t>
+                        <a:t>확인</a:t>
                       </a:r>
                       <a:endParaRPr lang="ko-KR" altLang="en-US" sz="1700">
                         <a:solidFill>
@@ -10241,7 +11912,25 @@
                             <a:srgbClr val="000000"/>
                           </a:solidFill>
                         </a:rPr>
-                        <a:t>my_library/reservation</a:t>
+                        <a:t>my_library/interlibrary</a:t>
+                      </a:r>
+                      <a:endParaRPr lang="en-US" altLang="ko-KR" sz="1700">
+                        <a:solidFill>
+                          <a:srgbClr val="000000"/>
+                        </a:solidFill>
+                      </a:endParaRPr>
+                    </a:p>
+                    <a:p>
+                      <a:pPr latinLnBrk="1">
+                        <a:defRPr/>
+                      </a:pPr>
+                      <a:r>
+                        <a:rPr lang="en-US" altLang="ko-KR" sz="1700">
+                          <a:solidFill>
+                            <a:srgbClr val="000000"/>
+                          </a:solidFill>
+                        </a:rPr>
+                        <a:t>/selection</a:t>
                       </a:r>
                       <a:endParaRPr lang="ko-KR" altLang="en-US" sz="1700">
                         <a:solidFill>
@@ -10367,7 +12056,7 @@
                             <a:srgbClr val="000000"/>
                           </a:solidFill>
                         </a:rPr>
-                        <a:t>상호대차</a:t>
+                        <a:t>취소</a:t>
                       </a:r>
                       <a:endParaRPr lang="ko-KR" altLang="en-US" sz="1700">
                         <a:solidFill>
@@ -10429,7 +12118,7 @@
                             <a:srgbClr val="000000"/>
                           </a:solidFill>
                         </a:rPr>
-                        <a:t>my_library/interlibrary</a:t>
+                        <a:t>book/{0} - pathparameter</a:t>
                       </a:r>
                       <a:endParaRPr lang="ko-KR" altLang="en-US" sz="1700">
                         <a:solidFill>
@@ -10491,7 +12180,7 @@
                             <a:srgbClr val="000000"/>
                           </a:solidFill>
                         </a:rPr>
-                        <a:t>POST</a:t>
+                        <a:t>GET</a:t>
                       </a:r>
                       <a:endParaRPr lang="ko-KR" altLang="en-US" sz="1700">
                         <a:solidFill>
@@ -10558,7 +12247,7 @@
 </p:sld>
 </file>
 
-<file path=ppt/slides/slide16.xml><?xml version="1.0" encoding="utf-8"?>
+<file path=ppt/slides/slide17.xml><?xml version="1.0" encoding="utf-8"?>
 <p:sld xmlns:r="http://schemas.openxmlformats.org/officeDocument/2006/relationships" xmlns:c="http://schemas.openxmlformats.org/drawingml/2006/chart" xmlns:a="http://schemas.openxmlformats.org/drawingml/2006/main" xmlns:dgm="http://schemas.openxmlformats.org/drawingml/2006/diagram" xmlns:dsp="http://schemas.microsoft.com/office/drawing/2008/diagram" xmlns:p="http://schemas.openxmlformats.org/presentationml/2006/main">
   <p:cSld>
     <p:spTree>
@@ -11782,7 +13471,7 @@
 </p:sld>
 </file>
 
-<file path=ppt/slides/slide17.xml><?xml version="1.0" encoding="utf-8"?>
+<file path=ppt/slides/slide18.xml><?xml version="1.0" encoding="utf-8"?>
 <p:sld xmlns:r="http://schemas.openxmlformats.org/officeDocument/2006/relationships" xmlns:c="http://schemas.openxmlformats.org/drawingml/2006/chart" xmlns:a="http://schemas.openxmlformats.org/drawingml/2006/main" xmlns:dgm="http://schemas.openxmlformats.org/drawingml/2006/diagram" xmlns:dsp="http://schemas.microsoft.com/office/drawing/2008/diagram" xmlns:p="http://schemas.openxmlformats.org/presentationml/2006/main">
   <p:cSld>
     <p:spTree>
@@ -12260,6 +13949,24 @@
                         </a:rPr>
                         <a:t>front/main</a:t>
                       </a:r>
+                      <a:endParaRPr lang="en-US" altLang="ko-KR" sz="1700">
+                        <a:solidFill>
+                          <a:srgbClr val="000000"/>
+                        </a:solidFill>
+                      </a:endParaRPr>
+                    </a:p>
+                    <a:p>
+                      <a:pPr latinLnBrk="1">
+                        <a:defRPr/>
+                      </a:pPr>
+                      <a:r>
+                        <a:rPr lang="en-US" altLang="ko-KR" sz="1700">
+                          <a:solidFill>
+                            <a:srgbClr val="000000"/>
+                          </a:solidFill>
+                        </a:rPr>
+                        <a:t>./front.html</a:t>
+                      </a:r>
                       <a:endParaRPr lang="ko-KR" altLang="en-US" sz="1700">
                         <a:solidFill>
                           <a:srgbClr val="000000"/>
@@ -12446,195 +14153,7 @@
                             <a:srgbClr val="000000"/>
                           </a:solidFill>
                         </a:rPr>
-                        <a:t>update/main</a:t>
-                      </a:r>
-                      <a:endParaRPr lang="ko-KR" altLang="en-US" sz="1700">
-                        <a:solidFill>
-                          <a:srgbClr val="000000"/>
-                        </a:solidFill>
-                      </a:endParaRPr>
-                    </a:p>
-                  </a:txBody>
-                  <a:tcPr marL="91440" marR="91440">
-                    <a:lnL w="15240">
-                      <a:solidFill>
-                        <a:srgbClr val="000000">
-                          <a:alpha val="100000"/>
-                        </a:srgbClr>
-                      </a:solidFill>
-                      <a:prstDash val="solid"/>
-                    </a:lnL>
-                    <a:lnR w="15240">
-                      <a:solidFill>
-                        <a:srgbClr val="000000">
-                          <a:alpha val="100000"/>
-                        </a:srgbClr>
-                      </a:solidFill>
-                      <a:prstDash val="solid"/>
-                    </a:lnR>
-                    <a:lnT w="15240">
-                      <a:solidFill>
-                        <a:srgbClr val="000000">
-                          <a:alpha val="100000"/>
-                        </a:srgbClr>
-                      </a:solidFill>
-                      <a:prstDash val="solid"/>
-                    </a:lnT>
-                    <a:lnB w="15240">
-                      <a:solidFill>
-                        <a:srgbClr val="000000">
-                          <a:alpha val="100000"/>
-                        </a:srgbClr>
-                      </a:solidFill>
-                      <a:prstDash val="solid"/>
-                    </a:lnB>
-                    <a:solidFill>
-                      <a:schemeClr val="bg1">
-                        <a:alpha val="100000"/>
-                      </a:schemeClr>
-                    </a:solidFill>
-                  </a:tcPr>
-                </a:tc>
-                <a:tc>
-                  <a:txBody>
-                    <a:bodyPr/>
-                    <a:p>
-                      <a:pPr latinLnBrk="1">
-                        <a:defRPr/>
-                      </a:pPr>
-                      <a:r>
-                        <a:rPr lang="en-US" altLang="ko-KR" sz="1700">
-                          <a:solidFill>
-                            <a:srgbClr val="000000"/>
-                          </a:solidFill>
-                        </a:rPr>
-                        <a:t>PATCH</a:t>
-                      </a:r>
-                      <a:endParaRPr lang="ko-KR" altLang="en-US" sz="1700">
-                        <a:solidFill>
-                          <a:srgbClr val="000000"/>
-                        </a:solidFill>
-                      </a:endParaRPr>
-                    </a:p>
-                  </a:txBody>
-                  <a:tcPr marL="91440" marR="91440">
-                    <a:lnL w="15240">
-                      <a:solidFill>
-                        <a:srgbClr val="000000">
-                          <a:alpha val="100000"/>
-                        </a:srgbClr>
-                      </a:solidFill>
-                      <a:prstDash val="solid"/>
-                    </a:lnL>
-                    <a:lnR w="15240">
-                      <a:solidFill>
-                        <a:srgbClr val="000000">
-                          <a:alpha val="100000"/>
-                        </a:srgbClr>
-                      </a:solidFill>
-                      <a:prstDash val="solid"/>
-                    </a:lnR>
-                    <a:lnT w="15240">
-                      <a:solidFill>
-                        <a:srgbClr val="000000">
-                          <a:alpha val="100000"/>
-                        </a:srgbClr>
-                      </a:solidFill>
-                      <a:prstDash val="solid"/>
-                    </a:lnT>
-                    <a:lnB w="15240">
-                      <a:solidFill>
-                        <a:srgbClr val="000000">
-                          <a:alpha val="100000"/>
-                        </a:srgbClr>
-                      </a:solidFill>
-                      <a:prstDash val="solid"/>
-                    </a:lnB>
-                    <a:solidFill>
-                      <a:schemeClr val="bg1">
-                        <a:alpha val="100000"/>
-                      </a:schemeClr>
-                    </a:solidFill>
-                  </a:tcPr>
-                </a:tc>
-              </a:tr>
-              <a:tr h="270210">
-                <a:tc>
-                  <a:txBody>
-                    <a:bodyPr/>
-                    <a:p>
-                      <a:pPr latinLnBrk="1">
-                        <a:defRPr/>
-                      </a:pPr>
-                      <a:r>
-                        <a:rPr lang="ko-KR" altLang="en-US" sz="1700">
-                          <a:solidFill>
-                            <a:srgbClr val="000000"/>
-                          </a:solidFill>
-                        </a:rPr>
-                        <a:t>책이미지</a:t>
-                      </a:r>
-                      <a:endParaRPr lang="ko-KR" altLang="en-US" sz="1700">
-                        <a:solidFill>
-                          <a:srgbClr val="000000"/>
-                        </a:solidFill>
-                      </a:endParaRPr>
-                    </a:p>
-                  </a:txBody>
-                  <a:tcPr marL="91440" marR="91440">
-                    <a:lnL w="15240">
-                      <a:solidFill>
-                        <a:srgbClr val="000000">
-                          <a:alpha val="100000"/>
-                        </a:srgbClr>
-                      </a:solidFill>
-                      <a:prstDash val="solid"/>
-                    </a:lnL>
-                    <a:lnR w="15240">
-                      <a:solidFill>
-                        <a:srgbClr val="000000">
-                          <a:alpha val="100000"/>
-                        </a:srgbClr>
-                      </a:solidFill>
-                      <a:prstDash val="solid"/>
-                    </a:lnR>
-                    <a:lnT w="15240">
-                      <a:solidFill>
-                        <a:srgbClr val="000000">
-                          <a:alpha val="100000"/>
-                        </a:srgbClr>
-                      </a:solidFill>
-                      <a:prstDash val="solid"/>
-                    </a:lnT>
-                    <a:lnB w="15240">
-                      <a:solidFill>
-                        <a:srgbClr val="000000">
-                          <a:alpha val="100000"/>
-                        </a:srgbClr>
-                      </a:solidFill>
-                      <a:prstDash val="solid"/>
-                    </a:lnB>
-                    <a:solidFill>
-                      <a:schemeClr val="bg1">
-                        <a:alpha val="100000"/>
-                      </a:schemeClr>
-                    </a:solidFill>
-                  </a:tcPr>
-                </a:tc>
-                <a:tc>
-                  <a:txBody>
-                    <a:bodyPr/>
-                    <a:p>
-                      <a:pPr latinLnBrk="1">
-                        <a:defRPr/>
-                      </a:pPr>
-                      <a:r>
-                        <a:rPr lang="en-US" altLang="ko-KR" sz="1700">
-                          <a:solidFill>
-                            <a:srgbClr val="000000"/>
-                          </a:solidFill>
-                        </a:rPr>
-                        <a:t>book/{0} - pathparameter</a:t>
+                        <a:t>update/checkPass</a:t>
                       </a:r>
                       <a:endParaRPr lang="ko-KR" altLang="en-US" sz="1700">
                         <a:solidFill>
@@ -12697,6 +14216,210 @@
                           </a:solidFill>
                         </a:rPr>
                         <a:t>GET</a:t>
+                      </a:r>
+                      <a:endParaRPr lang="ko-KR" altLang="en-US" sz="1700">
+                        <a:solidFill>
+                          <a:srgbClr val="000000"/>
+                        </a:solidFill>
+                      </a:endParaRPr>
+                    </a:p>
+                  </a:txBody>
+                  <a:tcPr marL="91440" marR="91440">
+                    <a:lnL w="15240">
+                      <a:solidFill>
+                        <a:srgbClr val="000000">
+                          <a:alpha val="100000"/>
+                        </a:srgbClr>
+                      </a:solidFill>
+                      <a:prstDash val="solid"/>
+                    </a:lnL>
+                    <a:lnR w="15240">
+                      <a:solidFill>
+                        <a:srgbClr val="000000">
+                          <a:alpha val="100000"/>
+                        </a:srgbClr>
+                      </a:solidFill>
+                      <a:prstDash val="solid"/>
+                    </a:lnR>
+                    <a:lnT w="15240">
+                      <a:solidFill>
+                        <a:srgbClr val="000000">
+                          <a:alpha val="100000"/>
+                        </a:srgbClr>
+                      </a:solidFill>
+                      <a:prstDash val="solid"/>
+                    </a:lnT>
+                    <a:lnB w="15240">
+                      <a:solidFill>
+                        <a:srgbClr val="000000">
+                          <a:alpha val="100000"/>
+                        </a:srgbClr>
+                      </a:solidFill>
+                      <a:prstDash val="solid"/>
+                    </a:lnB>
+                    <a:solidFill>
+                      <a:schemeClr val="bg1">
+                        <a:alpha val="100000"/>
+                      </a:schemeClr>
+                    </a:solidFill>
+                  </a:tcPr>
+                </a:tc>
+              </a:tr>
+              <a:tr h="270210">
+                <a:tc>
+                  <a:txBody>
+                    <a:bodyPr/>
+                    <a:p>
+                      <a:pPr latinLnBrk="1">
+                        <a:defRPr/>
+                      </a:pPr>
+                      <a:r>
+                        <a:rPr lang="ko-KR" altLang="en-US" sz="1700">
+                          <a:solidFill>
+                            <a:srgbClr val="000000"/>
+                          </a:solidFill>
+                        </a:rPr>
+                        <a:t>희망도서</a:t>
+                      </a:r>
+                      <a:r>
+                        <a:rPr lang="en-US" altLang="ko-KR" sz="1700">
+                          <a:solidFill>
+                            <a:srgbClr val="000000"/>
+                          </a:solidFill>
+                        </a:rPr>
+                        <a:t> </a:t>
+                      </a:r>
+                      <a:r>
+                        <a:rPr lang="ko-KR" altLang="en-US" sz="1700">
+                          <a:solidFill>
+                            <a:srgbClr val="000000"/>
+                          </a:solidFill>
+                        </a:rPr>
+                        <a:t>신청</a:t>
+                      </a:r>
+                      <a:endParaRPr lang="ko-KR" altLang="en-US" sz="1700">
+                        <a:solidFill>
+                          <a:srgbClr val="000000"/>
+                        </a:solidFill>
+                      </a:endParaRPr>
+                    </a:p>
+                  </a:txBody>
+                  <a:tcPr marL="91440" marR="91440">
+                    <a:lnL w="15240">
+                      <a:solidFill>
+                        <a:srgbClr val="000000">
+                          <a:alpha val="100000"/>
+                        </a:srgbClr>
+                      </a:solidFill>
+                      <a:prstDash val="solid"/>
+                    </a:lnL>
+                    <a:lnR w="15240">
+                      <a:solidFill>
+                        <a:srgbClr val="000000">
+                          <a:alpha val="100000"/>
+                        </a:srgbClr>
+                      </a:solidFill>
+                      <a:prstDash val="solid"/>
+                    </a:lnR>
+                    <a:lnT w="15240">
+                      <a:solidFill>
+                        <a:srgbClr val="000000">
+                          <a:alpha val="100000"/>
+                        </a:srgbClr>
+                      </a:solidFill>
+                      <a:prstDash val="solid"/>
+                    </a:lnT>
+                    <a:lnB w="15240">
+                      <a:solidFill>
+                        <a:srgbClr val="000000">
+                          <a:alpha val="100000"/>
+                        </a:srgbClr>
+                      </a:solidFill>
+                      <a:prstDash val="solid"/>
+                    </a:lnB>
+                    <a:solidFill>
+                      <a:schemeClr val="bg1">
+                        <a:alpha val="100000"/>
+                      </a:schemeClr>
+                    </a:solidFill>
+                  </a:tcPr>
+                </a:tc>
+                <a:tc>
+                  <a:txBody>
+                    <a:bodyPr/>
+                    <a:p>
+                      <a:pPr latinLnBrk="1">
+                        <a:defRPr/>
+                      </a:pPr>
+                      <a:r>
+                        <a:rPr lang="en-US" altLang="ko-KR" sz="1700">
+                          <a:solidFill>
+                            <a:srgbClr val="000000"/>
+                          </a:solidFill>
+                        </a:rPr>
+                        <a:t>req_book</a:t>
+                      </a:r>
+                      <a:endParaRPr lang="ko-KR" altLang="en-US" sz="1700">
+                        <a:solidFill>
+                          <a:srgbClr val="000000"/>
+                        </a:solidFill>
+                      </a:endParaRPr>
+                    </a:p>
+                  </a:txBody>
+                  <a:tcPr marL="91440" marR="91440">
+                    <a:lnL w="15240">
+                      <a:solidFill>
+                        <a:srgbClr val="000000">
+                          <a:alpha val="100000"/>
+                        </a:srgbClr>
+                      </a:solidFill>
+                      <a:prstDash val="solid"/>
+                    </a:lnL>
+                    <a:lnR w="15240">
+                      <a:solidFill>
+                        <a:srgbClr val="000000">
+                          <a:alpha val="100000"/>
+                        </a:srgbClr>
+                      </a:solidFill>
+                      <a:prstDash val="solid"/>
+                    </a:lnR>
+                    <a:lnT w="15240">
+                      <a:solidFill>
+                        <a:srgbClr val="000000">
+                          <a:alpha val="100000"/>
+                        </a:srgbClr>
+                      </a:solidFill>
+                      <a:prstDash val="solid"/>
+                    </a:lnT>
+                    <a:lnB w="15240">
+                      <a:solidFill>
+                        <a:srgbClr val="000000">
+                          <a:alpha val="100000"/>
+                        </a:srgbClr>
+                      </a:solidFill>
+                      <a:prstDash val="solid"/>
+                    </a:lnB>
+                    <a:solidFill>
+                      <a:schemeClr val="bg1">
+                        <a:alpha val="100000"/>
+                      </a:schemeClr>
+                    </a:solidFill>
+                  </a:tcPr>
+                </a:tc>
+                <a:tc>
+                  <a:txBody>
+                    <a:bodyPr/>
+                    <a:p>
+                      <a:pPr latinLnBrk="1">
+                        <a:defRPr/>
+                      </a:pPr>
+                      <a:r>
+                        <a:rPr lang="en-US" altLang="ko-KR" sz="1700">
+                          <a:solidFill>
+                            <a:srgbClr val="000000"/>
+                          </a:solidFill>
+                        </a:rPr>
+                        <a:t>POST</a:t>
                       </a:r>
                       <a:endParaRPr lang="ko-KR" altLang="en-US" sz="1700">
                         <a:solidFill>
@@ -12763,7 +14486,7 @@
 </p:sld>
 </file>
 
-<file path=ppt/slides/slide18.xml><?xml version="1.0" encoding="utf-8"?>
+<file path=ppt/slides/slide19.xml><?xml version="1.0" encoding="utf-8"?>
 <p:sld xmlns:r="http://schemas.openxmlformats.org/officeDocument/2006/relationships" xmlns:c="http://schemas.openxmlformats.org/drawingml/2006/chart" xmlns:a="http://schemas.openxmlformats.org/drawingml/2006/main" xmlns:dgm="http://schemas.openxmlformats.org/drawingml/2006/diagram" xmlns:dsp="http://schemas.microsoft.com/office/drawing/2008/diagram" xmlns:p="http://schemas.openxmlformats.org/presentationml/2006/main">
   <p:cSld>
     <p:spTree>
@@ -15877,1567 +17600,6 @@
 </p:sld>
 </file>
 
-<file path=ppt/slides/slide19.xml><?xml version="1.0" encoding="utf-8"?>
-<p:sld xmlns:r="http://schemas.openxmlformats.org/officeDocument/2006/relationships" xmlns:c="http://schemas.openxmlformats.org/drawingml/2006/chart" xmlns:a="http://schemas.openxmlformats.org/drawingml/2006/main" xmlns:dgm="http://schemas.openxmlformats.org/drawingml/2006/diagram" xmlns:dsp="http://schemas.microsoft.com/office/drawing/2008/diagram" xmlns:p="http://schemas.openxmlformats.org/presentationml/2006/main">
-  <p:cSld>
-    <p:spTree>
-      <p:nvGrpSpPr>
-        <p:cNvPr id="1" name=""/>
-        <p:cNvGrpSpPr/>
-        <p:nvPr/>
-      </p:nvGrpSpPr>
-      <p:grpSpPr>
-        <a:xfrm>
-          <a:off x="0" y="0"/>
-          <a:ext cx="0" cy="0"/>
-          <a:chOff x="0" y="0"/>
-          <a:chExt cx="0" cy="0"/>
-        </a:xfrm>
-      </p:grpSpPr>
-      <p:graphicFrame>
-        <p:nvGraphicFramePr>
-          <p:cNvPr id="2" name="Table"/>
-          <p:cNvGraphicFramePr>
-            <a:graphicFrameLocks noGrp="1"/>
-          </p:cNvGraphicFramePr>
-          <p:nvPr/>
-        </p:nvGraphicFramePr>
-        <p:xfrm>
-          <a:off x="2032052" y="2027110"/>
-          <a:ext cx="8128000" cy="1854200"/>
-        </p:xfrm>
-        <a:graphic>
-          <a:graphicData uri="http://schemas.openxmlformats.org/drawingml/2006/table">
-            <a:tbl>
-              <a:tblPr firstRow="1" bandRow="1">
-                <a:tableStyleId>{01A66EDD-3DAB-4C5B-A090-DC80EC1FD486}</a:tableStyleId>
-              </a:tblPr>
-              <a:tblGrid>
-                <a:gridCol w="2709333"/>
-                <a:gridCol w="2709333"/>
-                <a:gridCol w="2709333"/>
-              </a:tblGrid>
-              <a:tr h="270210">
-                <a:tc gridSpan="3">
-                  <a:txBody>
-                    <a:bodyPr/>
-                    <a:p>
-                      <a:pPr latinLnBrk="1">
-                        <a:defRPr/>
-                      </a:pPr>
-                      <a:r>
-                        <a:rPr lang="ko-KR" altLang="en-US" sz="1700">
-                          <a:solidFill>
-                            <a:srgbClr val="000000"/>
-                          </a:solidFill>
-                        </a:rPr>
-                        <a:t>버튼</a:t>
-                      </a:r>
-                      <a:r>
-                        <a:rPr lang="en-US" altLang="ko-KR" sz="1700">
-                          <a:solidFill>
-                            <a:srgbClr val="000000"/>
-                          </a:solidFill>
-                        </a:rPr>
-                        <a:t> URL</a:t>
-                      </a:r>
-                      <a:endParaRPr lang="ko-KR" altLang="en-US" sz="1700">
-                        <a:solidFill>
-                          <a:srgbClr val="000000"/>
-                        </a:solidFill>
-                      </a:endParaRPr>
-                    </a:p>
-                  </a:txBody>
-                  <a:tcPr marL="91440" marR="91440">
-                    <a:lnL w="15240">
-                      <a:solidFill>
-                        <a:srgbClr val="000000">
-                          <a:alpha val="100000"/>
-                        </a:srgbClr>
-                      </a:solidFill>
-                      <a:prstDash val="solid"/>
-                    </a:lnL>
-                    <a:lnR w="15240">
-                      <a:solidFill>
-                        <a:srgbClr val="000000">
-                          <a:alpha val="100000"/>
-                        </a:srgbClr>
-                      </a:solidFill>
-                      <a:prstDash val="solid"/>
-                    </a:lnR>
-                    <a:lnT w="15240">
-                      <a:solidFill>
-                        <a:srgbClr val="000000">
-                          <a:alpha val="100000"/>
-                        </a:srgbClr>
-                      </a:solidFill>
-                      <a:prstDash val="solid"/>
-                    </a:lnT>
-                    <a:lnB w="15240">
-                      <a:solidFill>
-                        <a:srgbClr val="000000">
-                          <a:alpha val="100000"/>
-                        </a:srgbClr>
-                      </a:solidFill>
-                      <a:prstDash val="solid"/>
-                    </a:lnB>
-                    <a:solidFill>
-                      <a:schemeClr val="bg1">
-                        <a:alpha val="100000"/>
-                      </a:schemeClr>
-                    </a:solidFill>
-                  </a:tcPr>
-                </a:tc>
-                <a:tc hMerge="1">
-                  <a:txBody>
-                    <a:bodyPr/>
-                    <a:p>
-                      <a:pPr latinLnBrk="1">
-                        <a:defRPr/>
-                      </a:pPr>
-                      <a:endParaRPr lang="ko-KR" altLang="en-US"/>
-                    </a:p>
-                  </a:txBody>
-                  <a:tcPr marL="91440" marR="91440">
-                    <a:lnL w="15240">
-                      <a:solidFill>
-                        <a:srgbClr val="000000">
-                          <a:alpha val="100000"/>
-                        </a:srgbClr>
-                      </a:solidFill>
-                      <a:prstDash val="solid"/>
-                    </a:lnL>
-                    <a:lnR w="15240">
-                      <a:solidFill>
-                        <a:srgbClr val="000000">
-                          <a:alpha val="100000"/>
-                        </a:srgbClr>
-                      </a:solidFill>
-                      <a:prstDash val="solid"/>
-                    </a:lnR>
-                    <a:lnT w="15240">
-                      <a:solidFill>
-                        <a:srgbClr val="000000">
-                          <a:alpha val="100000"/>
-                        </a:srgbClr>
-                      </a:solidFill>
-                      <a:prstDash val="solid"/>
-                    </a:lnT>
-                    <a:lnB w="15240">
-                      <a:solidFill>
-                        <a:srgbClr val="000000">
-                          <a:alpha val="100000"/>
-                        </a:srgbClr>
-                      </a:solidFill>
-                      <a:prstDash val="solid"/>
-                    </a:lnB>
-                    <a:solidFill>
-                      <a:schemeClr val="bg1">
-                        <a:alpha val="100000"/>
-                      </a:schemeClr>
-                    </a:solidFill>
-                  </a:tcPr>
-                </a:tc>
-                <a:tc hMerge="1">
-                  <a:txBody>
-                    <a:bodyPr/>
-                    <a:p>
-                      <a:pPr latinLnBrk="1">
-                        <a:defRPr/>
-                      </a:pPr>
-                      <a:endParaRPr lang="ko-KR" altLang="en-US"/>
-                    </a:p>
-                  </a:txBody>
-                  <a:tcPr marL="91440" marR="91440">
-                    <a:lnL w="15240">
-                      <a:solidFill>
-                        <a:srgbClr val="000000">
-                          <a:alpha val="100000"/>
-                        </a:srgbClr>
-                      </a:solidFill>
-                      <a:prstDash val="solid"/>
-                    </a:lnL>
-                    <a:lnR w="15240">
-                      <a:solidFill>
-                        <a:srgbClr val="000000">
-                          <a:alpha val="100000"/>
-                        </a:srgbClr>
-                      </a:solidFill>
-                      <a:prstDash val="solid"/>
-                    </a:lnR>
-                    <a:lnT w="15240">
-                      <a:solidFill>
-                        <a:srgbClr val="000000">
-                          <a:alpha val="100000"/>
-                        </a:srgbClr>
-                      </a:solidFill>
-                      <a:prstDash val="solid"/>
-                    </a:lnT>
-                    <a:lnB w="15240">
-                      <a:solidFill>
-                        <a:srgbClr val="000000">
-                          <a:alpha val="100000"/>
-                        </a:srgbClr>
-                      </a:solidFill>
-                      <a:prstDash val="solid"/>
-                    </a:lnB>
-                    <a:solidFill>
-                      <a:schemeClr val="bg1">
-                        <a:alpha val="100000"/>
-                      </a:schemeClr>
-                    </a:solidFill>
-                  </a:tcPr>
-                </a:tc>
-              </a:tr>
-              <a:tr h="270210">
-                <a:tc>
-                  <a:txBody>
-                    <a:bodyPr/>
-                    <a:p>
-                      <a:pPr latinLnBrk="1">
-                        <a:defRPr/>
-                      </a:pPr>
-                      <a:r>
-                        <a:rPr lang="ko-KR" altLang="en-US" sz="1700" b="1">
-                          <a:solidFill>
-                            <a:srgbClr val="000000"/>
-                          </a:solidFill>
-                        </a:rPr>
-                        <a:t>버튼명</a:t>
-                      </a:r>
-                      <a:endParaRPr lang="ko-KR" altLang="en-US" sz="1700" b="1">
-                        <a:solidFill>
-                          <a:srgbClr val="000000"/>
-                        </a:solidFill>
-                      </a:endParaRPr>
-                    </a:p>
-                  </a:txBody>
-                  <a:tcPr marL="91440" marR="91440">
-                    <a:lnL w="15240">
-                      <a:solidFill>
-                        <a:srgbClr val="000000">
-                          <a:alpha val="100000"/>
-                        </a:srgbClr>
-                      </a:solidFill>
-                      <a:prstDash val="solid"/>
-                    </a:lnL>
-                    <a:lnR w="15240">
-                      <a:solidFill>
-                        <a:srgbClr val="000000">
-                          <a:alpha val="100000"/>
-                        </a:srgbClr>
-                      </a:solidFill>
-                      <a:prstDash val="solid"/>
-                    </a:lnR>
-                    <a:lnT w="15240">
-                      <a:solidFill>
-                        <a:srgbClr val="000000">
-                          <a:alpha val="100000"/>
-                        </a:srgbClr>
-                      </a:solidFill>
-                      <a:prstDash val="solid"/>
-                    </a:lnT>
-                    <a:lnB w="15240">
-                      <a:solidFill>
-                        <a:srgbClr val="000000">
-                          <a:alpha val="100000"/>
-                        </a:srgbClr>
-                      </a:solidFill>
-                      <a:prstDash val="solid"/>
-                    </a:lnB>
-                    <a:solidFill>
-                      <a:schemeClr val="bg1">
-                        <a:alpha val="100000"/>
-                      </a:schemeClr>
-                    </a:solidFill>
-                  </a:tcPr>
-                </a:tc>
-                <a:tc>
-                  <a:txBody>
-                    <a:bodyPr/>
-                    <a:p>
-                      <a:pPr latinLnBrk="1">
-                        <a:defRPr/>
-                      </a:pPr>
-                      <a:r>
-                        <a:rPr lang="en-US" altLang="ko-KR" sz="1700" b="1">
-                          <a:solidFill>
-                            <a:srgbClr val="000000"/>
-                          </a:solidFill>
-                        </a:rPr>
-                        <a:t>URL</a:t>
-                      </a:r>
-                      <a:endParaRPr lang="ko-KR" altLang="en-US" sz="1700" b="1">
-                        <a:solidFill>
-                          <a:srgbClr val="000000"/>
-                        </a:solidFill>
-                      </a:endParaRPr>
-                    </a:p>
-                  </a:txBody>
-                  <a:tcPr marL="91440" marR="91440">
-                    <a:lnL w="15240">
-                      <a:solidFill>
-                        <a:srgbClr val="000000">
-                          <a:alpha val="100000"/>
-                        </a:srgbClr>
-                      </a:solidFill>
-                      <a:prstDash val="solid"/>
-                    </a:lnL>
-                    <a:lnR w="15240">
-                      <a:solidFill>
-                        <a:srgbClr val="000000">
-                          <a:alpha val="100000"/>
-                        </a:srgbClr>
-                      </a:solidFill>
-                      <a:prstDash val="solid"/>
-                    </a:lnR>
-                    <a:lnT w="15240">
-                      <a:solidFill>
-                        <a:srgbClr val="000000">
-                          <a:alpha val="100000"/>
-                        </a:srgbClr>
-                      </a:solidFill>
-                      <a:prstDash val="solid"/>
-                    </a:lnT>
-                    <a:lnB w="15240">
-                      <a:solidFill>
-                        <a:srgbClr val="000000">
-                          <a:alpha val="100000"/>
-                        </a:srgbClr>
-                      </a:solidFill>
-                      <a:prstDash val="solid"/>
-                    </a:lnB>
-                    <a:solidFill>
-                      <a:schemeClr val="bg1">
-                        <a:alpha val="100000"/>
-                      </a:schemeClr>
-                    </a:solidFill>
-                  </a:tcPr>
-                </a:tc>
-                <a:tc>
-                  <a:txBody>
-                    <a:bodyPr/>
-                    <a:p>
-                      <a:pPr latinLnBrk="1">
-                        <a:defRPr/>
-                      </a:pPr>
-                      <a:r>
-                        <a:rPr lang="en-US" altLang="ko-KR" sz="1700" b="1">
-                          <a:solidFill>
-                            <a:srgbClr val="000000"/>
-                          </a:solidFill>
-                        </a:rPr>
-                        <a:t>METHOD</a:t>
-                      </a:r>
-                      <a:endParaRPr lang="ko-KR" altLang="en-US" sz="1700" b="1">
-                        <a:solidFill>
-                          <a:srgbClr val="000000"/>
-                        </a:solidFill>
-                      </a:endParaRPr>
-                    </a:p>
-                  </a:txBody>
-                  <a:tcPr marL="91440" marR="91440">
-                    <a:lnL w="15240">
-                      <a:solidFill>
-                        <a:srgbClr val="000000">
-                          <a:alpha val="100000"/>
-                        </a:srgbClr>
-                      </a:solidFill>
-                      <a:prstDash val="solid"/>
-                    </a:lnL>
-                    <a:lnR w="15240">
-                      <a:solidFill>
-                        <a:srgbClr val="000000">
-                          <a:alpha val="100000"/>
-                        </a:srgbClr>
-                      </a:solidFill>
-                      <a:prstDash val="solid"/>
-                    </a:lnR>
-                    <a:lnT w="15240">
-                      <a:solidFill>
-                        <a:srgbClr val="000000">
-                          <a:alpha val="100000"/>
-                        </a:srgbClr>
-                      </a:solidFill>
-                      <a:prstDash val="solid"/>
-                    </a:lnT>
-                    <a:lnB w="15240">
-                      <a:solidFill>
-                        <a:srgbClr val="000000">
-                          <a:alpha val="100000"/>
-                        </a:srgbClr>
-                      </a:solidFill>
-                      <a:prstDash val="solid"/>
-                    </a:lnB>
-                    <a:solidFill>
-                      <a:schemeClr val="bg1">
-                        <a:alpha val="100000"/>
-                      </a:schemeClr>
-                    </a:solidFill>
-                  </a:tcPr>
-                </a:tc>
-              </a:tr>
-              <a:tr h="270210">
-                <a:tc>
-                  <a:txBody>
-                    <a:bodyPr/>
-                    <a:p>
-                      <a:pPr latinLnBrk="1">
-                        <a:defRPr/>
-                      </a:pPr>
-                      <a:r>
-                        <a:rPr lang="ko-KR" altLang="en-US" sz="1700">
-                          <a:solidFill>
-                            <a:srgbClr val="000000"/>
-                          </a:solidFill>
-                        </a:rPr>
-                        <a:t>홈</a:t>
-                      </a:r>
-                      <a:endParaRPr lang="ko-KR" altLang="en-US" sz="1700">
-                        <a:solidFill>
-                          <a:srgbClr val="000000"/>
-                        </a:solidFill>
-                      </a:endParaRPr>
-                    </a:p>
-                  </a:txBody>
-                  <a:tcPr marL="91440" marR="91440">
-                    <a:lnL w="15240">
-                      <a:solidFill>
-                        <a:srgbClr val="000000">
-                          <a:alpha val="100000"/>
-                        </a:srgbClr>
-                      </a:solidFill>
-                      <a:prstDash val="solid"/>
-                    </a:lnL>
-                    <a:lnR w="15240">
-                      <a:solidFill>
-                        <a:srgbClr val="000000">
-                          <a:alpha val="100000"/>
-                        </a:srgbClr>
-                      </a:solidFill>
-                      <a:prstDash val="solid"/>
-                    </a:lnR>
-                    <a:lnT w="15240">
-                      <a:solidFill>
-                        <a:srgbClr val="000000">
-                          <a:alpha val="100000"/>
-                        </a:srgbClr>
-                      </a:solidFill>
-                      <a:prstDash val="solid"/>
-                    </a:lnT>
-                    <a:lnB w="15240">
-                      <a:solidFill>
-                        <a:srgbClr val="000000">
-                          <a:alpha val="100000"/>
-                        </a:srgbClr>
-                      </a:solidFill>
-                      <a:prstDash val="solid"/>
-                    </a:lnB>
-                    <a:solidFill>
-                      <a:schemeClr val="bg1">
-                        <a:alpha val="100000"/>
-                      </a:schemeClr>
-                    </a:solidFill>
-                  </a:tcPr>
-                </a:tc>
-                <a:tc>
-                  <a:txBody>
-                    <a:bodyPr/>
-                    <a:p>
-                      <a:pPr latinLnBrk="1">
-                        <a:defRPr/>
-                      </a:pPr>
-                      <a:r>
-                        <a:rPr lang="en-US" altLang="ko-KR" sz="1700">
-                          <a:solidFill>
-                            <a:srgbClr val="000000"/>
-                          </a:solidFill>
-                        </a:rPr>
-                        <a:t>front/main</a:t>
-                      </a:r>
-                      <a:endParaRPr lang="ko-KR" altLang="en-US" sz="1700">
-                        <a:solidFill>
-                          <a:srgbClr val="000000"/>
-                        </a:solidFill>
-                      </a:endParaRPr>
-                    </a:p>
-                  </a:txBody>
-                  <a:tcPr marL="91440" marR="91440">
-                    <a:lnL w="15240">
-                      <a:solidFill>
-                        <a:srgbClr val="000000">
-                          <a:alpha val="100000"/>
-                        </a:srgbClr>
-                      </a:solidFill>
-                      <a:prstDash val="solid"/>
-                    </a:lnL>
-                    <a:lnR w="15240">
-                      <a:solidFill>
-                        <a:srgbClr val="000000">
-                          <a:alpha val="100000"/>
-                        </a:srgbClr>
-                      </a:solidFill>
-                      <a:prstDash val="solid"/>
-                    </a:lnR>
-                    <a:lnT w="15240">
-                      <a:solidFill>
-                        <a:srgbClr val="000000">
-                          <a:alpha val="100000"/>
-                        </a:srgbClr>
-                      </a:solidFill>
-                      <a:prstDash val="solid"/>
-                    </a:lnT>
-                    <a:lnB w="15240">
-                      <a:solidFill>
-                        <a:srgbClr val="000000">
-                          <a:alpha val="100000"/>
-                        </a:srgbClr>
-                      </a:solidFill>
-                      <a:prstDash val="solid"/>
-                    </a:lnB>
-                    <a:solidFill>
-                      <a:schemeClr val="bg1">
-                        <a:alpha val="100000"/>
-                      </a:schemeClr>
-                    </a:solidFill>
-                  </a:tcPr>
-                </a:tc>
-                <a:tc>
-                  <a:txBody>
-                    <a:bodyPr/>
-                    <a:p>
-                      <a:pPr latinLnBrk="1">
-                        <a:defRPr/>
-                      </a:pPr>
-                      <a:r>
-                        <a:rPr lang="en-US" altLang="ko-KR" sz="1700">
-                          <a:solidFill>
-                            <a:srgbClr val="000000"/>
-                          </a:solidFill>
-                        </a:rPr>
-                        <a:t>GET</a:t>
-                      </a:r>
-                      <a:endParaRPr lang="ko-KR" altLang="en-US" sz="1700">
-                        <a:solidFill>
-                          <a:srgbClr val="000000"/>
-                        </a:solidFill>
-                      </a:endParaRPr>
-                    </a:p>
-                  </a:txBody>
-                  <a:tcPr marL="91440" marR="91440">
-                    <a:lnL w="15240">
-                      <a:solidFill>
-                        <a:srgbClr val="000000">
-                          <a:alpha val="100000"/>
-                        </a:srgbClr>
-                      </a:solidFill>
-                      <a:prstDash val="solid"/>
-                    </a:lnL>
-                    <a:lnR w="15240">
-                      <a:solidFill>
-                        <a:srgbClr val="000000">
-                          <a:alpha val="100000"/>
-                        </a:srgbClr>
-                      </a:solidFill>
-                      <a:prstDash val="solid"/>
-                    </a:lnR>
-                    <a:lnT w="15240">
-                      <a:solidFill>
-                        <a:srgbClr val="000000">
-                          <a:alpha val="100000"/>
-                        </a:srgbClr>
-                      </a:solidFill>
-                      <a:prstDash val="solid"/>
-                    </a:lnT>
-                    <a:lnB w="15240">
-                      <a:solidFill>
-                        <a:srgbClr val="000000">
-                          <a:alpha val="100000"/>
-                        </a:srgbClr>
-                      </a:solidFill>
-                      <a:prstDash val="solid"/>
-                    </a:lnB>
-                    <a:solidFill>
-                      <a:schemeClr val="bg1">
-                        <a:alpha val="100000"/>
-                      </a:schemeClr>
-                    </a:solidFill>
-                  </a:tcPr>
-                </a:tc>
-              </a:tr>
-              <a:tr h="270210">
-                <a:tc>
-                  <a:txBody>
-                    <a:bodyPr/>
-                    <a:p>
-                      <a:pPr latinLnBrk="1">
-                        <a:defRPr/>
-                      </a:pPr>
-                      <a:r>
-                        <a:rPr lang="ko-KR" altLang="en-US" sz="1700">
-                          <a:solidFill>
-                            <a:srgbClr val="000000"/>
-                          </a:solidFill>
-                        </a:rPr>
-                        <a:t>정보수정</a:t>
-                      </a:r>
-                      <a:endParaRPr lang="ko-KR" altLang="en-US" sz="1700">
-                        <a:solidFill>
-                          <a:srgbClr val="000000"/>
-                        </a:solidFill>
-                      </a:endParaRPr>
-                    </a:p>
-                  </a:txBody>
-                  <a:tcPr marL="91440" marR="91440">
-                    <a:lnL w="15240">
-                      <a:solidFill>
-                        <a:srgbClr val="000000">
-                          <a:alpha val="100000"/>
-                        </a:srgbClr>
-                      </a:solidFill>
-                      <a:prstDash val="solid"/>
-                    </a:lnL>
-                    <a:lnR w="15240">
-                      <a:solidFill>
-                        <a:srgbClr val="000000">
-                          <a:alpha val="100000"/>
-                        </a:srgbClr>
-                      </a:solidFill>
-                      <a:prstDash val="solid"/>
-                    </a:lnR>
-                    <a:lnT w="15240">
-                      <a:solidFill>
-                        <a:srgbClr val="000000">
-                          <a:alpha val="100000"/>
-                        </a:srgbClr>
-                      </a:solidFill>
-                      <a:prstDash val="solid"/>
-                    </a:lnT>
-                    <a:lnB w="15240">
-                      <a:solidFill>
-                        <a:srgbClr val="000000">
-                          <a:alpha val="100000"/>
-                        </a:srgbClr>
-                      </a:solidFill>
-                      <a:prstDash val="solid"/>
-                    </a:lnB>
-                    <a:solidFill>
-                      <a:schemeClr val="bg1">
-                        <a:alpha val="100000"/>
-                      </a:schemeClr>
-                    </a:solidFill>
-                  </a:tcPr>
-                </a:tc>
-                <a:tc>
-                  <a:txBody>
-                    <a:bodyPr/>
-                    <a:p>
-                      <a:pPr latinLnBrk="1">
-                        <a:defRPr/>
-                      </a:pPr>
-                      <a:r>
-                        <a:rPr lang="en-US" altLang="ko-KR" sz="1700">
-                          <a:solidFill>
-                            <a:srgbClr val="000000"/>
-                          </a:solidFill>
-                        </a:rPr>
-                        <a:t>update/main</a:t>
-                      </a:r>
-                      <a:endParaRPr lang="ko-KR" altLang="en-US" sz="1700">
-                        <a:solidFill>
-                          <a:srgbClr val="000000"/>
-                        </a:solidFill>
-                      </a:endParaRPr>
-                    </a:p>
-                  </a:txBody>
-                  <a:tcPr marL="91440" marR="91440">
-                    <a:lnL w="15240">
-                      <a:solidFill>
-                        <a:srgbClr val="000000">
-                          <a:alpha val="100000"/>
-                        </a:srgbClr>
-                      </a:solidFill>
-                      <a:prstDash val="solid"/>
-                    </a:lnL>
-                    <a:lnR w="15240">
-                      <a:solidFill>
-                        <a:srgbClr val="000000">
-                          <a:alpha val="100000"/>
-                        </a:srgbClr>
-                      </a:solidFill>
-                      <a:prstDash val="solid"/>
-                    </a:lnR>
-                    <a:lnT w="15240">
-                      <a:solidFill>
-                        <a:srgbClr val="000000">
-                          <a:alpha val="100000"/>
-                        </a:srgbClr>
-                      </a:solidFill>
-                      <a:prstDash val="solid"/>
-                    </a:lnT>
-                    <a:lnB w="15240">
-                      <a:solidFill>
-                        <a:srgbClr val="000000">
-                          <a:alpha val="100000"/>
-                        </a:srgbClr>
-                      </a:solidFill>
-                      <a:prstDash val="solid"/>
-                    </a:lnB>
-                    <a:solidFill>
-                      <a:schemeClr val="bg1">
-                        <a:alpha val="100000"/>
-                      </a:schemeClr>
-                    </a:solidFill>
-                  </a:tcPr>
-                </a:tc>
-                <a:tc>
-                  <a:txBody>
-                    <a:bodyPr/>
-                    <a:p>
-                      <a:pPr latinLnBrk="1">
-                        <a:defRPr/>
-                      </a:pPr>
-                      <a:r>
-                        <a:rPr lang="en-US" altLang="ko-KR" sz="1700">
-                          <a:solidFill>
-                            <a:srgbClr val="000000"/>
-                          </a:solidFill>
-                        </a:rPr>
-                        <a:t>PATCH</a:t>
-                      </a:r>
-                      <a:endParaRPr lang="ko-KR" altLang="en-US" sz="1700">
-                        <a:solidFill>
-                          <a:srgbClr val="000000"/>
-                        </a:solidFill>
-                      </a:endParaRPr>
-                    </a:p>
-                  </a:txBody>
-                  <a:tcPr marL="91440" marR="91440">
-                    <a:lnL w="15240">
-                      <a:solidFill>
-                        <a:srgbClr val="000000">
-                          <a:alpha val="100000"/>
-                        </a:srgbClr>
-                      </a:solidFill>
-                      <a:prstDash val="solid"/>
-                    </a:lnL>
-                    <a:lnR w="15240">
-                      <a:solidFill>
-                        <a:srgbClr val="000000">
-                          <a:alpha val="100000"/>
-                        </a:srgbClr>
-                      </a:solidFill>
-                      <a:prstDash val="solid"/>
-                    </a:lnR>
-                    <a:lnT w="15240">
-                      <a:solidFill>
-                        <a:srgbClr val="000000">
-                          <a:alpha val="100000"/>
-                        </a:srgbClr>
-                      </a:solidFill>
-                      <a:prstDash val="solid"/>
-                    </a:lnT>
-                    <a:lnB w="15240">
-                      <a:solidFill>
-                        <a:srgbClr val="000000">
-                          <a:alpha val="100000"/>
-                        </a:srgbClr>
-                      </a:solidFill>
-                      <a:prstDash val="solid"/>
-                    </a:lnB>
-                    <a:solidFill>
-                      <a:schemeClr val="bg1">
-                        <a:alpha val="100000"/>
-                      </a:schemeClr>
-                    </a:solidFill>
-                  </a:tcPr>
-                </a:tc>
-              </a:tr>
-              <a:tr h="270210">
-                <a:tc>
-                  <a:txBody>
-                    <a:bodyPr/>
-                    <a:p>
-                      <a:pPr latinLnBrk="1">
-                        <a:defRPr/>
-                      </a:pPr>
-                      <a:r>
-                        <a:rPr lang="ko-KR" altLang="en-US" sz="1700">
-                          <a:solidFill>
-                            <a:srgbClr val="000000"/>
-                          </a:solidFill>
-                        </a:rPr>
-                        <a:t>나의</a:t>
-                      </a:r>
-                      <a:r>
-                        <a:rPr lang="en-US" altLang="ko-KR" sz="1700">
-                          <a:solidFill>
-                            <a:srgbClr val="000000"/>
-                          </a:solidFill>
-                        </a:rPr>
-                        <a:t> </a:t>
-                      </a:r>
-                      <a:r>
-                        <a:rPr lang="ko-KR" altLang="en-US" sz="1700">
-                          <a:solidFill>
-                            <a:srgbClr val="000000"/>
-                          </a:solidFill>
-                        </a:rPr>
-                        <a:t>게시글</a:t>
-                      </a:r>
-                      <a:endParaRPr lang="ko-KR" altLang="en-US" sz="1700">
-                        <a:solidFill>
-                          <a:srgbClr val="000000"/>
-                        </a:solidFill>
-                      </a:endParaRPr>
-                    </a:p>
-                  </a:txBody>
-                  <a:tcPr marL="91440" marR="91440">
-                    <a:lnL w="15240">
-                      <a:solidFill>
-                        <a:srgbClr val="000000">
-                          <a:alpha val="100000"/>
-                        </a:srgbClr>
-                      </a:solidFill>
-                      <a:prstDash val="solid"/>
-                    </a:lnL>
-                    <a:lnR w="15240">
-                      <a:solidFill>
-                        <a:srgbClr val="000000">
-                          <a:alpha val="100000"/>
-                        </a:srgbClr>
-                      </a:solidFill>
-                      <a:prstDash val="solid"/>
-                    </a:lnR>
-                    <a:lnT w="15240">
-                      <a:solidFill>
-                        <a:srgbClr val="000000">
-                          <a:alpha val="100000"/>
-                        </a:srgbClr>
-                      </a:solidFill>
-                      <a:prstDash val="solid"/>
-                    </a:lnT>
-                    <a:lnB w="15240">
-                      <a:solidFill>
-                        <a:srgbClr val="000000">
-                          <a:alpha val="100000"/>
-                        </a:srgbClr>
-                      </a:solidFill>
-                      <a:prstDash val="solid"/>
-                    </a:lnB>
-                    <a:solidFill>
-                      <a:schemeClr val="bg1">
-                        <a:alpha val="100000"/>
-                      </a:schemeClr>
-                    </a:solidFill>
-                  </a:tcPr>
-                </a:tc>
-                <a:tc>
-                  <a:txBody>
-                    <a:bodyPr/>
-                    <a:p>
-                      <a:pPr latinLnBrk="1">
-                        <a:defRPr/>
-                      </a:pPr>
-                      <a:r>
-                        <a:rPr lang="en-US" altLang="ko-KR" sz="1700">
-                          <a:solidFill>
-                            <a:srgbClr val="000000"/>
-                          </a:solidFill>
-                        </a:rPr>
-                        <a:t>my_writing/main</a:t>
-                      </a:r>
-                      <a:endParaRPr lang="ko-KR" altLang="en-US" sz="1700">
-                        <a:solidFill>
-                          <a:srgbClr val="000000"/>
-                        </a:solidFill>
-                      </a:endParaRPr>
-                    </a:p>
-                  </a:txBody>
-                  <a:tcPr marL="91440" marR="91440">
-                    <a:lnL w="15240">
-                      <a:solidFill>
-                        <a:srgbClr val="000000">
-                          <a:alpha val="100000"/>
-                        </a:srgbClr>
-                      </a:solidFill>
-                      <a:prstDash val="solid"/>
-                    </a:lnL>
-                    <a:lnR w="15240">
-                      <a:solidFill>
-                        <a:srgbClr val="000000">
-                          <a:alpha val="100000"/>
-                        </a:srgbClr>
-                      </a:solidFill>
-                      <a:prstDash val="solid"/>
-                    </a:lnR>
-                    <a:lnT w="15240">
-                      <a:solidFill>
-                        <a:srgbClr val="000000">
-                          <a:alpha val="100000"/>
-                        </a:srgbClr>
-                      </a:solidFill>
-                      <a:prstDash val="solid"/>
-                    </a:lnT>
-                    <a:lnB w="15240">
-                      <a:solidFill>
-                        <a:srgbClr val="000000">
-                          <a:alpha val="100000"/>
-                        </a:srgbClr>
-                      </a:solidFill>
-                      <a:prstDash val="solid"/>
-                    </a:lnB>
-                    <a:solidFill>
-                      <a:schemeClr val="bg1">
-                        <a:alpha val="100000"/>
-                      </a:schemeClr>
-                    </a:solidFill>
-                  </a:tcPr>
-                </a:tc>
-                <a:tc>
-                  <a:txBody>
-                    <a:bodyPr/>
-                    <a:p>
-                      <a:pPr latinLnBrk="1">
-                        <a:defRPr/>
-                      </a:pPr>
-                      <a:r>
-                        <a:rPr lang="en-US" altLang="ko-KR" sz="1700">
-                          <a:solidFill>
-                            <a:srgbClr val="000000"/>
-                          </a:solidFill>
-                        </a:rPr>
-                        <a:t>GET</a:t>
-                      </a:r>
-                      <a:endParaRPr lang="ko-KR" altLang="en-US" sz="1700">
-                        <a:solidFill>
-                          <a:srgbClr val="000000"/>
-                        </a:solidFill>
-                      </a:endParaRPr>
-                    </a:p>
-                  </a:txBody>
-                  <a:tcPr marL="91440" marR="91440">
-                    <a:lnL w="15240">
-                      <a:solidFill>
-                        <a:srgbClr val="000000">
-                          <a:alpha val="100000"/>
-                        </a:srgbClr>
-                      </a:solidFill>
-                      <a:prstDash val="solid"/>
-                    </a:lnL>
-                    <a:lnR w="15240">
-                      <a:solidFill>
-                        <a:srgbClr val="000000">
-                          <a:alpha val="100000"/>
-                        </a:srgbClr>
-                      </a:solidFill>
-                      <a:prstDash val="solid"/>
-                    </a:lnR>
-                    <a:lnT w="15240">
-                      <a:solidFill>
-                        <a:srgbClr val="000000">
-                          <a:alpha val="100000"/>
-                        </a:srgbClr>
-                      </a:solidFill>
-                      <a:prstDash val="solid"/>
-                    </a:lnT>
-                    <a:lnB w="15240">
-                      <a:solidFill>
-                        <a:srgbClr val="000000">
-                          <a:alpha val="100000"/>
-                        </a:srgbClr>
-                      </a:solidFill>
-                      <a:prstDash val="solid"/>
-                    </a:lnB>
-                    <a:solidFill>
-                      <a:schemeClr val="bg1">
-                        <a:alpha val="100000"/>
-                      </a:schemeClr>
-                    </a:solidFill>
-                  </a:tcPr>
-                </a:tc>
-              </a:tr>
-              <a:tr h="270210">
-                <a:tc>
-                  <a:txBody>
-                    <a:bodyPr/>
-                    <a:p>
-                      <a:pPr latinLnBrk="1">
-                        <a:defRPr/>
-                      </a:pPr>
-                      <a:r>
-                        <a:rPr lang="ko-KR" altLang="en-US" sz="1700">
-                          <a:solidFill>
-                            <a:srgbClr val="000000"/>
-                          </a:solidFill>
-                        </a:rPr>
-                        <a:t>글쓰기</a:t>
-                      </a:r>
-                      <a:endParaRPr lang="ko-KR" altLang="en-US" sz="1700">
-                        <a:solidFill>
-                          <a:srgbClr val="000000"/>
-                        </a:solidFill>
-                      </a:endParaRPr>
-                    </a:p>
-                  </a:txBody>
-                  <a:tcPr marL="91440" marR="91440">
-                    <a:lnL w="15240">
-                      <a:solidFill>
-                        <a:srgbClr val="000000">
-                          <a:alpha val="100000"/>
-                        </a:srgbClr>
-                      </a:solidFill>
-                      <a:prstDash val="solid"/>
-                    </a:lnL>
-                    <a:lnR w="15240">
-                      <a:solidFill>
-                        <a:srgbClr val="000000">
-                          <a:alpha val="100000"/>
-                        </a:srgbClr>
-                      </a:solidFill>
-                      <a:prstDash val="solid"/>
-                    </a:lnR>
-                    <a:lnT w="15240">
-                      <a:solidFill>
-                        <a:srgbClr val="000000">
-                          <a:alpha val="100000"/>
-                        </a:srgbClr>
-                      </a:solidFill>
-                      <a:prstDash val="solid"/>
-                    </a:lnT>
-                    <a:lnB w="15240">
-                      <a:solidFill>
-                        <a:srgbClr val="000000">
-                          <a:alpha val="100000"/>
-                        </a:srgbClr>
-                      </a:solidFill>
-                      <a:prstDash val="solid"/>
-                    </a:lnB>
-                    <a:solidFill>
-                      <a:schemeClr val="bg1">
-                        <a:alpha val="100000"/>
-                      </a:schemeClr>
-                    </a:solidFill>
-                  </a:tcPr>
-                </a:tc>
-                <a:tc>
-                  <a:txBody>
-                    <a:bodyPr/>
-                    <a:p>
-                      <a:pPr latinLnBrk="1">
-                        <a:defRPr/>
-                      </a:pPr>
-                      <a:r>
-                        <a:rPr lang="en-US" altLang="ko-KR" sz="1700">
-                          <a:solidFill>
-                            <a:srgbClr val="000000"/>
-                          </a:solidFill>
-                        </a:rPr>
-                        <a:t>write/main</a:t>
-                      </a:r>
-                      <a:endParaRPr lang="ko-KR" altLang="en-US" sz="1700">
-                        <a:solidFill>
-                          <a:srgbClr val="000000"/>
-                        </a:solidFill>
-                      </a:endParaRPr>
-                    </a:p>
-                  </a:txBody>
-                  <a:tcPr marL="91440" marR="91440">
-                    <a:lnL w="15240">
-                      <a:solidFill>
-                        <a:srgbClr val="000000">
-                          <a:alpha val="100000"/>
-                        </a:srgbClr>
-                      </a:solidFill>
-                      <a:prstDash val="solid"/>
-                    </a:lnL>
-                    <a:lnR w="15240">
-                      <a:solidFill>
-                        <a:srgbClr val="000000">
-                          <a:alpha val="100000"/>
-                        </a:srgbClr>
-                      </a:solidFill>
-                      <a:prstDash val="solid"/>
-                    </a:lnR>
-                    <a:lnT w="15240">
-                      <a:solidFill>
-                        <a:srgbClr val="000000">
-                          <a:alpha val="100000"/>
-                        </a:srgbClr>
-                      </a:solidFill>
-                      <a:prstDash val="solid"/>
-                    </a:lnT>
-                    <a:lnB w="15240">
-                      <a:solidFill>
-                        <a:srgbClr val="000000">
-                          <a:alpha val="100000"/>
-                        </a:srgbClr>
-                      </a:solidFill>
-                      <a:prstDash val="solid"/>
-                    </a:lnB>
-                    <a:solidFill>
-                      <a:schemeClr val="bg1">
-                        <a:alpha val="100000"/>
-                      </a:schemeClr>
-                    </a:solidFill>
-                  </a:tcPr>
-                </a:tc>
-                <a:tc>
-                  <a:txBody>
-                    <a:bodyPr/>
-                    <a:p>
-                      <a:pPr latinLnBrk="1">
-                        <a:defRPr/>
-                      </a:pPr>
-                      <a:r>
-                        <a:rPr lang="en-US" altLang="ko-KR" sz="1700">
-                          <a:solidFill>
-                            <a:srgbClr val="000000"/>
-                          </a:solidFill>
-                        </a:rPr>
-                        <a:t>GET</a:t>
-                      </a:r>
-                      <a:endParaRPr lang="ko-KR" altLang="en-US" sz="1700">
-                        <a:solidFill>
-                          <a:srgbClr val="000000"/>
-                        </a:solidFill>
-                      </a:endParaRPr>
-                    </a:p>
-                  </a:txBody>
-                  <a:tcPr marL="91440" marR="91440">
-                    <a:lnL w="15240">
-                      <a:solidFill>
-                        <a:srgbClr val="000000">
-                          <a:alpha val="100000"/>
-                        </a:srgbClr>
-                      </a:solidFill>
-                      <a:prstDash val="solid"/>
-                    </a:lnL>
-                    <a:lnR w="15240">
-                      <a:solidFill>
-                        <a:srgbClr val="000000">
-                          <a:alpha val="100000"/>
-                        </a:srgbClr>
-                      </a:solidFill>
-                      <a:prstDash val="solid"/>
-                    </a:lnR>
-                    <a:lnT w="15240">
-                      <a:solidFill>
-                        <a:srgbClr val="000000">
-                          <a:alpha val="100000"/>
-                        </a:srgbClr>
-                      </a:solidFill>
-                      <a:prstDash val="solid"/>
-                    </a:lnT>
-                    <a:lnB w="15240">
-                      <a:solidFill>
-                        <a:srgbClr val="000000">
-                          <a:alpha val="100000"/>
-                        </a:srgbClr>
-                      </a:solidFill>
-                      <a:prstDash val="solid"/>
-                    </a:lnB>
-                    <a:solidFill>
-                      <a:schemeClr val="bg1">
-                        <a:alpha val="100000"/>
-                      </a:schemeClr>
-                    </a:solidFill>
-                  </a:tcPr>
-                </a:tc>
-              </a:tr>
-              <a:tr h="270210">
-                <a:tc>
-                  <a:txBody>
-                    <a:bodyPr/>
-                    <a:p>
-                      <a:pPr latinLnBrk="1">
-                        <a:defRPr/>
-                      </a:pPr>
-                      <a:r>
-                        <a:rPr lang="ko-KR" altLang="en-US" sz="1700">
-                          <a:solidFill>
-                            <a:srgbClr val="000000"/>
-                          </a:solidFill>
-                        </a:rPr>
-                        <a:t>아래페이지번호</a:t>
-                      </a:r>
-                      <a:endParaRPr lang="ko-KR" altLang="en-US" sz="1700">
-                        <a:solidFill>
-                          <a:srgbClr val="000000"/>
-                        </a:solidFill>
-                      </a:endParaRPr>
-                    </a:p>
-                  </a:txBody>
-                  <a:tcPr marL="91440" marR="91440">
-                    <a:lnL w="15240">
-                      <a:solidFill>
-                        <a:srgbClr val="000000">
-                          <a:alpha val="100000"/>
-                        </a:srgbClr>
-                      </a:solidFill>
-                      <a:prstDash val="solid"/>
-                    </a:lnL>
-                    <a:lnR w="15240">
-                      <a:solidFill>
-                        <a:srgbClr val="000000">
-                          <a:alpha val="100000"/>
-                        </a:srgbClr>
-                      </a:solidFill>
-                      <a:prstDash val="solid"/>
-                    </a:lnR>
-                    <a:lnT w="15240">
-                      <a:solidFill>
-                        <a:srgbClr val="000000">
-                          <a:alpha val="100000"/>
-                        </a:srgbClr>
-                      </a:solidFill>
-                      <a:prstDash val="solid"/>
-                    </a:lnT>
-                    <a:lnB w="15240">
-                      <a:solidFill>
-                        <a:srgbClr val="000000">
-                          <a:alpha val="100000"/>
-                        </a:srgbClr>
-                      </a:solidFill>
-                      <a:prstDash val="solid"/>
-                    </a:lnB>
-                    <a:solidFill>
-                      <a:schemeClr val="bg1">
-                        <a:alpha val="100000"/>
-                      </a:schemeClr>
-                    </a:solidFill>
-                  </a:tcPr>
-                </a:tc>
-                <a:tc>
-                  <a:txBody>
-                    <a:bodyPr/>
-                    <a:p>
-                      <a:pPr latinLnBrk="1">
-                        <a:defRPr/>
-                      </a:pPr>
-                      <a:r>
-                        <a:rPr lang="en-US" altLang="ko-KR" sz="1700">
-                          <a:solidFill>
-                            <a:srgbClr val="000000"/>
-                          </a:solidFill>
-                        </a:rPr>
-                        <a:t>board/{0} - pathvariable</a:t>
-                      </a:r>
-                      <a:endParaRPr lang="ko-KR" altLang="en-US" sz="1700">
-                        <a:solidFill>
-                          <a:srgbClr val="000000"/>
-                        </a:solidFill>
-                      </a:endParaRPr>
-                    </a:p>
-                  </a:txBody>
-                  <a:tcPr marL="91440" marR="91440">
-                    <a:lnL w="15240">
-                      <a:solidFill>
-                        <a:srgbClr val="000000">
-                          <a:alpha val="100000"/>
-                        </a:srgbClr>
-                      </a:solidFill>
-                      <a:prstDash val="solid"/>
-                    </a:lnL>
-                    <a:lnR w="15240">
-                      <a:solidFill>
-                        <a:srgbClr val="000000">
-                          <a:alpha val="100000"/>
-                        </a:srgbClr>
-                      </a:solidFill>
-                      <a:prstDash val="solid"/>
-                    </a:lnR>
-                    <a:lnT w="15240">
-                      <a:solidFill>
-                        <a:srgbClr val="000000">
-                          <a:alpha val="100000"/>
-                        </a:srgbClr>
-                      </a:solidFill>
-                      <a:prstDash val="solid"/>
-                    </a:lnT>
-                    <a:lnB w="15240">
-                      <a:solidFill>
-                        <a:srgbClr val="000000">
-                          <a:alpha val="100000"/>
-                        </a:srgbClr>
-                      </a:solidFill>
-                      <a:prstDash val="solid"/>
-                    </a:lnB>
-                    <a:solidFill>
-                      <a:schemeClr val="bg1">
-                        <a:alpha val="100000"/>
-                      </a:schemeClr>
-                    </a:solidFill>
-                  </a:tcPr>
-                </a:tc>
-                <a:tc>
-                  <a:txBody>
-                    <a:bodyPr/>
-                    <a:p>
-                      <a:pPr latinLnBrk="1">
-                        <a:defRPr/>
-                      </a:pPr>
-                      <a:r>
-                        <a:rPr lang="en-US" altLang="ko-KR" sz="1700">
-                          <a:solidFill>
-                            <a:srgbClr val="000000"/>
-                          </a:solidFill>
-                        </a:rPr>
-                        <a:t>GET</a:t>
-                      </a:r>
-                      <a:endParaRPr lang="ko-KR" altLang="en-US" sz="1700">
-                        <a:solidFill>
-                          <a:srgbClr val="000000"/>
-                        </a:solidFill>
-                      </a:endParaRPr>
-                    </a:p>
-                  </a:txBody>
-                  <a:tcPr marL="91440" marR="91440">
-                    <a:lnL w="15240">
-                      <a:solidFill>
-                        <a:srgbClr val="000000">
-                          <a:alpha val="100000"/>
-                        </a:srgbClr>
-                      </a:solidFill>
-                      <a:prstDash val="solid"/>
-                    </a:lnL>
-                    <a:lnR w="15240">
-                      <a:solidFill>
-                        <a:srgbClr val="000000">
-                          <a:alpha val="100000"/>
-                        </a:srgbClr>
-                      </a:solidFill>
-                      <a:prstDash val="solid"/>
-                    </a:lnR>
-                    <a:lnT w="15240">
-                      <a:solidFill>
-                        <a:srgbClr val="000000">
-                          <a:alpha val="100000"/>
-                        </a:srgbClr>
-                      </a:solidFill>
-                      <a:prstDash val="solid"/>
-                    </a:lnT>
-                    <a:lnB w="15240">
-                      <a:solidFill>
-                        <a:srgbClr val="000000">
-                          <a:alpha val="100000"/>
-                        </a:srgbClr>
-                      </a:solidFill>
-                      <a:prstDash val="solid"/>
-                    </a:lnB>
-                    <a:solidFill>
-                      <a:schemeClr val="bg1">
-                        <a:alpha val="100000"/>
-                      </a:schemeClr>
-                    </a:solidFill>
-                  </a:tcPr>
-                </a:tc>
-              </a:tr>
-              <a:tr h="270210">
-                <a:tc>
-                  <a:txBody>
-                    <a:bodyPr/>
-                    <a:p>
-                      <a:pPr latinLnBrk="1">
-                        <a:defRPr/>
-                      </a:pPr>
-                      <a:r>
-                        <a:rPr lang="ko-KR" altLang="en-US" sz="1700">
-                          <a:solidFill>
-                            <a:srgbClr val="000000"/>
-                          </a:solidFill>
-                        </a:rPr>
-                        <a:t>게시글</a:t>
-                      </a:r>
-                      <a:endParaRPr lang="ko-KR" altLang="en-US" sz="1700">
-                        <a:solidFill>
-                          <a:srgbClr val="000000"/>
-                        </a:solidFill>
-                      </a:endParaRPr>
-                    </a:p>
-                  </a:txBody>
-                  <a:tcPr marL="91440" marR="91440">
-                    <a:lnL w="15240">
-                      <a:solidFill>
-                        <a:srgbClr val="000000">
-                          <a:alpha val="100000"/>
-                        </a:srgbClr>
-                      </a:solidFill>
-                      <a:prstDash val="solid"/>
-                    </a:lnL>
-                    <a:lnR w="15240">
-                      <a:solidFill>
-                        <a:srgbClr val="000000">
-                          <a:alpha val="100000"/>
-                        </a:srgbClr>
-                      </a:solidFill>
-                      <a:prstDash val="solid"/>
-                    </a:lnR>
-                    <a:lnT w="15240">
-                      <a:solidFill>
-                        <a:srgbClr val="000000">
-                          <a:alpha val="100000"/>
-                        </a:srgbClr>
-                      </a:solidFill>
-                      <a:prstDash val="solid"/>
-                    </a:lnT>
-                    <a:lnB w="15240">
-                      <a:solidFill>
-                        <a:srgbClr val="000000">
-                          <a:alpha val="100000"/>
-                        </a:srgbClr>
-                      </a:solidFill>
-                      <a:prstDash val="solid"/>
-                    </a:lnB>
-                    <a:solidFill>
-                      <a:schemeClr val="bg1">
-                        <a:alpha val="100000"/>
-                      </a:schemeClr>
-                    </a:solidFill>
-                  </a:tcPr>
-                </a:tc>
-                <a:tc>
-                  <a:txBody>
-                    <a:bodyPr/>
-                    <a:p>
-                      <a:pPr latinLnBrk="1">
-                        <a:defRPr/>
-                      </a:pPr>
-                      <a:r>
-                        <a:rPr lang="en-US" altLang="ko-KR" sz="1700">
-                          <a:solidFill>
-                            <a:srgbClr val="000000"/>
-                          </a:solidFill>
-                        </a:rPr>
-                        <a:t>content/{0}-pathvariable</a:t>
-                      </a:r>
-                      <a:endParaRPr lang="ko-KR" altLang="en-US" sz="1700">
-                        <a:solidFill>
-                          <a:srgbClr val="000000"/>
-                        </a:solidFill>
-                      </a:endParaRPr>
-                    </a:p>
-                  </a:txBody>
-                  <a:tcPr marL="91440" marR="91440">
-                    <a:lnL w="15240">
-                      <a:solidFill>
-                        <a:srgbClr val="000000">
-                          <a:alpha val="100000"/>
-                        </a:srgbClr>
-                      </a:solidFill>
-                      <a:prstDash val="solid"/>
-                    </a:lnL>
-                    <a:lnR w="15240">
-                      <a:solidFill>
-                        <a:srgbClr val="000000">
-                          <a:alpha val="100000"/>
-                        </a:srgbClr>
-                      </a:solidFill>
-                      <a:prstDash val="solid"/>
-                    </a:lnR>
-                    <a:lnT w="15240">
-                      <a:solidFill>
-                        <a:srgbClr val="000000">
-                          <a:alpha val="100000"/>
-                        </a:srgbClr>
-                      </a:solidFill>
-                      <a:prstDash val="solid"/>
-                    </a:lnT>
-                    <a:lnB w="15240">
-                      <a:solidFill>
-                        <a:srgbClr val="000000">
-                          <a:alpha val="100000"/>
-                        </a:srgbClr>
-                      </a:solidFill>
-                      <a:prstDash val="solid"/>
-                    </a:lnB>
-                    <a:solidFill>
-                      <a:schemeClr val="bg1">
-                        <a:alpha val="100000"/>
-                      </a:schemeClr>
-                    </a:solidFill>
-                  </a:tcPr>
-                </a:tc>
-                <a:tc>
-                  <a:txBody>
-                    <a:bodyPr/>
-                    <a:p>
-                      <a:pPr latinLnBrk="1">
-                        <a:defRPr/>
-                      </a:pPr>
-                      <a:r>
-                        <a:rPr lang="en-US" altLang="ko-KR" sz="1700">
-                          <a:solidFill>
-                            <a:srgbClr val="000000"/>
-                          </a:solidFill>
-                        </a:rPr>
-                        <a:t>GET</a:t>
-                      </a:r>
-                      <a:endParaRPr lang="ko-KR" altLang="en-US" sz="1700">
-                        <a:solidFill>
-                          <a:srgbClr val="000000"/>
-                        </a:solidFill>
-                      </a:endParaRPr>
-                    </a:p>
-                  </a:txBody>
-                  <a:tcPr marL="91440" marR="91440">
-                    <a:lnL w="15240">
-                      <a:solidFill>
-                        <a:srgbClr val="000000">
-                          <a:alpha val="100000"/>
-                        </a:srgbClr>
-                      </a:solidFill>
-                      <a:prstDash val="solid"/>
-                    </a:lnL>
-                    <a:lnR w="15240">
-                      <a:solidFill>
-                        <a:srgbClr val="000000">
-                          <a:alpha val="100000"/>
-                        </a:srgbClr>
-                      </a:solidFill>
-                      <a:prstDash val="solid"/>
-                    </a:lnR>
-                    <a:lnT w="15240">
-                      <a:solidFill>
-                        <a:srgbClr val="000000">
-                          <a:alpha val="100000"/>
-                        </a:srgbClr>
-                      </a:solidFill>
-                      <a:prstDash val="solid"/>
-                    </a:lnT>
-                    <a:lnB w="15240">
-                      <a:solidFill>
-                        <a:srgbClr val="000000">
-                          <a:alpha val="100000"/>
-                        </a:srgbClr>
-                      </a:solidFill>
-                      <a:prstDash val="solid"/>
-                    </a:lnB>
-                    <a:solidFill>
-                      <a:schemeClr val="bg1">
-                        <a:alpha val="100000"/>
-                      </a:schemeClr>
-                    </a:solidFill>
-                  </a:tcPr>
-                </a:tc>
-              </a:tr>
-            </a:tbl>
-          </a:graphicData>
-        </a:graphic>
-      </p:graphicFrame>
-    </p:spTree>
-    <p:extLst>
-      <p:ext uri="{BB962C8B-B14F-4D97-AF65-F5344CB8AC3E}">
-        <p14:creationId xmlns:p14="http://schemas.microsoft.com/office/powerpoint/2010/main" val="697001885"/>
-      </p:ext>
-    </p:extLst>
-  </p:cSld>
-  <p:clrMapOvr>
-    <a:masterClrMapping/>
-  </p:clrMapOvr>
-</p:sld>
-</file>
-
 <file path=ppt/slides/slide2.xml><?xml version="1.0" encoding="utf-8"?>
 <p:sld xmlns:r="http://schemas.openxmlformats.org/officeDocument/2006/relationships" xmlns:c="http://schemas.openxmlformats.org/drawingml/2006/chart" xmlns:a="http://schemas.openxmlformats.org/drawingml/2006/main" xmlns:dgm="http://schemas.openxmlformats.org/drawingml/2006/diagram" xmlns:dsp="http://schemas.microsoft.com/office/drawing/2008/diagram" xmlns:p="http://schemas.openxmlformats.org/presentationml/2006/main">
   <p:cSld>
@@ -17916,6 +18078,24 @@
                         </a:rPr>
                         <a:t>front/main</a:t>
                       </a:r>
+                      <a:endParaRPr lang="en-US" altLang="ko-KR" sz="1700">
+                        <a:solidFill>
+                          <a:srgbClr val="000000"/>
+                        </a:solidFill>
+                      </a:endParaRPr>
+                    </a:p>
+                    <a:p>
+                      <a:pPr latinLnBrk="1">
+                        <a:defRPr/>
+                      </a:pPr>
+                      <a:r>
+                        <a:rPr lang="en-US" altLang="ko-KR" sz="1700">
+                          <a:solidFill>
+                            <a:srgbClr val="000000"/>
+                          </a:solidFill>
+                        </a:rPr>
+                        <a:t>./front.html</a:t>
+                      </a:r>
                       <a:endParaRPr lang="ko-KR" altLang="en-US" sz="1700">
                         <a:solidFill>
                           <a:srgbClr val="000000"/>
@@ -18104,6 +18284,24 @@
                         </a:rPr>
                         <a:t>login/main</a:t>
                       </a:r>
+                      <a:endParaRPr lang="en-US" altLang="ko-KR" sz="1700">
+                        <a:solidFill>
+                          <a:srgbClr val="000000"/>
+                        </a:solidFill>
+                      </a:endParaRPr>
+                    </a:p>
+                    <a:p>
+                      <a:pPr latinLnBrk="1">
+                        <a:defRPr/>
+                      </a:pPr>
+                      <a:r>
+                        <a:rPr lang="en-US" altLang="ko-KR" sz="1700">
+                          <a:solidFill>
+                            <a:srgbClr val="000000"/>
+                          </a:solidFill>
+                        </a:rPr>
+                        <a:t>./login.html</a:t>
+                      </a:r>
                       <a:endParaRPr lang="ko-KR" altLang="en-US" sz="1700">
                         <a:solidFill>
                           <a:srgbClr val="000000"/>
@@ -18292,6 +18490,24 @@
                         </a:rPr>
                         <a:t>join/main</a:t>
                       </a:r>
+                      <a:endParaRPr lang="en-US" altLang="ko-KR" sz="1700">
+                        <a:solidFill>
+                          <a:srgbClr val="000000"/>
+                        </a:solidFill>
+                      </a:endParaRPr>
+                    </a:p>
+                    <a:p>
+                      <a:pPr latinLnBrk="1">
+                        <a:defRPr/>
+                      </a:pPr>
+                      <a:r>
+                        <a:rPr lang="en-US" altLang="ko-KR" sz="1700">
+                          <a:solidFill>
+                            <a:srgbClr val="000000"/>
+                          </a:solidFill>
+                        </a:rPr>
+                        <a:t>./signUp.html</a:t>
+                      </a:r>
                       <a:endParaRPr lang="ko-KR" altLang="en-US" sz="1700">
                         <a:solidFill>
                           <a:srgbClr val="000000"/>
@@ -18479,6 +18695,24 @@
                           </a:solidFill>
                         </a:rPr>
                         <a:t>data_searching/main</a:t>
+                      </a:r>
+                      <a:endParaRPr lang="en-US" altLang="ko-KR" sz="1700">
+                        <a:solidFill>
+                          <a:srgbClr val="000000"/>
+                        </a:solidFill>
+                      </a:endParaRPr>
+                    </a:p>
+                    <a:p>
+                      <a:pPr latinLnBrk="1">
+                        <a:defRPr/>
+                      </a:pPr>
+                      <a:r>
+                        <a:rPr lang="en-US" altLang="ko-KR" sz="1700">
+                          <a:solidFill>
+                            <a:srgbClr val="000000"/>
+                          </a:solidFill>
+                        </a:rPr>
+                        <a:t>./searchBook.html</a:t>
                       </a:r>
                       <a:endParaRPr lang="ko-KR" altLang="en-US" sz="1700">
                         <a:solidFill>
@@ -19408,6 +19642,1585 @@
 </file>
 
 <file path=ppt/slides/slide20.xml><?xml version="1.0" encoding="utf-8"?>
+<p:sld xmlns:r="http://schemas.openxmlformats.org/officeDocument/2006/relationships" xmlns:c="http://schemas.openxmlformats.org/drawingml/2006/chart" xmlns:a="http://schemas.openxmlformats.org/drawingml/2006/main" xmlns:dgm="http://schemas.openxmlformats.org/drawingml/2006/diagram" xmlns:dsp="http://schemas.microsoft.com/office/drawing/2008/diagram" xmlns:p="http://schemas.openxmlformats.org/presentationml/2006/main">
+  <p:cSld>
+    <p:spTree>
+      <p:nvGrpSpPr>
+        <p:cNvPr id="1" name=""/>
+        <p:cNvGrpSpPr/>
+        <p:nvPr/>
+      </p:nvGrpSpPr>
+      <p:grpSpPr>
+        <a:xfrm>
+          <a:off x="0" y="0"/>
+          <a:ext cx="0" cy="0"/>
+          <a:chOff x="0" y="0"/>
+          <a:chExt cx="0" cy="0"/>
+        </a:xfrm>
+      </p:grpSpPr>
+      <p:graphicFrame>
+        <p:nvGraphicFramePr>
+          <p:cNvPr id="2" name="Table"/>
+          <p:cNvGraphicFramePr>
+            <a:graphicFrameLocks noGrp="1"/>
+          </p:cNvGraphicFramePr>
+          <p:nvPr/>
+        </p:nvGraphicFramePr>
+        <p:xfrm>
+          <a:off x="2032052" y="2027110"/>
+          <a:ext cx="8128000" cy="1854200"/>
+        </p:xfrm>
+        <a:graphic>
+          <a:graphicData uri="http://schemas.openxmlformats.org/drawingml/2006/table">
+            <a:tbl>
+              <a:tblPr firstRow="1" bandRow="1">
+                <a:tableStyleId>{01A66EDD-3DAB-4C5B-A090-DC80EC1FD486}</a:tableStyleId>
+              </a:tblPr>
+              <a:tblGrid>
+                <a:gridCol w="2709333"/>
+                <a:gridCol w="2709333"/>
+                <a:gridCol w="2709333"/>
+              </a:tblGrid>
+              <a:tr h="270210">
+                <a:tc gridSpan="3">
+                  <a:txBody>
+                    <a:bodyPr/>
+                    <a:p>
+                      <a:pPr latinLnBrk="1">
+                        <a:defRPr/>
+                      </a:pPr>
+                      <a:r>
+                        <a:rPr lang="ko-KR" altLang="en-US" sz="1700">
+                          <a:solidFill>
+                            <a:srgbClr val="000000"/>
+                          </a:solidFill>
+                        </a:rPr>
+                        <a:t>버튼</a:t>
+                      </a:r>
+                      <a:r>
+                        <a:rPr lang="en-US" altLang="ko-KR" sz="1700">
+                          <a:solidFill>
+                            <a:srgbClr val="000000"/>
+                          </a:solidFill>
+                        </a:rPr>
+                        <a:t> URL</a:t>
+                      </a:r>
+                      <a:endParaRPr lang="ko-KR" altLang="en-US" sz="1700">
+                        <a:solidFill>
+                          <a:srgbClr val="000000"/>
+                        </a:solidFill>
+                      </a:endParaRPr>
+                    </a:p>
+                  </a:txBody>
+                  <a:tcPr marL="91440" marR="91440">
+                    <a:lnL w="15240">
+                      <a:solidFill>
+                        <a:srgbClr val="000000">
+                          <a:alpha val="100000"/>
+                        </a:srgbClr>
+                      </a:solidFill>
+                      <a:prstDash val="solid"/>
+                    </a:lnL>
+                    <a:lnR w="15240">
+                      <a:solidFill>
+                        <a:srgbClr val="000000">
+                          <a:alpha val="100000"/>
+                        </a:srgbClr>
+                      </a:solidFill>
+                      <a:prstDash val="solid"/>
+                    </a:lnR>
+                    <a:lnT w="15240">
+                      <a:solidFill>
+                        <a:srgbClr val="000000">
+                          <a:alpha val="100000"/>
+                        </a:srgbClr>
+                      </a:solidFill>
+                      <a:prstDash val="solid"/>
+                    </a:lnT>
+                    <a:lnB w="15240">
+                      <a:solidFill>
+                        <a:srgbClr val="000000">
+                          <a:alpha val="100000"/>
+                        </a:srgbClr>
+                      </a:solidFill>
+                      <a:prstDash val="solid"/>
+                    </a:lnB>
+                    <a:solidFill>
+                      <a:schemeClr val="bg1">
+                        <a:alpha val="100000"/>
+                      </a:schemeClr>
+                    </a:solidFill>
+                  </a:tcPr>
+                </a:tc>
+                <a:tc hMerge="1">
+                  <a:txBody>
+                    <a:bodyPr/>
+                    <a:p>
+                      <a:pPr latinLnBrk="1">
+                        <a:defRPr/>
+                      </a:pPr>
+                      <a:endParaRPr lang="ko-KR" altLang="en-US"/>
+                    </a:p>
+                  </a:txBody>
+                  <a:tcPr marL="91440" marR="91440">
+                    <a:lnL w="15240">
+                      <a:solidFill>
+                        <a:srgbClr val="000000">
+                          <a:alpha val="100000"/>
+                        </a:srgbClr>
+                      </a:solidFill>
+                      <a:prstDash val="solid"/>
+                    </a:lnL>
+                    <a:lnR w="15240">
+                      <a:solidFill>
+                        <a:srgbClr val="000000">
+                          <a:alpha val="100000"/>
+                        </a:srgbClr>
+                      </a:solidFill>
+                      <a:prstDash val="solid"/>
+                    </a:lnR>
+                    <a:lnT w="15240">
+                      <a:solidFill>
+                        <a:srgbClr val="000000">
+                          <a:alpha val="100000"/>
+                        </a:srgbClr>
+                      </a:solidFill>
+                      <a:prstDash val="solid"/>
+                    </a:lnT>
+                    <a:lnB w="15240">
+                      <a:solidFill>
+                        <a:srgbClr val="000000">
+                          <a:alpha val="100000"/>
+                        </a:srgbClr>
+                      </a:solidFill>
+                      <a:prstDash val="solid"/>
+                    </a:lnB>
+                    <a:solidFill>
+                      <a:schemeClr val="bg1">
+                        <a:alpha val="100000"/>
+                      </a:schemeClr>
+                    </a:solidFill>
+                  </a:tcPr>
+                </a:tc>
+                <a:tc hMerge="1">
+                  <a:txBody>
+                    <a:bodyPr/>
+                    <a:p>
+                      <a:pPr latinLnBrk="1">
+                        <a:defRPr/>
+                      </a:pPr>
+                      <a:endParaRPr lang="ko-KR" altLang="en-US"/>
+                    </a:p>
+                  </a:txBody>
+                  <a:tcPr marL="91440" marR="91440">
+                    <a:lnL w="15240">
+                      <a:solidFill>
+                        <a:srgbClr val="000000">
+                          <a:alpha val="100000"/>
+                        </a:srgbClr>
+                      </a:solidFill>
+                      <a:prstDash val="solid"/>
+                    </a:lnL>
+                    <a:lnR w="15240">
+                      <a:solidFill>
+                        <a:srgbClr val="000000">
+                          <a:alpha val="100000"/>
+                        </a:srgbClr>
+                      </a:solidFill>
+                      <a:prstDash val="solid"/>
+                    </a:lnR>
+                    <a:lnT w="15240">
+                      <a:solidFill>
+                        <a:srgbClr val="000000">
+                          <a:alpha val="100000"/>
+                        </a:srgbClr>
+                      </a:solidFill>
+                      <a:prstDash val="solid"/>
+                    </a:lnT>
+                    <a:lnB w="15240">
+                      <a:solidFill>
+                        <a:srgbClr val="000000">
+                          <a:alpha val="100000"/>
+                        </a:srgbClr>
+                      </a:solidFill>
+                      <a:prstDash val="solid"/>
+                    </a:lnB>
+                    <a:solidFill>
+                      <a:schemeClr val="bg1">
+                        <a:alpha val="100000"/>
+                      </a:schemeClr>
+                    </a:solidFill>
+                  </a:tcPr>
+                </a:tc>
+              </a:tr>
+              <a:tr h="270210">
+                <a:tc>
+                  <a:txBody>
+                    <a:bodyPr/>
+                    <a:p>
+                      <a:pPr latinLnBrk="1">
+                        <a:defRPr/>
+                      </a:pPr>
+                      <a:r>
+                        <a:rPr lang="ko-KR" altLang="en-US" sz="1700" b="1">
+                          <a:solidFill>
+                            <a:srgbClr val="000000"/>
+                          </a:solidFill>
+                        </a:rPr>
+                        <a:t>버튼명</a:t>
+                      </a:r>
+                      <a:endParaRPr lang="ko-KR" altLang="en-US" sz="1700" b="1">
+                        <a:solidFill>
+                          <a:srgbClr val="000000"/>
+                        </a:solidFill>
+                      </a:endParaRPr>
+                    </a:p>
+                  </a:txBody>
+                  <a:tcPr marL="91440" marR="91440">
+                    <a:lnL w="15240">
+                      <a:solidFill>
+                        <a:srgbClr val="000000">
+                          <a:alpha val="100000"/>
+                        </a:srgbClr>
+                      </a:solidFill>
+                      <a:prstDash val="solid"/>
+                    </a:lnL>
+                    <a:lnR w="15240">
+                      <a:solidFill>
+                        <a:srgbClr val="000000">
+                          <a:alpha val="100000"/>
+                        </a:srgbClr>
+                      </a:solidFill>
+                      <a:prstDash val="solid"/>
+                    </a:lnR>
+                    <a:lnT w="15240">
+                      <a:solidFill>
+                        <a:srgbClr val="000000">
+                          <a:alpha val="100000"/>
+                        </a:srgbClr>
+                      </a:solidFill>
+                      <a:prstDash val="solid"/>
+                    </a:lnT>
+                    <a:lnB w="15240">
+                      <a:solidFill>
+                        <a:srgbClr val="000000">
+                          <a:alpha val="100000"/>
+                        </a:srgbClr>
+                      </a:solidFill>
+                      <a:prstDash val="solid"/>
+                    </a:lnB>
+                    <a:solidFill>
+                      <a:schemeClr val="bg1">
+                        <a:alpha val="100000"/>
+                      </a:schemeClr>
+                    </a:solidFill>
+                  </a:tcPr>
+                </a:tc>
+                <a:tc>
+                  <a:txBody>
+                    <a:bodyPr/>
+                    <a:p>
+                      <a:pPr latinLnBrk="1">
+                        <a:defRPr/>
+                      </a:pPr>
+                      <a:r>
+                        <a:rPr lang="en-US" altLang="ko-KR" sz="1700" b="1">
+                          <a:solidFill>
+                            <a:srgbClr val="000000"/>
+                          </a:solidFill>
+                        </a:rPr>
+                        <a:t>URL</a:t>
+                      </a:r>
+                      <a:endParaRPr lang="ko-KR" altLang="en-US" sz="1700" b="1">
+                        <a:solidFill>
+                          <a:srgbClr val="000000"/>
+                        </a:solidFill>
+                      </a:endParaRPr>
+                    </a:p>
+                  </a:txBody>
+                  <a:tcPr marL="91440" marR="91440">
+                    <a:lnL w="15240">
+                      <a:solidFill>
+                        <a:srgbClr val="000000">
+                          <a:alpha val="100000"/>
+                        </a:srgbClr>
+                      </a:solidFill>
+                      <a:prstDash val="solid"/>
+                    </a:lnL>
+                    <a:lnR w="15240">
+                      <a:solidFill>
+                        <a:srgbClr val="000000">
+                          <a:alpha val="100000"/>
+                        </a:srgbClr>
+                      </a:solidFill>
+                      <a:prstDash val="solid"/>
+                    </a:lnR>
+                    <a:lnT w="15240">
+                      <a:solidFill>
+                        <a:srgbClr val="000000">
+                          <a:alpha val="100000"/>
+                        </a:srgbClr>
+                      </a:solidFill>
+                      <a:prstDash val="solid"/>
+                    </a:lnT>
+                    <a:lnB w="15240">
+                      <a:solidFill>
+                        <a:srgbClr val="000000">
+                          <a:alpha val="100000"/>
+                        </a:srgbClr>
+                      </a:solidFill>
+                      <a:prstDash val="solid"/>
+                    </a:lnB>
+                    <a:solidFill>
+                      <a:schemeClr val="bg1">
+                        <a:alpha val="100000"/>
+                      </a:schemeClr>
+                    </a:solidFill>
+                  </a:tcPr>
+                </a:tc>
+                <a:tc>
+                  <a:txBody>
+                    <a:bodyPr/>
+                    <a:p>
+                      <a:pPr latinLnBrk="1">
+                        <a:defRPr/>
+                      </a:pPr>
+                      <a:r>
+                        <a:rPr lang="en-US" altLang="ko-KR" sz="1700" b="1">
+                          <a:solidFill>
+                            <a:srgbClr val="000000"/>
+                          </a:solidFill>
+                        </a:rPr>
+                        <a:t>METHOD</a:t>
+                      </a:r>
+                      <a:endParaRPr lang="ko-KR" altLang="en-US" sz="1700" b="1">
+                        <a:solidFill>
+                          <a:srgbClr val="000000"/>
+                        </a:solidFill>
+                      </a:endParaRPr>
+                    </a:p>
+                  </a:txBody>
+                  <a:tcPr marL="91440" marR="91440">
+                    <a:lnL w="15240">
+                      <a:solidFill>
+                        <a:srgbClr val="000000">
+                          <a:alpha val="100000"/>
+                        </a:srgbClr>
+                      </a:solidFill>
+                      <a:prstDash val="solid"/>
+                    </a:lnL>
+                    <a:lnR w="15240">
+                      <a:solidFill>
+                        <a:srgbClr val="000000">
+                          <a:alpha val="100000"/>
+                        </a:srgbClr>
+                      </a:solidFill>
+                      <a:prstDash val="solid"/>
+                    </a:lnR>
+                    <a:lnT w="15240">
+                      <a:solidFill>
+                        <a:srgbClr val="000000">
+                          <a:alpha val="100000"/>
+                        </a:srgbClr>
+                      </a:solidFill>
+                      <a:prstDash val="solid"/>
+                    </a:lnT>
+                    <a:lnB w="15240">
+                      <a:solidFill>
+                        <a:srgbClr val="000000">
+                          <a:alpha val="100000"/>
+                        </a:srgbClr>
+                      </a:solidFill>
+                      <a:prstDash val="solid"/>
+                    </a:lnB>
+                    <a:solidFill>
+                      <a:schemeClr val="bg1">
+                        <a:alpha val="100000"/>
+                      </a:schemeClr>
+                    </a:solidFill>
+                  </a:tcPr>
+                </a:tc>
+              </a:tr>
+              <a:tr h="270210">
+                <a:tc>
+                  <a:txBody>
+                    <a:bodyPr/>
+                    <a:p>
+                      <a:pPr latinLnBrk="1">
+                        <a:defRPr/>
+                      </a:pPr>
+                      <a:r>
+                        <a:rPr lang="ko-KR" altLang="en-US" sz="1700">
+                          <a:solidFill>
+                            <a:srgbClr val="000000"/>
+                          </a:solidFill>
+                        </a:rPr>
+                        <a:t>홈</a:t>
+                      </a:r>
+                      <a:endParaRPr lang="ko-KR" altLang="en-US" sz="1700">
+                        <a:solidFill>
+                          <a:srgbClr val="000000"/>
+                        </a:solidFill>
+                      </a:endParaRPr>
+                    </a:p>
+                  </a:txBody>
+                  <a:tcPr marL="91440" marR="91440">
+                    <a:lnL w="15240">
+                      <a:solidFill>
+                        <a:srgbClr val="000000">
+                          <a:alpha val="100000"/>
+                        </a:srgbClr>
+                      </a:solidFill>
+                      <a:prstDash val="solid"/>
+                    </a:lnL>
+                    <a:lnR w="15240">
+                      <a:solidFill>
+                        <a:srgbClr val="000000">
+                          <a:alpha val="100000"/>
+                        </a:srgbClr>
+                      </a:solidFill>
+                      <a:prstDash val="solid"/>
+                    </a:lnR>
+                    <a:lnT w="15240">
+                      <a:solidFill>
+                        <a:srgbClr val="000000">
+                          <a:alpha val="100000"/>
+                        </a:srgbClr>
+                      </a:solidFill>
+                      <a:prstDash val="solid"/>
+                    </a:lnT>
+                    <a:lnB w="15240">
+                      <a:solidFill>
+                        <a:srgbClr val="000000">
+                          <a:alpha val="100000"/>
+                        </a:srgbClr>
+                      </a:solidFill>
+                      <a:prstDash val="solid"/>
+                    </a:lnB>
+                    <a:solidFill>
+                      <a:schemeClr val="bg1">
+                        <a:alpha val="100000"/>
+                      </a:schemeClr>
+                    </a:solidFill>
+                  </a:tcPr>
+                </a:tc>
+                <a:tc>
+                  <a:txBody>
+                    <a:bodyPr/>
+                    <a:p>
+                      <a:pPr latinLnBrk="1">
+                        <a:defRPr/>
+                      </a:pPr>
+                      <a:r>
+                        <a:rPr lang="en-US" altLang="ko-KR" sz="1700">
+                          <a:solidFill>
+                            <a:srgbClr val="000000"/>
+                          </a:solidFill>
+                        </a:rPr>
+                        <a:t>front/main</a:t>
+                      </a:r>
+                      <a:endParaRPr lang="en-US" altLang="ko-KR" sz="1700">
+                        <a:solidFill>
+                          <a:srgbClr val="000000"/>
+                        </a:solidFill>
+                      </a:endParaRPr>
+                    </a:p>
+                    <a:p>
+                      <a:pPr latinLnBrk="1">
+                        <a:defRPr/>
+                      </a:pPr>
+                      <a:r>
+                        <a:rPr lang="en-US" altLang="ko-KR" sz="1700">
+                          <a:solidFill>
+                            <a:srgbClr val="000000"/>
+                          </a:solidFill>
+                        </a:rPr>
+                        <a:t>./front.html</a:t>
+                      </a:r>
+                      <a:endParaRPr lang="ko-KR" altLang="en-US" sz="1700">
+                        <a:solidFill>
+                          <a:srgbClr val="000000"/>
+                        </a:solidFill>
+                      </a:endParaRPr>
+                    </a:p>
+                  </a:txBody>
+                  <a:tcPr marL="91440" marR="91440">
+                    <a:lnL w="15240">
+                      <a:solidFill>
+                        <a:srgbClr val="000000">
+                          <a:alpha val="100000"/>
+                        </a:srgbClr>
+                      </a:solidFill>
+                      <a:prstDash val="solid"/>
+                    </a:lnL>
+                    <a:lnR w="15240">
+                      <a:solidFill>
+                        <a:srgbClr val="000000">
+                          <a:alpha val="100000"/>
+                        </a:srgbClr>
+                      </a:solidFill>
+                      <a:prstDash val="solid"/>
+                    </a:lnR>
+                    <a:lnT w="15240">
+                      <a:solidFill>
+                        <a:srgbClr val="000000">
+                          <a:alpha val="100000"/>
+                        </a:srgbClr>
+                      </a:solidFill>
+                      <a:prstDash val="solid"/>
+                    </a:lnT>
+                    <a:lnB w="15240">
+                      <a:solidFill>
+                        <a:srgbClr val="000000">
+                          <a:alpha val="100000"/>
+                        </a:srgbClr>
+                      </a:solidFill>
+                      <a:prstDash val="solid"/>
+                    </a:lnB>
+                    <a:solidFill>
+                      <a:schemeClr val="bg1">
+                        <a:alpha val="100000"/>
+                      </a:schemeClr>
+                    </a:solidFill>
+                  </a:tcPr>
+                </a:tc>
+                <a:tc>
+                  <a:txBody>
+                    <a:bodyPr/>
+                    <a:p>
+                      <a:pPr latinLnBrk="1">
+                        <a:defRPr/>
+                      </a:pPr>
+                      <a:r>
+                        <a:rPr lang="en-US" altLang="ko-KR" sz="1700">
+                          <a:solidFill>
+                            <a:srgbClr val="000000"/>
+                          </a:solidFill>
+                        </a:rPr>
+                        <a:t>GET</a:t>
+                      </a:r>
+                      <a:endParaRPr lang="ko-KR" altLang="en-US" sz="1700">
+                        <a:solidFill>
+                          <a:srgbClr val="000000"/>
+                        </a:solidFill>
+                      </a:endParaRPr>
+                    </a:p>
+                  </a:txBody>
+                  <a:tcPr marL="91440" marR="91440">
+                    <a:lnL w="15240">
+                      <a:solidFill>
+                        <a:srgbClr val="000000">
+                          <a:alpha val="100000"/>
+                        </a:srgbClr>
+                      </a:solidFill>
+                      <a:prstDash val="solid"/>
+                    </a:lnL>
+                    <a:lnR w="15240">
+                      <a:solidFill>
+                        <a:srgbClr val="000000">
+                          <a:alpha val="100000"/>
+                        </a:srgbClr>
+                      </a:solidFill>
+                      <a:prstDash val="solid"/>
+                    </a:lnR>
+                    <a:lnT w="15240">
+                      <a:solidFill>
+                        <a:srgbClr val="000000">
+                          <a:alpha val="100000"/>
+                        </a:srgbClr>
+                      </a:solidFill>
+                      <a:prstDash val="solid"/>
+                    </a:lnT>
+                    <a:lnB w="15240">
+                      <a:solidFill>
+                        <a:srgbClr val="000000">
+                          <a:alpha val="100000"/>
+                        </a:srgbClr>
+                      </a:solidFill>
+                      <a:prstDash val="solid"/>
+                    </a:lnB>
+                    <a:solidFill>
+                      <a:schemeClr val="bg1">
+                        <a:alpha val="100000"/>
+                      </a:schemeClr>
+                    </a:solidFill>
+                  </a:tcPr>
+                </a:tc>
+              </a:tr>
+              <a:tr h="270210">
+                <a:tc>
+                  <a:txBody>
+                    <a:bodyPr/>
+                    <a:p>
+                      <a:pPr latinLnBrk="1">
+                        <a:defRPr/>
+                      </a:pPr>
+                      <a:r>
+                        <a:rPr lang="ko-KR" altLang="en-US" sz="1700">
+                          <a:solidFill>
+                            <a:srgbClr val="000000"/>
+                          </a:solidFill>
+                        </a:rPr>
+                        <a:t>정보수정</a:t>
+                      </a:r>
+                      <a:endParaRPr lang="ko-KR" altLang="en-US" sz="1700">
+                        <a:solidFill>
+                          <a:srgbClr val="000000"/>
+                        </a:solidFill>
+                      </a:endParaRPr>
+                    </a:p>
+                  </a:txBody>
+                  <a:tcPr marL="91440" marR="91440">
+                    <a:lnL w="15240">
+                      <a:solidFill>
+                        <a:srgbClr val="000000">
+                          <a:alpha val="100000"/>
+                        </a:srgbClr>
+                      </a:solidFill>
+                      <a:prstDash val="solid"/>
+                    </a:lnL>
+                    <a:lnR w="15240">
+                      <a:solidFill>
+                        <a:srgbClr val="000000">
+                          <a:alpha val="100000"/>
+                        </a:srgbClr>
+                      </a:solidFill>
+                      <a:prstDash val="solid"/>
+                    </a:lnR>
+                    <a:lnT w="15240">
+                      <a:solidFill>
+                        <a:srgbClr val="000000">
+                          <a:alpha val="100000"/>
+                        </a:srgbClr>
+                      </a:solidFill>
+                      <a:prstDash val="solid"/>
+                    </a:lnT>
+                    <a:lnB w="15240">
+                      <a:solidFill>
+                        <a:srgbClr val="000000">
+                          <a:alpha val="100000"/>
+                        </a:srgbClr>
+                      </a:solidFill>
+                      <a:prstDash val="solid"/>
+                    </a:lnB>
+                    <a:solidFill>
+                      <a:schemeClr val="bg1">
+                        <a:alpha val="100000"/>
+                      </a:schemeClr>
+                    </a:solidFill>
+                  </a:tcPr>
+                </a:tc>
+                <a:tc>
+                  <a:txBody>
+                    <a:bodyPr/>
+                    <a:p>
+                      <a:pPr latinLnBrk="1">
+                        <a:defRPr/>
+                      </a:pPr>
+                      <a:r>
+                        <a:rPr lang="en-US" altLang="ko-KR" sz="1700">
+                          <a:solidFill>
+                            <a:srgbClr val="000000"/>
+                          </a:solidFill>
+                        </a:rPr>
+                        <a:t>update/checkPass</a:t>
+                      </a:r>
+                      <a:endParaRPr lang="ko-KR" altLang="en-US" sz="1700">
+                        <a:solidFill>
+                          <a:srgbClr val="000000"/>
+                        </a:solidFill>
+                      </a:endParaRPr>
+                    </a:p>
+                  </a:txBody>
+                  <a:tcPr marL="91440" marR="91440">
+                    <a:lnL w="15240">
+                      <a:solidFill>
+                        <a:srgbClr val="000000">
+                          <a:alpha val="100000"/>
+                        </a:srgbClr>
+                      </a:solidFill>
+                      <a:prstDash val="solid"/>
+                    </a:lnL>
+                    <a:lnR w="15240">
+                      <a:solidFill>
+                        <a:srgbClr val="000000">
+                          <a:alpha val="100000"/>
+                        </a:srgbClr>
+                      </a:solidFill>
+                      <a:prstDash val="solid"/>
+                    </a:lnR>
+                    <a:lnT w="15240">
+                      <a:solidFill>
+                        <a:srgbClr val="000000">
+                          <a:alpha val="100000"/>
+                        </a:srgbClr>
+                      </a:solidFill>
+                      <a:prstDash val="solid"/>
+                    </a:lnT>
+                    <a:lnB w="15240">
+                      <a:solidFill>
+                        <a:srgbClr val="000000">
+                          <a:alpha val="100000"/>
+                        </a:srgbClr>
+                      </a:solidFill>
+                      <a:prstDash val="solid"/>
+                    </a:lnB>
+                    <a:solidFill>
+                      <a:schemeClr val="bg1">
+                        <a:alpha val="100000"/>
+                      </a:schemeClr>
+                    </a:solidFill>
+                  </a:tcPr>
+                </a:tc>
+                <a:tc>
+                  <a:txBody>
+                    <a:bodyPr/>
+                    <a:p>
+                      <a:pPr latinLnBrk="1">
+                        <a:defRPr/>
+                      </a:pPr>
+                      <a:r>
+                        <a:rPr lang="en-US" altLang="ko-KR" sz="1700">
+                          <a:solidFill>
+                            <a:srgbClr val="000000"/>
+                          </a:solidFill>
+                        </a:rPr>
+                        <a:t>GET</a:t>
+                      </a:r>
+                      <a:endParaRPr lang="ko-KR" altLang="en-US" sz="1700">
+                        <a:solidFill>
+                          <a:srgbClr val="000000"/>
+                        </a:solidFill>
+                      </a:endParaRPr>
+                    </a:p>
+                  </a:txBody>
+                  <a:tcPr marL="91440" marR="91440">
+                    <a:lnL w="15240">
+                      <a:solidFill>
+                        <a:srgbClr val="000000">
+                          <a:alpha val="100000"/>
+                        </a:srgbClr>
+                      </a:solidFill>
+                      <a:prstDash val="solid"/>
+                    </a:lnL>
+                    <a:lnR w="15240">
+                      <a:solidFill>
+                        <a:srgbClr val="000000">
+                          <a:alpha val="100000"/>
+                        </a:srgbClr>
+                      </a:solidFill>
+                      <a:prstDash val="solid"/>
+                    </a:lnR>
+                    <a:lnT w="15240">
+                      <a:solidFill>
+                        <a:srgbClr val="000000">
+                          <a:alpha val="100000"/>
+                        </a:srgbClr>
+                      </a:solidFill>
+                      <a:prstDash val="solid"/>
+                    </a:lnT>
+                    <a:lnB w="15240">
+                      <a:solidFill>
+                        <a:srgbClr val="000000">
+                          <a:alpha val="100000"/>
+                        </a:srgbClr>
+                      </a:solidFill>
+                      <a:prstDash val="solid"/>
+                    </a:lnB>
+                    <a:solidFill>
+                      <a:schemeClr val="bg1">
+                        <a:alpha val="100000"/>
+                      </a:schemeClr>
+                    </a:solidFill>
+                  </a:tcPr>
+                </a:tc>
+              </a:tr>
+              <a:tr h="270210">
+                <a:tc>
+                  <a:txBody>
+                    <a:bodyPr/>
+                    <a:p>
+                      <a:pPr latinLnBrk="1">
+                        <a:defRPr/>
+                      </a:pPr>
+                      <a:r>
+                        <a:rPr lang="ko-KR" altLang="en-US" sz="1700">
+                          <a:solidFill>
+                            <a:srgbClr val="000000"/>
+                          </a:solidFill>
+                        </a:rPr>
+                        <a:t>나의</a:t>
+                      </a:r>
+                      <a:r>
+                        <a:rPr lang="en-US" altLang="ko-KR" sz="1700">
+                          <a:solidFill>
+                            <a:srgbClr val="000000"/>
+                          </a:solidFill>
+                        </a:rPr>
+                        <a:t> </a:t>
+                      </a:r>
+                      <a:r>
+                        <a:rPr lang="ko-KR" altLang="en-US" sz="1700">
+                          <a:solidFill>
+                            <a:srgbClr val="000000"/>
+                          </a:solidFill>
+                        </a:rPr>
+                        <a:t>게시글</a:t>
+                      </a:r>
+                      <a:endParaRPr lang="ko-KR" altLang="en-US" sz="1700">
+                        <a:solidFill>
+                          <a:srgbClr val="000000"/>
+                        </a:solidFill>
+                      </a:endParaRPr>
+                    </a:p>
+                  </a:txBody>
+                  <a:tcPr marL="91440" marR="91440">
+                    <a:lnL w="15240">
+                      <a:solidFill>
+                        <a:srgbClr val="000000">
+                          <a:alpha val="100000"/>
+                        </a:srgbClr>
+                      </a:solidFill>
+                      <a:prstDash val="solid"/>
+                    </a:lnL>
+                    <a:lnR w="15240">
+                      <a:solidFill>
+                        <a:srgbClr val="000000">
+                          <a:alpha val="100000"/>
+                        </a:srgbClr>
+                      </a:solidFill>
+                      <a:prstDash val="solid"/>
+                    </a:lnR>
+                    <a:lnT w="15240">
+                      <a:solidFill>
+                        <a:srgbClr val="000000">
+                          <a:alpha val="100000"/>
+                        </a:srgbClr>
+                      </a:solidFill>
+                      <a:prstDash val="solid"/>
+                    </a:lnT>
+                    <a:lnB w="15240">
+                      <a:solidFill>
+                        <a:srgbClr val="000000">
+                          <a:alpha val="100000"/>
+                        </a:srgbClr>
+                      </a:solidFill>
+                      <a:prstDash val="solid"/>
+                    </a:lnB>
+                    <a:solidFill>
+                      <a:schemeClr val="bg1">
+                        <a:alpha val="100000"/>
+                      </a:schemeClr>
+                    </a:solidFill>
+                  </a:tcPr>
+                </a:tc>
+                <a:tc>
+                  <a:txBody>
+                    <a:bodyPr/>
+                    <a:p>
+                      <a:pPr latinLnBrk="1">
+                        <a:defRPr/>
+                      </a:pPr>
+                      <a:r>
+                        <a:rPr lang="en-US" altLang="ko-KR" sz="1700">
+                          <a:solidFill>
+                            <a:srgbClr val="000000"/>
+                          </a:solidFill>
+                        </a:rPr>
+                        <a:t>my_writing/main</a:t>
+                      </a:r>
+                      <a:endParaRPr lang="ko-KR" altLang="en-US" sz="1700">
+                        <a:solidFill>
+                          <a:srgbClr val="000000"/>
+                        </a:solidFill>
+                      </a:endParaRPr>
+                    </a:p>
+                  </a:txBody>
+                  <a:tcPr marL="91440" marR="91440">
+                    <a:lnL w="15240">
+                      <a:solidFill>
+                        <a:srgbClr val="000000">
+                          <a:alpha val="100000"/>
+                        </a:srgbClr>
+                      </a:solidFill>
+                      <a:prstDash val="solid"/>
+                    </a:lnL>
+                    <a:lnR w="15240">
+                      <a:solidFill>
+                        <a:srgbClr val="000000">
+                          <a:alpha val="100000"/>
+                        </a:srgbClr>
+                      </a:solidFill>
+                      <a:prstDash val="solid"/>
+                    </a:lnR>
+                    <a:lnT w="15240">
+                      <a:solidFill>
+                        <a:srgbClr val="000000">
+                          <a:alpha val="100000"/>
+                        </a:srgbClr>
+                      </a:solidFill>
+                      <a:prstDash val="solid"/>
+                    </a:lnT>
+                    <a:lnB w="15240">
+                      <a:solidFill>
+                        <a:srgbClr val="000000">
+                          <a:alpha val="100000"/>
+                        </a:srgbClr>
+                      </a:solidFill>
+                      <a:prstDash val="solid"/>
+                    </a:lnB>
+                    <a:solidFill>
+                      <a:schemeClr val="bg1">
+                        <a:alpha val="100000"/>
+                      </a:schemeClr>
+                    </a:solidFill>
+                  </a:tcPr>
+                </a:tc>
+                <a:tc>
+                  <a:txBody>
+                    <a:bodyPr/>
+                    <a:p>
+                      <a:pPr latinLnBrk="1">
+                        <a:defRPr/>
+                      </a:pPr>
+                      <a:r>
+                        <a:rPr lang="en-US" altLang="ko-KR" sz="1700">
+                          <a:solidFill>
+                            <a:srgbClr val="000000"/>
+                          </a:solidFill>
+                        </a:rPr>
+                        <a:t>GET</a:t>
+                      </a:r>
+                      <a:endParaRPr lang="ko-KR" altLang="en-US" sz="1700">
+                        <a:solidFill>
+                          <a:srgbClr val="000000"/>
+                        </a:solidFill>
+                      </a:endParaRPr>
+                    </a:p>
+                  </a:txBody>
+                  <a:tcPr marL="91440" marR="91440">
+                    <a:lnL w="15240">
+                      <a:solidFill>
+                        <a:srgbClr val="000000">
+                          <a:alpha val="100000"/>
+                        </a:srgbClr>
+                      </a:solidFill>
+                      <a:prstDash val="solid"/>
+                    </a:lnL>
+                    <a:lnR w="15240">
+                      <a:solidFill>
+                        <a:srgbClr val="000000">
+                          <a:alpha val="100000"/>
+                        </a:srgbClr>
+                      </a:solidFill>
+                      <a:prstDash val="solid"/>
+                    </a:lnR>
+                    <a:lnT w="15240">
+                      <a:solidFill>
+                        <a:srgbClr val="000000">
+                          <a:alpha val="100000"/>
+                        </a:srgbClr>
+                      </a:solidFill>
+                      <a:prstDash val="solid"/>
+                    </a:lnT>
+                    <a:lnB w="15240">
+                      <a:solidFill>
+                        <a:srgbClr val="000000">
+                          <a:alpha val="100000"/>
+                        </a:srgbClr>
+                      </a:solidFill>
+                      <a:prstDash val="solid"/>
+                    </a:lnB>
+                    <a:solidFill>
+                      <a:schemeClr val="bg1">
+                        <a:alpha val="100000"/>
+                      </a:schemeClr>
+                    </a:solidFill>
+                  </a:tcPr>
+                </a:tc>
+              </a:tr>
+              <a:tr h="270210">
+                <a:tc>
+                  <a:txBody>
+                    <a:bodyPr/>
+                    <a:p>
+                      <a:pPr latinLnBrk="1">
+                        <a:defRPr/>
+                      </a:pPr>
+                      <a:r>
+                        <a:rPr lang="ko-KR" altLang="en-US" sz="1700">
+                          <a:solidFill>
+                            <a:srgbClr val="000000"/>
+                          </a:solidFill>
+                        </a:rPr>
+                        <a:t>글쓰기</a:t>
+                      </a:r>
+                      <a:endParaRPr lang="ko-KR" altLang="en-US" sz="1700">
+                        <a:solidFill>
+                          <a:srgbClr val="000000"/>
+                        </a:solidFill>
+                      </a:endParaRPr>
+                    </a:p>
+                  </a:txBody>
+                  <a:tcPr marL="91440" marR="91440">
+                    <a:lnL w="15240">
+                      <a:solidFill>
+                        <a:srgbClr val="000000">
+                          <a:alpha val="100000"/>
+                        </a:srgbClr>
+                      </a:solidFill>
+                      <a:prstDash val="solid"/>
+                    </a:lnL>
+                    <a:lnR w="15240">
+                      <a:solidFill>
+                        <a:srgbClr val="000000">
+                          <a:alpha val="100000"/>
+                        </a:srgbClr>
+                      </a:solidFill>
+                      <a:prstDash val="solid"/>
+                    </a:lnR>
+                    <a:lnT w="15240">
+                      <a:solidFill>
+                        <a:srgbClr val="000000">
+                          <a:alpha val="100000"/>
+                        </a:srgbClr>
+                      </a:solidFill>
+                      <a:prstDash val="solid"/>
+                    </a:lnT>
+                    <a:lnB w="15240">
+                      <a:solidFill>
+                        <a:srgbClr val="000000">
+                          <a:alpha val="100000"/>
+                        </a:srgbClr>
+                      </a:solidFill>
+                      <a:prstDash val="solid"/>
+                    </a:lnB>
+                    <a:solidFill>
+                      <a:schemeClr val="bg1">
+                        <a:alpha val="100000"/>
+                      </a:schemeClr>
+                    </a:solidFill>
+                  </a:tcPr>
+                </a:tc>
+                <a:tc>
+                  <a:txBody>
+                    <a:bodyPr/>
+                    <a:p>
+                      <a:pPr latinLnBrk="1">
+                        <a:defRPr/>
+                      </a:pPr>
+                      <a:r>
+                        <a:rPr lang="en-US" altLang="ko-KR" sz="1700">
+                          <a:solidFill>
+                            <a:srgbClr val="000000"/>
+                          </a:solidFill>
+                        </a:rPr>
+                        <a:t>write/main</a:t>
+                      </a:r>
+                      <a:endParaRPr lang="ko-KR" altLang="en-US" sz="1700">
+                        <a:solidFill>
+                          <a:srgbClr val="000000"/>
+                        </a:solidFill>
+                      </a:endParaRPr>
+                    </a:p>
+                  </a:txBody>
+                  <a:tcPr marL="91440" marR="91440">
+                    <a:lnL w="15240">
+                      <a:solidFill>
+                        <a:srgbClr val="000000">
+                          <a:alpha val="100000"/>
+                        </a:srgbClr>
+                      </a:solidFill>
+                      <a:prstDash val="solid"/>
+                    </a:lnL>
+                    <a:lnR w="15240">
+                      <a:solidFill>
+                        <a:srgbClr val="000000">
+                          <a:alpha val="100000"/>
+                        </a:srgbClr>
+                      </a:solidFill>
+                      <a:prstDash val="solid"/>
+                    </a:lnR>
+                    <a:lnT w="15240">
+                      <a:solidFill>
+                        <a:srgbClr val="000000">
+                          <a:alpha val="100000"/>
+                        </a:srgbClr>
+                      </a:solidFill>
+                      <a:prstDash val="solid"/>
+                    </a:lnT>
+                    <a:lnB w="15240">
+                      <a:solidFill>
+                        <a:srgbClr val="000000">
+                          <a:alpha val="100000"/>
+                        </a:srgbClr>
+                      </a:solidFill>
+                      <a:prstDash val="solid"/>
+                    </a:lnB>
+                    <a:solidFill>
+                      <a:schemeClr val="bg1">
+                        <a:alpha val="100000"/>
+                      </a:schemeClr>
+                    </a:solidFill>
+                  </a:tcPr>
+                </a:tc>
+                <a:tc>
+                  <a:txBody>
+                    <a:bodyPr/>
+                    <a:p>
+                      <a:pPr latinLnBrk="1">
+                        <a:defRPr/>
+                      </a:pPr>
+                      <a:r>
+                        <a:rPr lang="en-US" altLang="ko-KR" sz="1700">
+                          <a:solidFill>
+                            <a:srgbClr val="000000"/>
+                          </a:solidFill>
+                        </a:rPr>
+                        <a:t>GET</a:t>
+                      </a:r>
+                      <a:endParaRPr lang="ko-KR" altLang="en-US" sz="1700">
+                        <a:solidFill>
+                          <a:srgbClr val="000000"/>
+                        </a:solidFill>
+                      </a:endParaRPr>
+                    </a:p>
+                  </a:txBody>
+                  <a:tcPr marL="91440" marR="91440">
+                    <a:lnL w="15240">
+                      <a:solidFill>
+                        <a:srgbClr val="000000">
+                          <a:alpha val="100000"/>
+                        </a:srgbClr>
+                      </a:solidFill>
+                      <a:prstDash val="solid"/>
+                    </a:lnL>
+                    <a:lnR w="15240">
+                      <a:solidFill>
+                        <a:srgbClr val="000000">
+                          <a:alpha val="100000"/>
+                        </a:srgbClr>
+                      </a:solidFill>
+                      <a:prstDash val="solid"/>
+                    </a:lnR>
+                    <a:lnT w="15240">
+                      <a:solidFill>
+                        <a:srgbClr val="000000">
+                          <a:alpha val="100000"/>
+                        </a:srgbClr>
+                      </a:solidFill>
+                      <a:prstDash val="solid"/>
+                    </a:lnT>
+                    <a:lnB w="15240">
+                      <a:solidFill>
+                        <a:srgbClr val="000000">
+                          <a:alpha val="100000"/>
+                        </a:srgbClr>
+                      </a:solidFill>
+                      <a:prstDash val="solid"/>
+                    </a:lnB>
+                    <a:solidFill>
+                      <a:schemeClr val="bg1">
+                        <a:alpha val="100000"/>
+                      </a:schemeClr>
+                    </a:solidFill>
+                  </a:tcPr>
+                </a:tc>
+              </a:tr>
+              <a:tr h="270210">
+                <a:tc>
+                  <a:txBody>
+                    <a:bodyPr/>
+                    <a:p>
+                      <a:pPr latinLnBrk="1">
+                        <a:defRPr/>
+                      </a:pPr>
+                      <a:r>
+                        <a:rPr lang="ko-KR" altLang="en-US" sz="1700">
+                          <a:solidFill>
+                            <a:srgbClr val="000000"/>
+                          </a:solidFill>
+                        </a:rPr>
+                        <a:t>아래페이지번호</a:t>
+                      </a:r>
+                      <a:endParaRPr lang="ko-KR" altLang="en-US" sz="1700">
+                        <a:solidFill>
+                          <a:srgbClr val="000000"/>
+                        </a:solidFill>
+                      </a:endParaRPr>
+                    </a:p>
+                  </a:txBody>
+                  <a:tcPr marL="91440" marR="91440">
+                    <a:lnL w="15240">
+                      <a:solidFill>
+                        <a:srgbClr val="000000">
+                          <a:alpha val="100000"/>
+                        </a:srgbClr>
+                      </a:solidFill>
+                      <a:prstDash val="solid"/>
+                    </a:lnL>
+                    <a:lnR w="15240">
+                      <a:solidFill>
+                        <a:srgbClr val="000000">
+                          <a:alpha val="100000"/>
+                        </a:srgbClr>
+                      </a:solidFill>
+                      <a:prstDash val="solid"/>
+                    </a:lnR>
+                    <a:lnT w="15240">
+                      <a:solidFill>
+                        <a:srgbClr val="000000">
+                          <a:alpha val="100000"/>
+                        </a:srgbClr>
+                      </a:solidFill>
+                      <a:prstDash val="solid"/>
+                    </a:lnT>
+                    <a:lnB w="15240">
+                      <a:solidFill>
+                        <a:srgbClr val="000000">
+                          <a:alpha val="100000"/>
+                        </a:srgbClr>
+                      </a:solidFill>
+                      <a:prstDash val="solid"/>
+                    </a:lnB>
+                    <a:solidFill>
+                      <a:schemeClr val="bg1">
+                        <a:alpha val="100000"/>
+                      </a:schemeClr>
+                    </a:solidFill>
+                  </a:tcPr>
+                </a:tc>
+                <a:tc>
+                  <a:txBody>
+                    <a:bodyPr/>
+                    <a:p>
+                      <a:pPr latinLnBrk="1">
+                        <a:defRPr/>
+                      </a:pPr>
+                      <a:r>
+                        <a:rPr lang="en-US" altLang="ko-KR" sz="1700">
+                          <a:solidFill>
+                            <a:srgbClr val="000000"/>
+                          </a:solidFill>
+                        </a:rPr>
+                        <a:t>board/{0} - pathvariable</a:t>
+                      </a:r>
+                      <a:endParaRPr lang="ko-KR" altLang="en-US" sz="1700">
+                        <a:solidFill>
+                          <a:srgbClr val="000000"/>
+                        </a:solidFill>
+                      </a:endParaRPr>
+                    </a:p>
+                  </a:txBody>
+                  <a:tcPr marL="91440" marR="91440">
+                    <a:lnL w="15240">
+                      <a:solidFill>
+                        <a:srgbClr val="000000">
+                          <a:alpha val="100000"/>
+                        </a:srgbClr>
+                      </a:solidFill>
+                      <a:prstDash val="solid"/>
+                    </a:lnL>
+                    <a:lnR w="15240">
+                      <a:solidFill>
+                        <a:srgbClr val="000000">
+                          <a:alpha val="100000"/>
+                        </a:srgbClr>
+                      </a:solidFill>
+                      <a:prstDash val="solid"/>
+                    </a:lnR>
+                    <a:lnT w="15240">
+                      <a:solidFill>
+                        <a:srgbClr val="000000">
+                          <a:alpha val="100000"/>
+                        </a:srgbClr>
+                      </a:solidFill>
+                      <a:prstDash val="solid"/>
+                    </a:lnT>
+                    <a:lnB w="15240">
+                      <a:solidFill>
+                        <a:srgbClr val="000000">
+                          <a:alpha val="100000"/>
+                        </a:srgbClr>
+                      </a:solidFill>
+                      <a:prstDash val="solid"/>
+                    </a:lnB>
+                    <a:solidFill>
+                      <a:schemeClr val="bg1">
+                        <a:alpha val="100000"/>
+                      </a:schemeClr>
+                    </a:solidFill>
+                  </a:tcPr>
+                </a:tc>
+                <a:tc>
+                  <a:txBody>
+                    <a:bodyPr/>
+                    <a:p>
+                      <a:pPr latinLnBrk="1">
+                        <a:defRPr/>
+                      </a:pPr>
+                      <a:r>
+                        <a:rPr lang="en-US" altLang="ko-KR" sz="1700">
+                          <a:solidFill>
+                            <a:srgbClr val="000000"/>
+                          </a:solidFill>
+                        </a:rPr>
+                        <a:t>GET</a:t>
+                      </a:r>
+                      <a:endParaRPr lang="ko-KR" altLang="en-US" sz="1700">
+                        <a:solidFill>
+                          <a:srgbClr val="000000"/>
+                        </a:solidFill>
+                      </a:endParaRPr>
+                    </a:p>
+                  </a:txBody>
+                  <a:tcPr marL="91440" marR="91440">
+                    <a:lnL w="15240">
+                      <a:solidFill>
+                        <a:srgbClr val="000000">
+                          <a:alpha val="100000"/>
+                        </a:srgbClr>
+                      </a:solidFill>
+                      <a:prstDash val="solid"/>
+                    </a:lnL>
+                    <a:lnR w="15240">
+                      <a:solidFill>
+                        <a:srgbClr val="000000">
+                          <a:alpha val="100000"/>
+                        </a:srgbClr>
+                      </a:solidFill>
+                      <a:prstDash val="solid"/>
+                    </a:lnR>
+                    <a:lnT w="15240">
+                      <a:solidFill>
+                        <a:srgbClr val="000000">
+                          <a:alpha val="100000"/>
+                        </a:srgbClr>
+                      </a:solidFill>
+                      <a:prstDash val="solid"/>
+                    </a:lnT>
+                    <a:lnB w="15240">
+                      <a:solidFill>
+                        <a:srgbClr val="000000">
+                          <a:alpha val="100000"/>
+                        </a:srgbClr>
+                      </a:solidFill>
+                      <a:prstDash val="solid"/>
+                    </a:lnB>
+                    <a:solidFill>
+                      <a:schemeClr val="bg1">
+                        <a:alpha val="100000"/>
+                      </a:schemeClr>
+                    </a:solidFill>
+                  </a:tcPr>
+                </a:tc>
+              </a:tr>
+              <a:tr h="270210">
+                <a:tc>
+                  <a:txBody>
+                    <a:bodyPr/>
+                    <a:p>
+                      <a:pPr latinLnBrk="1">
+                        <a:defRPr/>
+                      </a:pPr>
+                      <a:r>
+                        <a:rPr lang="ko-KR" altLang="en-US" sz="1700">
+                          <a:solidFill>
+                            <a:srgbClr val="000000"/>
+                          </a:solidFill>
+                        </a:rPr>
+                        <a:t>게시글</a:t>
+                      </a:r>
+                      <a:endParaRPr lang="ko-KR" altLang="en-US" sz="1700">
+                        <a:solidFill>
+                          <a:srgbClr val="000000"/>
+                        </a:solidFill>
+                      </a:endParaRPr>
+                    </a:p>
+                  </a:txBody>
+                  <a:tcPr marL="91440" marR="91440">
+                    <a:lnL w="15240">
+                      <a:solidFill>
+                        <a:srgbClr val="000000">
+                          <a:alpha val="100000"/>
+                        </a:srgbClr>
+                      </a:solidFill>
+                      <a:prstDash val="solid"/>
+                    </a:lnL>
+                    <a:lnR w="15240">
+                      <a:solidFill>
+                        <a:srgbClr val="000000">
+                          <a:alpha val="100000"/>
+                        </a:srgbClr>
+                      </a:solidFill>
+                      <a:prstDash val="solid"/>
+                    </a:lnR>
+                    <a:lnT w="15240">
+                      <a:solidFill>
+                        <a:srgbClr val="000000">
+                          <a:alpha val="100000"/>
+                        </a:srgbClr>
+                      </a:solidFill>
+                      <a:prstDash val="solid"/>
+                    </a:lnT>
+                    <a:lnB w="15240">
+                      <a:solidFill>
+                        <a:srgbClr val="000000">
+                          <a:alpha val="100000"/>
+                        </a:srgbClr>
+                      </a:solidFill>
+                      <a:prstDash val="solid"/>
+                    </a:lnB>
+                    <a:solidFill>
+                      <a:schemeClr val="bg1">
+                        <a:alpha val="100000"/>
+                      </a:schemeClr>
+                    </a:solidFill>
+                  </a:tcPr>
+                </a:tc>
+                <a:tc>
+                  <a:txBody>
+                    <a:bodyPr/>
+                    <a:p>
+                      <a:pPr latinLnBrk="1">
+                        <a:defRPr/>
+                      </a:pPr>
+                      <a:r>
+                        <a:rPr lang="en-US" altLang="ko-KR" sz="1700">
+                          <a:solidFill>
+                            <a:srgbClr val="000000"/>
+                          </a:solidFill>
+                        </a:rPr>
+                        <a:t>content/{0}-pathvariable</a:t>
+                      </a:r>
+                      <a:endParaRPr lang="ko-KR" altLang="en-US" sz="1700">
+                        <a:solidFill>
+                          <a:srgbClr val="000000"/>
+                        </a:solidFill>
+                      </a:endParaRPr>
+                    </a:p>
+                  </a:txBody>
+                  <a:tcPr marL="91440" marR="91440">
+                    <a:lnL w="15240">
+                      <a:solidFill>
+                        <a:srgbClr val="000000">
+                          <a:alpha val="100000"/>
+                        </a:srgbClr>
+                      </a:solidFill>
+                      <a:prstDash val="solid"/>
+                    </a:lnL>
+                    <a:lnR w="15240">
+                      <a:solidFill>
+                        <a:srgbClr val="000000">
+                          <a:alpha val="100000"/>
+                        </a:srgbClr>
+                      </a:solidFill>
+                      <a:prstDash val="solid"/>
+                    </a:lnR>
+                    <a:lnT w="15240">
+                      <a:solidFill>
+                        <a:srgbClr val="000000">
+                          <a:alpha val="100000"/>
+                        </a:srgbClr>
+                      </a:solidFill>
+                      <a:prstDash val="solid"/>
+                    </a:lnT>
+                    <a:lnB w="15240">
+                      <a:solidFill>
+                        <a:srgbClr val="000000">
+                          <a:alpha val="100000"/>
+                        </a:srgbClr>
+                      </a:solidFill>
+                      <a:prstDash val="solid"/>
+                    </a:lnB>
+                    <a:solidFill>
+                      <a:schemeClr val="bg1">
+                        <a:alpha val="100000"/>
+                      </a:schemeClr>
+                    </a:solidFill>
+                  </a:tcPr>
+                </a:tc>
+                <a:tc>
+                  <a:txBody>
+                    <a:bodyPr/>
+                    <a:p>
+                      <a:pPr latinLnBrk="1">
+                        <a:defRPr/>
+                      </a:pPr>
+                      <a:r>
+                        <a:rPr lang="en-US" altLang="ko-KR" sz="1700">
+                          <a:solidFill>
+                            <a:srgbClr val="000000"/>
+                          </a:solidFill>
+                        </a:rPr>
+                        <a:t>GET</a:t>
+                      </a:r>
+                      <a:endParaRPr lang="ko-KR" altLang="en-US" sz="1700">
+                        <a:solidFill>
+                          <a:srgbClr val="000000"/>
+                        </a:solidFill>
+                      </a:endParaRPr>
+                    </a:p>
+                  </a:txBody>
+                  <a:tcPr marL="91440" marR="91440">
+                    <a:lnL w="15240">
+                      <a:solidFill>
+                        <a:srgbClr val="000000">
+                          <a:alpha val="100000"/>
+                        </a:srgbClr>
+                      </a:solidFill>
+                      <a:prstDash val="solid"/>
+                    </a:lnL>
+                    <a:lnR w="15240">
+                      <a:solidFill>
+                        <a:srgbClr val="000000">
+                          <a:alpha val="100000"/>
+                        </a:srgbClr>
+                      </a:solidFill>
+                      <a:prstDash val="solid"/>
+                    </a:lnR>
+                    <a:lnT w="15240">
+                      <a:solidFill>
+                        <a:srgbClr val="000000">
+                          <a:alpha val="100000"/>
+                        </a:srgbClr>
+                      </a:solidFill>
+                      <a:prstDash val="solid"/>
+                    </a:lnT>
+                    <a:lnB w="15240">
+                      <a:solidFill>
+                        <a:srgbClr val="000000">
+                          <a:alpha val="100000"/>
+                        </a:srgbClr>
+                      </a:solidFill>
+                      <a:prstDash val="solid"/>
+                    </a:lnB>
+                    <a:solidFill>
+                      <a:schemeClr val="bg1">
+                        <a:alpha val="100000"/>
+                      </a:schemeClr>
+                    </a:solidFill>
+                  </a:tcPr>
+                </a:tc>
+              </a:tr>
+            </a:tbl>
+          </a:graphicData>
+        </a:graphic>
+      </p:graphicFrame>
+    </p:spTree>
+    <p:extLst>
+      <p:ext uri="{BB962C8B-B14F-4D97-AF65-F5344CB8AC3E}">
+        <p14:creationId xmlns:p14="http://schemas.microsoft.com/office/powerpoint/2010/main" val="697001885"/>
+      </p:ext>
+    </p:extLst>
+  </p:cSld>
+  <p:clrMapOvr>
+    <a:masterClrMapping/>
+  </p:clrMapOvr>
+</p:sld>
+</file>
+
+<file path=ppt/slides/slide21.xml><?xml version="1.0" encoding="utf-8"?>
 <p:sld xmlns:r="http://schemas.openxmlformats.org/officeDocument/2006/relationships" xmlns:c="http://schemas.openxmlformats.org/drawingml/2006/chart" xmlns:a="http://schemas.openxmlformats.org/drawingml/2006/main" xmlns:dgm="http://schemas.openxmlformats.org/drawingml/2006/diagram" xmlns:dsp="http://schemas.microsoft.com/office/drawing/2008/diagram" xmlns:p="http://schemas.openxmlformats.org/presentationml/2006/main">
   <p:cSld>
     <p:spTree>
@@ -21055,7 +22868,7 @@
 </p:sld>
 </file>
 
-<file path=ppt/slides/slide21.xml><?xml version="1.0" encoding="utf-8"?>
+<file path=ppt/slides/slide22.xml><?xml version="1.0" encoding="utf-8"?>
 <p:sld xmlns:r="http://schemas.openxmlformats.org/officeDocument/2006/relationships" xmlns:c="http://schemas.openxmlformats.org/drawingml/2006/chart" xmlns:a="http://schemas.openxmlformats.org/drawingml/2006/main" xmlns:dgm="http://schemas.openxmlformats.org/drawingml/2006/diagram" xmlns:dsp="http://schemas.microsoft.com/office/drawing/2008/diagram" xmlns:p="http://schemas.openxmlformats.org/presentationml/2006/main">
   <p:cSld>
     <p:spTree>
@@ -21533,6 +23346,24 @@
                         </a:rPr>
                         <a:t>front/main</a:t>
                       </a:r>
+                      <a:endParaRPr lang="en-US" altLang="ko-KR" sz="1700">
+                        <a:solidFill>
+                          <a:srgbClr val="000000"/>
+                        </a:solidFill>
+                      </a:endParaRPr>
+                    </a:p>
+                    <a:p>
+                      <a:pPr latinLnBrk="1">
+                        <a:defRPr/>
+                      </a:pPr>
+                      <a:r>
+                        <a:rPr lang="en-US" altLang="ko-KR" sz="1700">
+                          <a:solidFill>
+                            <a:srgbClr val="000000"/>
+                          </a:solidFill>
+                        </a:rPr>
+                        <a:t>./front.html</a:t>
+                      </a:r>
                       <a:endParaRPr lang="ko-KR" altLang="en-US" sz="1700">
                         <a:solidFill>
                           <a:srgbClr val="000000"/>
@@ -21719,7 +23550,7 @@
                             <a:srgbClr val="000000"/>
                           </a:solidFill>
                         </a:rPr>
-                        <a:t>update/main</a:t>
+                        <a:t>update/checkPass</a:t>
                       </a:r>
                       <a:endParaRPr lang="ko-KR" altLang="en-US" sz="1700">
                         <a:solidFill>
@@ -21781,7 +23612,7 @@
                             <a:srgbClr val="000000"/>
                           </a:solidFill>
                         </a:rPr>
-                        <a:t>PATCH</a:t>
+                        <a:t>GET</a:t>
                       </a:r>
                       <a:endParaRPr lang="ko-KR" altLang="en-US" sz="1700">
                         <a:solidFill>
@@ -22224,7 +24055,7 @@
 </p:sld>
 </file>
 
-<file path=ppt/slides/slide22.xml><?xml version="1.0" encoding="utf-8"?>
+<file path=ppt/slides/slide23.xml><?xml version="1.0" encoding="utf-8"?>
 <p:sld xmlns:r="http://schemas.openxmlformats.org/officeDocument/2006/relationships" xmlns:c="http://schemas.openxmlformats.org/drawingml/2006/chart" xmlns:a="http://schemas.openxmlformats.org/drawingml/2006/main" xmlns:dgm="http://schemas.openxmlformats.org/drawingml/2006/diagram" xmlns:dsp="http://schemas.microsoft.com/office/drawing/2008/diagram" xmlns:p="http://schemas.openxmlformats.org/presentationml/2006/main">
   <p:cSld>
     <p:spTree>
@@ -24328,7 +26159,7 @@
 </p:sld>
 </file>
 
-<file path=ppt/slides/slide23.xml><?xml version="1.0" encoding="utf-8"?>
+<file path=ppt/slides/slide24.xml><?xml version="1.0" encoding="utf-8"?>
 <p:sld xmlns:r="http://schemas.openxmlformats.org/officeDocument/2006/relationships" xmlns:c="http://schemas.openxmlformats.org/drawingml/2006/chart" xmlns:a="http://schemas.openxmlformats.org/drawingml/2006/main" xmlns:dgm="http://schemas.openxmlformats.org/drawingml/2006/diagram" xmlns:dsp="http://schemas.microsoft.com/office/drawing/2008/diagram" xmlns:p="http://schemas.openxmlformats.org/presentationml/2006/main">
   <p:cSld>
     <p:spTree>
@@ -24806,6 +26637,24 @@
                         </a:rPr>
                         <a:t>front/main</a:t>
                       </a:r>
+                      <a:endParaRPr lang="en-US" altLang="ko-KR" sz="1700">
+                        <a:solidFill>
+                          <a:srgbClr val="000000"/>
+                        </a:solidFill>
+                      </a:endParaRPr>
+                    </a:p>
+                    <a:p>
+                      <a:pPr latinLnBrk="1">
+                        <a:defRPr/>
+                      </a:pPr>
+                      <a:r>
+                        <a:rPr lang="en-US" altLang="ko-KR" sz="1700">
+                          <a:solidFill>
+                            <a:srgbClr val="000000"/>
+                          </a:solidFill>
+                        </a:rPr>
+                        <a:t>./front.html</a:t>
+                      </a:r>
                       <a:endParaRPr lang="ko-KR" altLang="en-US" sz="1700">
                         <a:solidFill>
                           <a:srgbClr val="000000"/>
@@ -24992,7 +26841,7 @@
                             <a:srgbClr val="000000"/>
                           </a:solidFill>
                         </a:rPr>
-                        <a:t>update/main</a:t>
+                        <a:t>update/checkPass</a:t>
                       </a:r>
                       <a:endParaRPr lang="ko-KR" altLang="en-US" sz="1700">
                         <a:solidFill>
@@ -25054,7 +26903,7 @@
                             <a:srgbClr val="000000"/>
                           </a:solidFill>
                         </a:rPr>
-                        <a:t>PATCH</a:t>
+                        <a:t>GET</a:t>
                       </a:r>
                       <a:endParaRPr lang="ko-KR" altLang="en-US" sz="1700">
                         <a:solidFill>
@@ -25306,7 +27155,23 @@
                             <a:srgbClr val="000000"/>
                           </a:solidFill>
                         </a:rPr>
-                        <a:t>작성글</a:t>
+                        <a:t>게시글</a:t>
+                      </a:r>
+                      <a:r>
+                        <a:rPr lang="en-US" altLang="ko-KR" sz="1700">
+                          <a:solidFill>
+                            <a:srgbClr val="000000"/>
+                          </a:solidFill>
+                        </a:rPr>
+                        <a:t> </a:t>
+                      </a:r>
+                      <a:r>
+                        <a:rPr lang="ko-KR" altLang="en-US" sz="1700">
+                          <a:solidFill>
+                            <a:srgbClr val="000000"/>
+                          </a:solidFill>
+                        </a:rPr>
+                        <a:t>클릭</a:t>
                       </a:r>
                       <a:endParaRPr lang="ko-KR" altLang="en-US" sz="1700">
                         <a:solidFill>
@@ -25497,7 +27362,7 @@
 </p:sld>
 </file>
 
-<file path=ppt/slides/slide24.xml><?xml version="1.0" encoding="utf-8"?>
+<file path=ppt/slides/slide25.xml><?xml version="1.0" encoding="utf-8"?>
 <p:sld xmlns:r="http://schemas.openxmlformats.org/officeDocument/2006/relationships" xmlns:c="http://schemas.openxmlformats.org/drawingml/2006/chart" xmlns:a="http://schemas.openxmlformats.org/drawingml/2006/main" xmlns:dgm="http://schemas.openxmlformats.org/drawingml/2006/diagram" xmlns:dsp="http://schemas.microsoft.com/office/drawing/2008/diagram" xmlns:p="http://schemas.openxmlformats.org/presentationml/2006/main">
   <p:cSld>
     <p:spTree>
@@ -27269,7 +29134,7 @@
 </p:sld>
 </file>
 
-<file path=ppt/slides/slide25.xml><?xml version="1.0" encoding="utf-8"?>
+<file path=ppt/slides/slide26.xml><?xml version="1.0" encoding="utf-8"?>
 <p:sld xmlns:r="http://schemas.openxmlformats.org/officeDocument/2006/relationships" xmlns:c="http://schemas.openxmlformats.org/drawingml/2006/chart" xmlns:a="http://schemas.openxmlformats.org/drawingml/2006/main" xmlns:dgm="http://schemas.openxmlformats.org/drawingml/2006/diagram" xmlns:dsp="http://schemas.microsoft.com/office/drawing/2008/diagram" xmlns:p="http://schemas.openxmlformats.org/presentationml/2006/main">
   <p:cSld>
     <p:spTree>
@@ -27747,6 +29612,24 @@
                         </a:rPr>
                         <a:t>front/main</a:t>
                       </a:r>
+                      <a:endParaRPr lang="en-US" altLang="ko-KR" sz="1700">
+                        <a:solidFill>
+                          <a:srgbClr val="000000"/>
+                        </a:solidFill>
+                      </a:endParaRPr>
+                    </a:p>
+                    <a:p>
+                      <a:pPr latinLnBrk="1">
+                        <a:defRPr/>
+                      </a:pPr>
+                      <a:r>
+                        <a:rPr lang="en-US" altLang="ko-KR" sz="1700">
+                          <a:solidFill>
+                            <a:srgbClr val="000000"/>
+                          </a:solidFill>
+                        </a:rPr>
+                        <a:t>./front.html</a:t>
+                      </a:r>
                       <a:endParaRPr lang="ko-KR" altLang="en-US" sz="1700">
                         <a:solidFill>
                           <a:srgbClr val="000000"/>
@@ -27933,7 +29816,7 @@
                             <a:srgbClr val="000000"/>
                           </a:solidFill>
                         </a:rPr>
-                        <a:t>update/main</a:t>
+                        <a:t>update/checkPass</a:t>
                       </a:r>
                       <a:endParaRPr lang="ko-KR" altLang="en-US" sz="1700">
                         <a:solidFill>
@@ -27995,7 +29878,7 @@
                             <a:srgbClr val="000000"/>
                           </a:solidFill>
                         </a:rPr>
-                        <a:t>PATCH</a:t>
+                        <a:t>GET</a:t>
                       </a:r>
                       <a:endParaRPr lang="ko-KR" altLang="en-US" sz="1700">
                         <a:solidFill>
@@ -28438,7 +30321,7 @@
 </p:sld>
 </file>
 
-<file path=ppt/slides/slide26.xml><?xml version="1.0" encoding="utf-8"?>
+<file path=ppt/slides/slide27.xml><?xml version="1.0" encoding="utf-8"?>
 <p:sld xmlns:r="http://schemas.openxmlformats.org/officeDocument/2006/relationships" xmlns:c="http://schemas.openxmlformats.org/drawingml/2006/chart" xmlns:a="http://schemas.openxmlformats.org/drawingml/2006/main" xmlns:dgm="http://schemas.openxmlformats.org/drawingml/2006/diagram" xmlns:dsp="http://schemas.microsoft.com/office/drawing/2008/diagram" xmlns:p="http://schemas.openxmlformats.org/presentationml/2006/main">
   <p:cSld>
     <p:spTree>
@@ -29968,7 +31851,7 @@
 </p:sld>
 </file>
 
-<file path=ppt/slides/slide27.xml><?xml version="1.0" encoding="utf-8"?>
+<file path=ppt/slides/slide28.xml><?xml version="1.0" encoding="utf-8"?>
 <p:sld xmlns:r="http://schemas.openxmlformats.org/officeDocument/2006/relationships" xmlns:c="http://schemas.openxmlformats.org/drawingml/2006/chart" xmlns:a="http://schemas.openxmlformats.org/drawingml/2006/main" xmlns:dgm="http://schemas.openxmlformats.org/drawingml/2006/diagram" xmlns:dsp="http://schemas.microsoft.com/office/drawing/2008/diagram" xmlns:p="http://schemas.openxmlformats.org/presentationml/2006/main">
   <p:cSld>
     <p:spTree>
@@ -30446,6 +32329,24 @@
                         </a:rPr>
                         <a:t>front/main</a:t>
                       </a:r>
+                      <a:endParaRPr lang="en-US" altLang="ko-KR" sz="1700">
+                        <a:solidFill>
+                          <a:srgbClr val="000000"/>
+                        </a:solidFill>
+                      </a:endParaRPr>
+                    </a:p>
+                    <a:p>
+                      <a:pPr latinLnBrk="1">
+                        <a:defRPr/>
+                      </a:pPr>
+                      <a:r>
+                        <a:rPr lang="en-US" altLang="ko-KR" sz="1700">
+                          <a:solidFill>
+                            <a:srgbClr val="000000"/>
+                          </a:solidFill>
+                        </a:rPr>
+                        <a:t>./front.html</a:t>
+                      </a:r>
                       <a:endParaRPr lang="ko-KR" altLang="en-US" sz="1700">
                         <a:solidFill>
                           <a:srgbClr val="000000"/>
@@ -30632,7 +32533,7 @@
                             <a:srgbClr val="000000"/>
                           </a:solidFill>
                         </a:rPr>
-                        <a:t>update/main</a:t>
+                        <a:t>update/checkPass</a:t>
                       </a:r>
                       <a:endParaRPr lang="ko-KR" altLang="en-US" sz="1700">
                         <a:solidFill>
@@ -30694,7 +32595,7 @@
                             <a:srgbClr val="000000"/>
                           </a:solidFill>
                         </a:rPr>
-                        <a:t>PATCH</a:t>
+                        <a:t>GET</a:t>
                       </a:r>
                       <a:endParaRPr lang="ko-KR" altLang="en-US" sz="1700">
                         <a:solidFill>
@@ -30949,7 +32850,7 @@
 </p:sld>
 </file>
 
-<file path=ppt/slides/slide28.xml><?xml version="1.0" encoding="utf-8"?>
+<file path=ppt/slides/slide29.xml><?xml version="1.0" encoding="utf-8"?>
 <p:sld xmlns:r="http://schemas.openxmlformats.org/officeDocument/2006/relationships" xmlns:c="http://schemas.openxmlformats.org/drawingml/2006/chart" xmlns:a="http://schemas.openxmlformats.org/drawingml/2006/main" xmlns:dgm="http://schemas.openxmlformats.org/drawingml/2006/diagram" xmlns:dsp="http://schemas.microsoft.com/office/drawing/2008/diagram" xmlns:p="http://schemas.openxmlformats.org/presentationml/2006/main">
   <p:cSld>
     <p:spTree>
@@ -32305,987 +34206,6 @@
     <p:extLst>
       <p:ext uri="{BB962C8B-B14F-4D97-AF65-F5344CB8AC3E}">
         <p14:creationId xmlns:p14="http://schemas.microsoft.com/office/powerpoint/2010/main" val="3160289185"/>
-      </p:ext>
-    </p:extLst>
-  </p:cSld>
-  <p:clrMapOvr>
-    <a:masterClrMapping/>
-  </p:clrMapOvr>
-</p:sld>
-</file>
-
-<file path=ppt/slides/slide29.xml><?xml version="1.0" encoding="utf-8"?>
-<p:sld xmlns:r="http://schemas.openxmlformats.org/officeDocument/2006/relationships" xmlns:c="http://schemas.openxmlformats.org/drawingml/2006/chart" xmlns:a="http://schemas.openxmlformats.org/drawingml/2006/main" xmlns:dgm="http://schemas.openxmlformats.org/drawingml/2006/diagram" xmlns:dsp="http://schemas.microsoft.com/office/drawing/2008/diagram" xmlns:p="http://schemas.openxmlformats.org/presentationml/2006/main">
-  <p:cSld>
-    <p:spTree>
-      <p:nvGrpSpPr>
-        <p:cNvPr id="1" name=""/>
-        <p:cNvGrpSpPr/>
-        <p:nvPr/>
-      </p:nvGrpSpPr>
-      <p:grpSpPr>
-        <a:xfrm>
-          <a:off x="0" y="0"/>
-          <a:ext cx="0" cy="0"/>
-          <a:chOff x="0" y="0"/>
-          <a:chExt cx="0" cy="0"/>
-        </a:xfrm>
-      </p:grpSpPr>
-      <p:graphicFrame>
-        <p:nvGraphicFramePr>
-          <p:cNvPr id="2" name="Table"/>
-          <p:cNvGraphicFramePr>
-            <a:graphicFrameLocks noGrp="1"/>
-          </p:cNvGraphicFramePr>
-          <p:nvPr/>
-        </p:nvGraphicFramePr>
-        <p:xfrm>
-          <a:off x="2032052" y="2423473"/>
-          <a:ext cx="8128000" cy="1854200"/>
-        </p:xfrm>
-        <a:graphic>
-          <a:graphicData uri="http://schemas.openxmlformats.org/drawingml/2006/table">
-            <a:tbl>
-              <a:tblPr firstRow="1" bandRow="1">
-                <a:tableStyleId>{01A66EDD-3DAB-4C5B-A090-DC80EC1FD486}</a:tableStyleId>
-              </a:tblPr>
-              <a:tblGrid>
-                <a:gridCol w="2709333"/>
-                <a:gridCol w="2709333"/>
-                <a:gridCol w="2709333"/>
-              </a:tblGrid>
-              <a:tr h="270210">
-                <a:tc gridSpan="3">
-                  <a:txBody>
-                    <a:bodyPr/>
-                    <a:p>
-                      <a:pPr latinLnBrk="1">
-                        <a:defRPr/>
-                      </a:pPr>
-                      <a:r>
-                        <a:rPr lang="ko-KR" altLang="en-US" sz="1700">
-                          <a:solidFill>
-                            <a:srgbClr val="000000"/>
-                          </a:solidFill>
-                        </a:rPr>
-                        <a:t>버튼</a:t>
-                      </a:r>
-                      <a:r>
-                        <a:rPr lang="en-US" altLang="ko-KR" sz="1700">
-                          <a:solidFill>
-                            <a:srgbClr val="000000"/>
-                          </a:solidFill>
-                        </a:rPr>
-                        <a:t> URL</a:t>
-                      </a:r>
-                      <a:endParaRPr lang="ko-KR" altLang="en-US" sz="1700">
-                        <a:solidFill>
-                          <a:srgbClr val="000000"/>
-                        </a:solidFill>
-                      </a:endParaRPr>
-                    </a:p>
-                  </a:txBody>
-                  <a:tcPr marL="91440" marR="91440">
-                    <a:lnL w="15240">
-                      <a:solidFill>
-                        <a:srgbClr val="000000">
-                          <a:alpha val="100000"/>
-                        </a:srgbClr>
-                      </a:solidFill>
-                      <a:prstDash val="solid"/>
-                    </a:lnL>
-                    <a:lnR w="15240">
-                      <a:solidFill>
-                        <a:srgbClr val="000000">
-                          <a:alpha val="100000"/>
-                        </a:srgbClr>
-                      </a:solidFill>
-                      <a:prstDash val="solid"/>
-                    </a:lnR>
-                    <a:lnT w="15240">
-                      <a:solidFill>
-                        <a:srgbClr val="000000">
-                          <a:alpha val="100000"/>
-                        </a:srgbClr>
-                      </a:solidFill>
-                      <a:prstDash val="solid"/>
-                    </a:lnT>
-                    <a:lnB w="15240">
-                      <a:solidFill>
-                        <a:srgbClr val="000000">
-                          <a:alpha val="100000"/>
-                        </a:srgbClr>
-                      </a:solidFill>
-                      <a:prstDash val="solid"/>
-                    </a:lnB>
-                    <a:solidFill>
-                      <a:schemeClr val="bg1">
-                        <a:alpha val="100000"/>
-                      </a:schemeClr>
-                    </a:solidFill>
-                  </a:tcPr>
-                </a:tc>
-                <a:tc hMerge="1">
-                  <a:txBody>
-                    <a:bodyPr/>
-                    <a:p>
-                      <a:pPr latinLnBrk="1">
-                        <a:defRPr/>
-                      </a:pPr>
-                      <a:endParaRPr lang="ko-KR" altLang="en-US"/>
-                    </a:p>
-                  </a:txBody>
-                  <a:tcPr marL="91440" marR="91440">
-                    <a:lnL w="15240">
-                      <a:solidFill>
-                        <a:srgbClr val="000000">
-                          <a:alpha val="100000"/>
-                        </a:srgbClr>
-                      </a:solidFill>
-                      <a:prstDash val="solid"/>
-                    </a:lnL>
-                    <a:lnR w="15240">
-                      <a:solidFill>
-                        <a:srgbClr val="000000">
-                          <a:alpha val="100000"/>
-                        </a:srgbClr>
-                      </a:solidFill>
-                      <a:prstDash val="solid"/>
-                    </a:lnR>
-                    <a:lnT w="15240">
-                      <a:solidFill>
-                        <a:srgbClr val="000000">
-                          <a:alpha val="100000"/>
-                        </a:srgbClr>
-                      </a:solidFill>
-                      <a:prstDash val="solid"/>
-                    </a:lnT>
-                    <a:lnB w="15240">
-                      <a:solidFill>
-                        <a:srgbClr val="000000">
-                          <a:alpha val="100000"/>
-                        </a:srgbClr>
-                      </a:solidFill>
-                      <a:prstDash val="solid"/>
-                    </a:lnB>
-                    <a:solidFill>
-                      <a:schemeClr val="bg1">
-                        <a:alpha val="100000"/>
-                      </a:schemeClr>
-                    </a:solidFill>
-                  </a:tcPr>
-                </a:tc>
-                <a:tc hMerge="1">
-                  <a:txBody>
-                    <a:bodyPr/>
-                    <a:p>
-                      <a:pPr latinLnBrk="1">
-                        <a:defRPr/>
-                      </a:pPr>
-                      <a:endParaRPr lang="ko-KR" altLang="en-US"/>
-                    </a:p>
-                  </a:txBody>
-                  <a:tcPr marL="91440" marR="91440">
-                    <a:lnL w="15240">
-                      <a:solidFill>
-                        <a:srgbClr val="000000">
-                          <a:alpha val="100000"/>
-                        </a:srgbClr>
-                      </a:solidFill>
-                      <a:prstDash val="solid"/>
-                    </a:lnL>
-                    <a:lnR w="15240">
-                      <a:solidFill>
-                        <a:srgbClr val="000000">
-                          <a:alpha val="100000"/>
-                        </a:srgbClr>
-                      </a:solidFill>
-                      <a:prstDash val="solid"/>
-                    </a:lnR>
-                    <a:lnT w="15240">
-                      <a:solidFill>
-                        <a:srgbClr val="000000">
-                          <a:alpha val="100000"/>
-                        </a:srgbClr>
-                      </a:solidFill>
-                      <a:prstDash val="solid"/>
-                    </a:lnT>
-                    <a:lnB w="15240">
-                      <a:solidFill>
-                        <a:srgbClr val="000000">
-                          <a:alpha val="100000"/>
-                        </a:srgbClr>
-                      </a:solidFill>
-                      <a:prstDash val="solid"/>
-                    </a:lnB>
-                    <a:solidFill>
-                      <a:schemeClr val="bg1">
-                        <a:alpha val="100000"/>
-                      </a:schemeClr>
-                    </a:solidFill>
-                  </a:tcPr>
-                </a:tc>
-              </a:tr>
-              <a:tr h="270210">
-                <a:tc>
-                  <a:txBody>
-                    <a:bodyPr/>
-                    <a:p>
-                      <a:pPr latinLnBrk="1">
-                        <a:defRPr/>
-                      </a:pPr>
-                      <a:r>
-                        <a:rPr lang="ko-KR" altLang="en-US" sz="1700" b="1">
-                          <a:solidFill>
-                            <a:srgbClr val="000000"/>
-                          </a:solidFill>
-                        </a:rPr>
-                        <a:t>버튼명</a:t>
-                      </a:r>
-                      <a:endParaRPr lang="ko-KR" altLang="en-US" sz="1700" b="1">
-                        <a:solidFill>
-                          <a:srgbClr val="000000"/>
-                        </a:solidFill>
-                      </a:endParaRPr>
-                    </a:p>
-                  </a:txBody>
-                  <a:tcPr marL="91440" marR="91440">
-                    <a:lnL w="15240">
-                      <a:solidFill>
-                        <a:srgbClr val="000000">
-                          <a:alpha val="100000"/>
-                        </a:srgbClr>
-                      </a:solidFill>
-                      <a:prstDash val="solid"/>
-                    </a:lnL>
-                    <a:lnR w="15240">
-                      <a:solidFill>
-                        <a:srgbClr val="000000">
-                          <a:alpha val="100000"/>
-                        </a:srgbClr>
-                      </a:solidFill>
-                      <a:prstDash val="solid"/>
-                    </a:lnR>
-                    <a:lnT w="15240">
-                      <a:solidFill>
-                        <a:srgbClr val="000000">
-                          <a:alpha val="100000"/>
-                        </a:srgbClr>
-                      </a:solidFill>
-                      <a:prstDash val="solid"/>
-                    </a:lnT>
-                    <a:lnB w="15240">
-                      <a:solidFill>
-                        <a:srgbClr val="000000">
-                          <a:alpha val="100000"/>
-                        </a:srgbClr>
-                      </a:solidFill>
-                      <a:prstDash val="solid"/>
-                    </a:lnB>
-                    <a:solidFill>
-                      <a:schemeClr val="bg1">
-                        <a:alpha val="100000"/>
-                      </a:schemeClr>
-                    </a:solidFill>
-                  </a:tcPr>
-                </a:tc>
-                <a:tc>
-                  <a:txBody>
-                    <a:bodyPr/>
-                    <a:p>
-                      <a:pPr latinLnBrk="1">
-                        <a:defRPr/>
-                      </a:pPr>
-                      <a:r>
-                        <a:rPr lang="en-US" altLang="ko-KR" sz="1700" b="1">
-                          <a:solidFill>
-                            <a:srgbClr val="000000"/>
-                          </a:solidFill>
-                        </a:rPr>
-                        <a:t>URL</a:t>
-                      </a:r>
-                      <a:endParaRPr lang="ko-KR" altLang="en-US" sz="1700" b="1">
-                        <a:solidFill>
-                          <a:srgbClr val="000000"/>
-                        </a:solidFill>
-                      </a:endParaRPr>
-                    </a:p>
-                  </a:txBody>
-                  <a:tcPr marL="91440" marR="91440">
-                    <a:lnL w="15240">
-                      <a:solidFill>
-                        <a:srgbClr val="000000">
-                          <a:alpha val="100000"/>
-                        </a:srgbClr>
-                      </a:solidFill>
-                      <a:prstDash val="solid"/>
-                    </a:lnL>
-                    <a:lnR w="15240">
-                      <a:solidFill>
-                        <a:srgbClr val="000000">
-                          <a:alpha val="100000"/>
-                        </a:srgbClr>
-                      </a:solidFill>
-                      <a:prstDash val="solid"/>
-                    </a:lnR>
-                    <a:lnT w="15240">
-                      <a:solidFill>
-                        <a:srgbClr val="000000">
-                          <a:alpha val="100000"/>
-                        </a:srgbClr>
-                      </a:solidFill>
-                      <a:prstDash val="solid"/>
-                    </a:lnT>
-                    <a:lnB w="15240">
-                      <a:solidFill>
-                        <a:srgbClr val="000000">
-                          <a:alpha val="100000"/>
-                        </a:srgbClr>
-                      </a:solidFill>
-                      <a:prstDash val="solid"/>
-                    </a:lnB>
-                    <a:solidFill>
-                      <a:schemeClr val="bg1">
-                        <a:alpha val="100000"/>
-                      </a:schemeClr>
-                    </a:solidFill>
-                  </a:tcPr>
-                </a:tc>
-                <a:tc>
-                  <a:txBody>
-                    <a:bodyPr/>
-                    <a:p>
-                      <a:pPr latinLnBrk="1">
-                        <a:defRPr/>
-                      </a:pPr>
-                      <a:r>
-                        <a:rPr lang="en-US" altLang="ko-KR" sz="1700" b="1">
-                          <a:solidFill>
-                            <a:srgbClr val="000000"/>
-                          </a:solidFill>
-                        </a:rPr>
-                        <a:t>METHOD</a:t>
-                      </a:r>
-                      <a:endParaRPr lang="ko-KR" altLang="en-US" sz="1700" b="1">
-                        <a:solidFill>
-                          <a:srgbClr val="000000"/>
-                        </a:solidFill>
-                      </a:endParaRPr>
-                    </a:p>
-                  </a:txBody>
-                  <a:tcPr marL="91440" marR="91440">
-                    <a:lnL w="15240">
-                      <a:solidFill>
-                        <a:srgbClr val="000000">
-                          <a:alpha val="100000"/>
-                        </a:srgbClr>
-                      </a:solidFill>
-                      <a:prstDash val="solid"/>
-                    </a:lnL>
-                    <a:lnR w="15240">
-                      <a:solidFill>
-                        <a:srgbClr val="000000">
-                          <a:alpha val="100000"/>
-                        </a:srgbClr>
-                      </a:solidFill>
-                      <a:prstDash val="solid"/>
-                    </a:lnR>
-                    <a:lnT w="15240">
-                      <a:solidFill>
-                        <a:srgbClr val="000000">
-                          <a:alpha val="100000"/>
-                        </a:srgbClr>
-                      </a:solidFill>
-                      <a:prstDash val="solid"/>
-                    </a:lnT>
-                    <a:lnB w="15240">
-                      <a:solidFill>
-                        <a:srgbClr val="000000">
-                          <a:alpha val="100000"/>
-                        </a:srgbClr>
-                      </a:solidFill>
-                      <a:prstDash val="solid"/>
-                    </a:lnB>
-                    <a:solidFill>
-                      <a:schemeClr val="bg1">
-                        <a:alpha val="100000"/>
-                      </a:schemeClr>
-                    </a:solidFill>
-                  </a:tcPr>
-                </a:tc>
-              </a:tr>
-              <a:tr h="270210">
-                <a:tc>
-                  <a:txBody>
-                    <a:bodyPr/>
-                    <a:p>
-                      <a:pPr latinLnBrk="1">
-                        <a:defRPr/>
-                      </a:pPr>
-                      <a:r>
-                        <a:rPr lang="ko-KR" altLang="en-US" sz="1700">
-                          <a:solidFill>
-                            <a:srgbClr val="000000"/>
-                          </a:solidFill>
-                        </a:rPr>
-                        <a:t>홈</a:t>
-                      </a:r>
-                      <a:endParaRPr lang="ko-KR" altLang="en-US" sz="1700">
-                        <a:solidFill>
-                          <a:srgbClr val="000000"/>
-                        </a:solidFill>
-                      </a:endParaRPr>
-                    </a:p>
-                  </a:txBody>
-                  <a:tcPr marL="91440" marR="91440">
-                    <a:lnL w="15240">
-                      <a:solidFill>
-                        <a:srgbClr val="000000">
-                          <a:alpha val="100000"/>
-                        </a:srgbClr>
-                      </a:solidFill>
-                      <a:prstDash val="solid"/>
-                    </a:lnL>
-                    <a:lnR w="15240">
-                      <a:solidFill>
-                        <a:srgbClr val="000000">
-                          <a:alpha val="100000"/>
-                        </a:srgbClr>
-                      </a:solidFill>
-                      <a:prstDash val="solid"/>
-                    </a:lnR>
-                    <a:lnT w="15240">
-                      <a:solidFill>
-                        <a:srgbClr val="000000">
-                          <a:alpha val="100000"/>
-                        </a:srgbClr>
-                      </a:solidFill>
-                      <a:prstDash val="solid"/>
-                    </a:lnT>
-                    <a:lnB w="15240">
-                      <a:solidFill>
-                        <a:srgbClr val="000000">
-                          <a:alpha val="100000"/>
-                        </a:srgbClr>
-                      </a:solidFill>
-                      <a:prstDash val="solid"/>
-                    </a:lnB>
-                    <a:solidFill>
-                      <a:schemeClr val="bg1">
-                        <a:alpha val="100000"/>
-                      </a:schemeClr>
-                    </a:solidFill>
-                  </a:tcPr>
-                </a:tc>
-                <a:tc>
-                  <a:txBody>
-                    <a:bodyPr/>
-                    <a:p>
-                      <a:pPr latinLnBrk="1">
-                        <a:defRPr/>
-                      </a:pPr>
-                      <a:r>
-                        <a:rPr lang="en-US" altLang="ko-KR" sz="1700">
-                          <a:solidFill>
-                            <a:srgbClr val="000000"/>
-                          </a:solidFill>
-                        </a:rPr>
-                        <a:t>front/main</a:t>
-                      </a:r>
-                      <a:endParaRPr lang="ko-KR" altLang="en-US" sz="1700">
-                        <a:solidFill>
-                          <a:srgbClr val="000000"/>
-                        </a:solidFill>
-                      </a:endParaRPr>
-                    </a:p>
-                  </a:txBody>
-                  <a:tcPr marL="91440" marR="91440">
-                    <a:lnL w="15240">
-                      <a:solidFill>
-                        <a:srgbClr val="000000">
-                          <a:alpha val="100000"/>
-                        </a:srgbClr>
-                      </a:solidFill>
-                      <a:prstDash val="solid"/>
-                    </a:lnL>
-                    <a:lnR w="15240">
-                      <a:solidFill>
-                        <a:srgbClr val="000000">
-                          <a:alpha val="100000"/>
-                        </a:srgbClr>
-                      </a:solidFill>
-                      <a:prstDash val="solid"/>
-                    </a:lnR>
-                    <a:lnT w="15240">
-                      <a:solidFill>
-                        <a:srgbClr val="000000">
-                          <a:alpha val="100000"/>
-                        </a:srgbClr>
-                      </a:solidFill>
-                      <a:prstDash val="solid"/>
-                    </a:lnT>
-                    <a:lnB w="15240">
-                      <a:solidFill>
-                        <a:srgbClr val="000000">
-                          <a:alpha val="100000"/>
-                        </a:srgbClr>
-                      </a:solidFill>
-                      <a:prstDash val="solid"/>
-                    </a:lnB>
-                    <a:solidFill>
-                      <a:schemeClr val="bg1">
-                        <a:alpha val="100000"/>
-                      </a:schemeClr>
-                    </a:solidFill>
-                  </a:tcPr>
-                </a:tc>
-                <a:tc>
-                  <a:txBody>
-                    <a:bodyPr/>
-                    <a:p>
-                      <a:pPr latinLnBrk="1">
-                        <a:defRPr/>
-                      </a:pPr>
-                      <a:r>
-                        <a:rPr lang="en-US" altLang="ko-KR" sz="1700">
-                          <a:solidFill>
-                            <a:srgbClr val="000000"/>
-                          </a:solidFill>
-                        </a:rPr>
-                        <a:t>GET</a:t>
-                      </a:r>
-                      <a:endParaRPr lang="ko-KR" altLang="en-US" sz="1700">
-                        <a:solidFill>
-                          <a:srgbClr val="000000"/>
-                        </a:solidFill>
-                      </a:endParaRPr>
-                    </a:p>
-                  </a:txBody>
-                  <a:tcPr marL="91440" marR="91440">
-                    <a:lnL w="15240">
-                      <a:solidFill>
-                        <a:srgbClr val="000000">
-                          <a:alpha val="100000"/>
-                        </a:srgbClr>
-                      </a:solidFill>
-                      <a:prstDash val="solid"/>
-                    </a:lnL>
-                    <a:lnR w="15240">
-                      <a:solidFill>
-                        <a:srgbClr val="000000">
-                          <a:alpha val="100000"/>
-                        </a:srgbClr>
-                      </a:solidFill>
-                      <a:prstDash val="solid"/>
-                    </a:lnR>
-                    <a:lnT w="15240">
-                      <a:solidFill>
-                        <a:srgbClr val="000000">
-                          <a:alpha val="100000"/>
-                        </a:srgbClr>
-                      </a:solidFill>
-                      <a:prstDash val="solid"/>
-                    </a:lnT>
-                    <a:lnB w="15240">
-                      <a:solidFill>
-                        <a:srgbClr val="000000">
-                          <a:alpha val="100000"/>
-                        </a:srgbClr>
-                      </a:solidFill>
-                      <a:prstDash val="solid"/>
-                    </a:lnB>
-                    <a:solidFill>
-                      <a:schemeClr val="bg1">
-                        <a:alpha val="100000"/>
-                      </a:schemeClr>
-                    </a:solidFill>
-                  </a:tcPr>
-                </a:tc>
-              </a:tr>
-              <a:tr h="270210">
-                <a:tc>
-                  <a:txBody>
-                    <a:bodyPr/>
-                    <a:p>
-                      <a:pPr latinLnBrk="1">
-                        <a:defRPr/>
-                      </a:pPr>
-                      <a:r>
-                        <a:rPr lang="ko-KR" altLang="en-US" sz="1700">
-                          <a:solidFill>
-                            <a:srgbClr val="000000"/>
-                          </a:solidFill>
-                        </a:rPr>
-                        <a:t>정보수정</a:t>
-                      </a:r>
-                      <a:endParaRPr lang="ko-KR" altLang="en-US" sz="1700">
-                        <a:solidFill>
-                          <a:srgbClr val="000000"/>
-                        </a:solidFill>
-                      </a:endParaRPr>
-                    </a:p>
-                  </a:txBody>
-                  <a:tcPr marL="91440" marR="91440">
-                    <a:lnL w="15240">
-                      <a:solidFill>
-                        <a:srgbClr val="000000">
-                          <a:alpha val="100000"/>
-                        </a:srgbClr>
-                      </a:solidFill>
-                      <a:prstDash val="solid"/>
-                    </a:lnL>
-                    <a:lnR w="15240">
-                      <a:solidFill>
-                        <a:srgbClr val="000000">
-                          <a:alpha val="100000"/>
-                        </a:srgbClr>
-                      </a:solidFill>
-                      <a:prstDash val="solid"/>
-                    </a:lnR>
-                    <a:lnT w="15240">
-                      <a:solidFill>
-                        <a:srgbClr val="000000">
-                          <a:alpha val="100000"/>
-                        </a:srgbClr>
-                      </a:solidFill>
-                      <a:prstDash val="solid"/>
-                    </a:lnT>
-                    <a:lnB w="15240">
-                      <a:solidFill>
-                        <a:srgbClr val="000000">
-                          <a:alpha val="100000"/>
-                        </a:srgbClr>
-                      </a:solidFill>
-                      <a:prstDash val="solid"/>
-                    </a:lnB>
-                    <a:solidFill>
-                      <a:schemeClr val="bg1">
-                        <a:alpha val="100000"/>
-                      </a:schemeClr>
-                    </a:solidFill>
-                  </a:tcPr>
-                </a:tc>
-                <a:tc>
-                  <a:txBody>
-                    <a:bodyPr/>
-                    <a:p>
-                      <a:pPr latinLnBrk="1">
-                        <a:defRPr/>
-                      </a:pPr>
-                      <a:r>
-                        <a:rPr lang="en-US" altLang="ko-KR" sz="1700">
-                          <a:solidFill>
-                            <a:srgbClr val="000000"/>
-                          </a:solidFill>
-                        </a:rPr>
-                        <a:t>update/main</a:t>
-                      </a:r>
-                      <a:endParaRPr lang="ko-KR" altLang="en-US" sz="1700">
-                        <a:solidFill>
-                          <a:srgbClr val="000000"/>
-                        </a:solidFill>
-                      </a:endParaRPr>
-                    </a:p>
-                  </a:txBody>
-                  <a:tcPr marL="91440" marR="91440">
-                    <a:lnL w="15240">
-                      <a:solidFill>
-                        <a:srgbClr val="000000">
-                          <a:alpha val="100000"/>
-                        </a:srgbClr>
-                      </a:solidFill>
-                      <a:prstDash val="solid"/>
-                    </a:lnL>
-                    <a:lnR w="15240">
-                      <a:solidFill>
-                        <a:srgbClr val="000000">
-                          <a:alpha val="100000"/>
-                        </a:srgbClr>
-                      </a:solidFill>
-                      <a:prstDash val="solid"/>
-                    </a:lnR>
-                    <a:lnT w="15240">
-                      <a:solidFill>
-                        <a:srgbClr val="000000">
-                          <a:alpha val="100000"/>
-                        </a:srgbClr>
-                      </a:solidFill>
-                      <a:prstDash val="solid"/>
-                    </a:lnT>
-                    <a:lnB w="15240">
-                      <a:solidFill>
-                        <a:srgbClr val="000000">
-                          <a:alpha val="100000"/>
-                        </a:srgbClr>
-                      </a:solidFill>
-                      <a:prstDash val="solid"/>
-                    </a:lnB>
-                    <a:solidFill>
-                      <a:schemeClr val="bg1">
-                        <a:alpha val="100000"/>
-                      </a:schemeClr>
-                    </a:solidFill>
-                  </a:tcPr>
-                </a:tc>
-                <a:tc>
-                  <a:txBody>
-                    <a:bodyPr/>
-                    <a:p>
-                      <a:pPr latinLnBrk="1">
-                        <a:defRPr/>
-                      </a:pPr>
-                      <a:r>
-                        <a:rPr lang="en-US" altLang="ko-KR" sz="1700">
-                          <a:solidFill>
-                            <a:srgbClr val="000000"/>
-                          </a:solidFill>
-                        </a:rPr>
-                        <a:t>PATCH</a:t>
-                      </a:r>
-                      <a:endParaRPr lang="ko-KR" altLang="en-US" sz="1700">
-                        <a:solidFill>
-                          <a:srgbClr val="000000"/>
-                        </a:solidFill>
-                      </a:endParaRPr>
-                    </a:p>
-                  </a:txBody>
-                  <a:tcPr marL="91440" marR="91440">
-                    <a:lnL w="15240">
-                      <a:solidFill>
-                        <a:srgbClr val="000000">
-                          <a:alpha val="100000"/>
-                        </a:srgbClr>
-                      </a:solidFill>
-                      <a:prstDash val="solid"/>
-                    </a:lnL>
-                    <a:lnR w="15240">
-                      <a:solidFill>
-                        <a:srgbClr val="000000">
-                          <a:alpha val="100000"/>
-                        </a:srgbClr>
-                      </a:solidFill>
-                      <a:prstDash val="solid"/>
-                    </a:lnR>
-                    <a:lnT w="15240">
-                      <a:solidFill>
-                        <a:srgbClr val="000000">
-                          <a:alpha val="100000"/>
-                        </a:srgbClr>
-                      </a:solidFill>
-                      <a:prstDash val="solid"/>
-                    </a:lnT>
-                    <a:lnB w="15240">
-                      <a:solidFill>
-                        <a:srgbClr val="000000">
-                          <a:alpha val="100000"/>
-                        </a:srgbClr>
-                      </a:solidFill>
-                      <a:prstDash val="solid"/>
-                    </a:lnB>
-                    <a:solidFill>
-                      <a:schemeClr val="bg1">
-                        <a:alpha val="100000"/>
-                      </a:schemeClr>
-                    </a:solidFill>
-                  </a:tcPr>
-                </a:tc>
-              </a:tr>
-              <a:tr h="270210">
-                <a:tc>
-                  <a:txBody>
-                    <a:bodyPr/>
-                    <a:p>
-                      <a:pPr latinLnBrk="1">
-                        <a:defRPr/>
-                      </a:pPr>
-                      <a:r>
-                        <a:rPr lang="ko-KR" altLang="en-US" sz="1700">
-                          <a:solidFill>
-                            <a:srgbClr val="000000"/>
-                          </a:solidFill>
-                        </a:rPr>
-                        <a:t>위도서관선택</a:t>
-                      </a:r>
-                      <a:endParaRPr lang="ko-KR" altLang="en-US" sz="1700">
-                        <a:solidFill>
-                          <a:srgbClr val="000000"/>
-                        </a:solidFill>
-                      </a:endParaRPr>
-                    </a:p>
-                  </a:txBody>
-                  <a:tcPr marL="91440" marR="91440">
-                    <a:lnL w="15240">
-                      <a:solidFill>
-                        <a:srgbClr val="000000">
-                          <a:alpha val="100000"/>
-                        </a:srgbClr>
-                      </a:solidFill>
-                      <a:prstDash val="solid"/>
-                    </a:lnL>
-                    <a:lnR w="15240">
-                      <a:solidFill>
-                        <a:srgbClr val="000000">
-                          <a:alpha val="100000"/>
-                        </a:srgbClr>
-                      </a:solidFill>
-                      <a:prstDash val="solid"/>
-                    </a:lnR>
-                    <a:lnT w="15240">
-                      <a:solidFill>
-                        <a:srgbClr val="000000">
-                          <a:alpha val="100000"/>
-                        </a:srgbClr>
-                      </a:solidFill>
-                      <a:prstDash val="solid"/>
-                    </a:lnT>
-                    <a:lnB w="15240">
-                      <a:solidFill>
-                        <a:srgbClr val="000000">
-                          <a:alpha val="100000"/>
-                        </a:srgbClr>
-                      </a:solidFill>
-                      <a:prstDash val="solid"/>
-                    </a:lnB>
-                    <a:solidFill>
-                      <a:schemeClr val="bg1">
-                        <a:alpha val="100000"/>
-                      </a:schemeClr>
-                    </a:solidFill>
-                  </a:tcPr>
-                </a:tc>
-                <a:tc>
-                  <a:txBody>
-                    <a:bodyPr/>
-                    <a:p>
-                      <a:pPr latinLnBrk="1">
-                        <a:defRPr/>
-                      </a:pPr>
-                      <a:r>
-                        <a:rPr lang="en-US" altLang="ko-KR" sz="1700">
-                          <a:solidFill>
-                            <a:srgbClr val="000000"/>
-                          </a:solidFill>
-                        </a:rPr>
-                        <a:t>introduction/{0}-pathvariable</a:t>
-                      </a:r>
-                      <a:endParaRPr lang="ko-KR" altLang="en-US" sz="1700">
-                        <a:solidFill>
-                          <a:srgbClr val="000000"/>
-                        </a:solidFill>
-                      </a:endParaRPr>
-                    </a:p>
-                  </a:txBody>
-                  <a:tcPr marL="91440" marR="91440">
-                    <a:lnL w="15240">
-                      <a:solidFill>
-                        <a:srgbClr val="000000">
-                          <a:alpha val="100000"/>
-                        </a:srgbClr>
-                      </a:solidFill>
-                      <a:prstDash val="solid"/>
-                    </a:lnL>
-                    <a:lnR w="15240">
-                      <a:solidFill>
-                        <a:srgbClr val="000000">
-                          <a:alpha val="100000"/>
-                        </a:srgbClr>
-                      </a:solidFill>
-                      <a:prstDash val="solid"/>
-                    </a:lnR>
-                    <a:lnT w="15240">
-                      <a:solidFill>
-                        <a:srgbClr val="000000">
-                          <a:alpha val="100000"/>
-                        </a:srgbClr>
-                      </a:solidFill>
-                      <a:prstDash val="solid"/>
-                    </a:lnT>
-                    <a:lnB w="15240">
-                      <a:solidFill>
-                        <a:srgbClr val="000000">
-                          <a:alpha val="100000"/>
-                        </a:srgbClr>
-                      </a:solidFill>
-                      <a:prstDash val="solid"/>
-                    </a:lnB>
-                    <a:solidFill>
-                      <a:schemeClr val="bg1">
-                        <a:alpha val="100000"/>
-                      </a:schemeClr>
-                    </a:solidFill>
-                  </a:tcPr>
-                </a:tc>
-                <a:tc>
-                  <a:txBody>
-                    <a:bodyPr/>
-                    <a:p>
-                      <a:pPr latinLnBrk="1">
-                        <a:defRPr/>
-                      </a:pPr>
-                      <a:r>
-                        <a:rPr lang="en-US" altLang="ko-KR" sz="1700">
-                          <a:solidFill>
-                            <a:srgbClr val="000000"/>
-                          </a:solidFill>
-                        </a:rPr>
-                        <a:t>GET</a:t>
-                      </a:r>
-                      <a:endParaRPr lang="ko-KR" altLang="en-US" sz="1700">
-                        <a:solidFill>
-                          <a:srgbClr val="000000"/>
-                        </a:solidFill>
-                      </a:endParaRPr>
-                    </a:p>
-                  </a:txBody>
-                  <a:tcPr marL="91440" marR="91440">
-                    <a:lnL w="15240">
-                      <a:solidFill>
-                        <a:srgbClr val="000000">
-                          <a:alpha val="100000"/>
-                        </a:srgbClr>
-                      </a:solidFill>
-                      <a:prstDash val="solid"/>
-                    </a:lnL>
-                    <a:lnR w="15240">
-                      <a:solidFill>
-                        <a:srgbClr val="000000">
-                          <a:alpha val="100000"/>
-                        </a:srgbClr>
-                      </a:solidFill>
-                      <a:prstDash val="solid"/>
-                    </a:lnR>
-                    <a:lnT w="15240">
-                      <a:solidFill>
-                        <a:srgbClr val="000000">
-                          <a:alpha val="100000"/>
-                        </a:srgbClr>
-                      </a:solidFill>
-                      <a:prstDash val="solid"/>
-                    </a:lnT>
-                    <a:lnB w="15240">
-                      <a:solidFill>
-                        <a:srgbClr val="000000">
-                          <a:alpha val="100000"/>
-                        </a:srgbClr>
-                      </a:solidFill>
-                      <a:prstDash val="solid"/>
-                    </a:lnB>
-                    <a:solidFill>
-                      <a:schemeClr val="bg1">
-                        <a:alpha val="100000"/>
-                      </a:schemeClr>
-                    </a:solidFill>
-                  </a:tcPr>
-                </a:tc>
-              </a:tr>
-            </a:tbl>
-          </a:graphicData>
-        </a:graphic>
-      </p:graphicFrame>
-    </p:spTree>
-    <p:extLst>
-      <p:ext uri="{BB962C8B-B14F-4D97-AF65-F5344CB8AC3E}">
-        <p14:creationId xmlns:p14="http://schemas.microsoft.com/office/powerpoint/2010/main" val="3956941906"/>
       </p:ext>
     </p:extLst>
   </p:cSld>
@@ -34002,6 +34922,1021 @@
           <a:chExt cx="0" cy="0"/>
         </a:xfrm>
       </p:grpSpPr>
+      <p:graphicFrame>
+        <p:nvGraphicFramePr>
+          <p:cNvPr id="2" name="Table"/>
+          <p:cNvGraphicFramePr>
+            <a:graphicFrameLocks noGrp="1"/>
+          </p:cNvGraphicFramePr>
+          <p:nvPr/>
+        </p:nvGraphicFramePr>
+        <p:xfrm>
+          <a:off x="2032052" y="2423473"/>
+          <a:ext cx="8128000" cy="1854200"/>
+        </p:xfrm>
+        <a:graphic>
+          <a:graphicData uri="http://schemas.openxmlformats.org/drawingml/2006/table">
+            <a:tbl>
+              <a:tblPr firstRow="1" bandRow="1">
+                <a:tableStyleId>{01A66EDD-3DAB-4C5B-A090-DC80EC1FD486}</a:tableStyleId>
+              </a:tblPr>
+              <a:tblGrid>
+                <a:gridCol w="2709333"/>
+                <a:gridCol w="2709333"/>
+                <a:gridCol w="2709333"/>
+              </a:tblGrid>
+              <a:tr h="270210">
+                <a:tc gridSpan="3">
+                  <a:txBody>
+                    <a:bodyPr/>
+                    <a:p>
+                      <a:pPr latinLnBrk="1">
+                        <a:defRPr/>
+                      </a:pPr>
+                      <a:r>
+                        <a:rPr lang="ko-KR" altLang="en-US" sz="1700">
+                          <a:solidFill>
+                            <a:srgbClr val="000000"/>
+                          </a:solidFill>
+                        </a:rPr>
+                        <a:t>버튼</a:t>
+                      </a:r>
+                      <a:r>
+                        <a:rPr lang="en-US" altLang="ko-KR" sz="1700">
+                          <a:solidFill>
+                            <a:srgbClr val="000000"/>
+                          </a:solidFill>
+                        </a:rPr>
+                        <a:t> URL</a:t>
+                      </a:r>
+                      <a:endParaRPr lang="ko-KR" altLang="en-US" sz="1700">
+                        <a:solidFill>
+                          <a:srgbClr val="000000"/>
+                        </a:solidFill>
+                      </a:endParaRPr>
+                    </a:p>
+                  </a:txBody>
+                  <a:tcPr marL="91440" marR="91440">
+                    <a:lnL w="15240">
+                      <a:solidFill>
+                        <a:srgbClr val="000000">
+                          <a:alpha val="100000"/>
+                        </a:srgbClr>
+                      </a:solidFill>
+                      <a:prstDash val="solid"/>
+                    </a:lnL>
+                    <a:lnR w="15240">
+                      <a:solidFill>
+                        <a:srgbClr val="000000">
+                          <a:alpha val="100000"/>
+                        </a:srgbClr>
+                      </a:solidFill>
+                      <a:prstDash val="solid"/>
+                    </a:lnR>
+                    <a:lnT w="15240">
+                      <a:solidFill>
+                        <a:srgbClr val="000000">
+                          <a:alpha val="100000"/>
+                        </a:srgbClr>
+                      </a:solidFill>
+                      <a:prstDash val="solid"/>
+                    </a:lnT>
+                    <a:lnB w="15240">
+                      <a:solidFill>
+                        <a:srgbClr val="000000">
+                          <a:alpha val="100000"/>
+                        </a:srgbClr>
+                      </a:solidFill>
+                      <a:prstDash val="solid"/>
+                    </a:lnB>
+                    <a:solidFill>
+                      <a:schemeClr val="bg1">
+                        <a:alpha val="100000"/>
+                      </a:schemeClr>
+                    </a:solidFill>
+                  </a:tcPr>
+                </a:tc>
+                <a:tc hMerge="1">
+                  <a:txBody>
+                    <a:bodyPr/>
+                    <a:p>
+                      <a:pPr latinLnBrk="1">
+                        <a:defRPr/>
+                      </a:pPr>
+                      <a:endParaRPr lang="ko-KR" altLang="en-US"/>
+                    </a:p>
+                  </a:txBody>
+                  <a:tcPr marL="91440" marR="91440">
+                    <a:lnL w="15240">
+                      <a:solidFill>
+                        <a:srgbClr val="000000">
+                          <a:alpha val="100000"/>
+                        </a:srgbClr>
+                      </a:solidFill>
+                      <a:prstDash val="solid"/>
+                    </a:lnL>
+                    <a:lnR w="15240">
+                      <a:solidFill>
+                        <a:srgbClr val="000000">
+                          <a:alpha val="100000"/>
+                        </a:srgbClr>
+                      </a:solidFill>
+                      <a:prstDash val="solid"/>
+                    </a:lnR>
+                    <a:lnT w="15240">
+                      <a:solidFill>
+                        <a:srgbClr val="000000">
+                          <a:alpha val="100000"/>
+                        </a:srgbClr>
+                      </a:solidFill>
+                      <a:prstDash val="solid"/>
+                    </a:lnT>
+                    <a:lnB w="15240">
+                      <a:solidFill>
+                        <a:srgbClr val="000000">
+                          <a:alpha val="100000"/>
+                        </a:srgbClr>
+                      </a:solidFill>
+                      <a:prstDash val="solid"/>
+                    </a:lnB>
+                    <a:solidFill>
+                      <a:schemeClr val="bg1">
+                        <a:alpha val="100000"/>
+                      </a:schemeClr>
+                    </a:solidFill>
+                  </a:tcPr>
+                </a:tc>
+                <a:tc hMerge="1">
+                  <a:txBody>
+                    <a:bodyPr/>
+                    <a:p>
+                      <a:pPr latinLnBrk="1">
+                        <a:defRPr/>
+                      </a:pPr>
+                      <a:endParaRPr lang="ko-KR" altLang="en-US"/>
+                    </a:p>
+                  </a:txBody>
+                  <a:tcPr marL="91440" marR="91440">
+                    <a:lnL w="15240">
+                      <a:solidFill>
+                        <a:srgbClr val="000000">
+                          <a:alpha val="100000"/>
+                        </a:srgbClr>
+                      </a:solidFill>
+                      <a:prstDash val="solid"/>
+                    </a:lnL>
+                    <a:lnR w="15240">
+                      <a:solidFill>
+                        <a:srgbClr val="000000">
+                          <a:alpha val="100000"/>
+                        </a:srgbClr>
+                      </a:solidFill>
+                      <a:prstDash val="solid"/>
+                    </a:lnR>
+                    <a:lnT w="15240">
+                      <a:solidFill>
+                        <a:srgbClr val="000000">
+                          <a:alpha val="100000"/>
+                        </a:srgbClr>
+                      </a:solidFill>
+                      <a:prstDash val="solid"/>
+                    </a:lnT>
+                    <a:lnB w="15240">
+                      <a:solidFill>
+                        <a:srgbClr val="000000">
+                          <a:alpha val="100000"/>
+                        </a:srgbClr>
+                      </a:solidFill>
+                      <a:prstDash val="solid"/>
+                    </a:lnB>
+                    <a:solidFill>
+                      <a:schemeClr val="bg1">
+                        <a:alpha val="100000"/>
+                      </a:schemeClr>
+                    </a:solidFill>
+                  </a:tcPr>
+                </a:tc>
+              </a:tr>
+              <a:tr h="270210">
+                <a:tc>
+                  <a:txBody>
+                    <a:bodyPr/>
+                    <a:p>
+                      <a:pPr latinLnBrk="1">
+                        <a:defRPr/>
+                      </a:pPr>
+                      <a:r>
+                        <a:rPr lang="ko-KR" altLang="en-US" sz="1700" b="1">
+                          <a:solidFill>
+                            <a:srgbClr val="000000"/>
+                          </a:solidFill>
+                        </a:rPr>
+                        <a:t>버튼명</a:t>
+                      </a:r>
+                      <a:endParaRPr lang="ko-KR" altLang="en-US" sz="1700" b="1">
+                        <a:solidFill>
+                          <a:srgbClr val="000000"/>
+                        </a:solidFill>
+                      </a:endParaRPr>
+                    </a:p>
+                  </a:txBody>
+                  <a:tcPr marL="91440" marR="91440">
+                    <a:lnL w="15240">
+                      <a:solidFill>
+                        <a:srgbClr val="000000">
+                          <a:alpha val="100000"/>
+                        </a:srgbClr>
+                      </a:solidFill>
+                      <a:prstDash val="solid"/>
+                    </a:lnL>
+                    <a:lnR w="15240">
+                      <a:solidFill>
+                        <a:srgbClr val="000000">
+                          <a:alpha val="100000"/>
+                        </a:srgbClr>
+                      </a:solidFill>
+                      <a:prstDash val="solid"/>
+                    </a:lnR>
+                    <a:lnT w="15240">
+                      <a:solidFill>
+                        <a:srgbClr val="000000">
+                          <a:alpha val="100000"/>
+                        </a:srgbClr>
+                      </a:solidFill>
+                      <a:prstDash val="solid"/>
+                    </a:lnT>
+                    <a:lnB w="15240">
+                      <a:solidFill>
+                        <a:srgbClr val="000000">
+                          <a:alpha val="100000"/>
+                        </a:srgbClr>
+                      </a:solidFill>
+                      <a:prstDash val="solid"/>
+                    </a:lnB>
+                    <a:solidFill>
+                      <a:schemeClr val="bg1">
+                        <a:alpha val="100000"/>
+                      </a:schemeClr>
+                    </a:solidFill>
+                  </a:tcPr>
+                </a:tc>
+                <a:tc>
+                  <a:txBody>
+                    <a:bodyPr/>
+                    <a:p>
+                      <a:pPr latinLnBrk="1">
+                        <a:defRPr/>
+                      </a:pPr>
+                      <a:r>
+                        <a:rPr lang="en-US" altLang="ko-KR" sz="1700" b="1">
+                          <a:solidFill>
+                            <a:srgbClr val="000000"/>
+                          </a:solidFill>
+                        </a:rPr>
+                        <a:t>URL</a:t>
+                      </a:r>
+                      <a:endParaRPr lang="ko-KR" altLang="en-US" sz="1700" b="1">
+                        <a:solidFill>
+                          <a:srgbClr val="000000"/>
+                        </a:solidFill>
+                      </a:endParaRPr>
+                    </a:p>
+                  </a:txBody>
+                  <a:tcPr marL="91440" marR="91440">
+                    <a:lnL w="15240">
+                      <a:solidFill>
+                        <a:srgbClr val="000000">
+                          <a:alpha val="100000"/>
+                        </a:srgbClr>
+                      </a:solidFill>
+                      <a:prstDash val="solid"/>
+                    </a:lnL>
+                    <a:lnR w="15240">
+                      <a:solidFill>
+                        <a:srgbClr val="000000">
+                          <a:alpha val="100000"/>
+                        </a:srgbClr>
+                      </a:solidFill>
+                      <a:prstDash val="solid"/>
+                    </a:lnR>
+                    <a:lnT w="15240">
+                      <a:solidFill>
+                        <a:srgbClr val="000000">
+                          <a:alpha val="100000"/>
+                        </a:srgbClr>
+                      </a:solidFill>
+                      <a:prstDash val="solid"/>
+                    </a:lnT>
+                    <a:lnB w="15240">
+                      <a:solidFill>
+                        <a:srgbClr val="000000">
+                          <a:alpha val="100000"/>
+                        </a:srgbClr>
+                      </a:solidFill>
+                      <a:prstDash val="solid"/>
+                    </a:lnB>
+                    <a:solidFill>
+                      <a:schemeClr val="bg1">
+                        <a:alpha val="100000"/>
+                      </a:schemeClr>
+                    </a:solidFill>
+                  </a:tcPr>
+                </a:tc>
+                <a:tc>
+                  <a:txBody>
+                    <a:bodyPr/>
+                    <a:p>
+                      <a:pPr latinLnBrk="1">
+                        <a:defRPr/>
+                      </a:pPr>
+                      <a:r>
+                        <a:rPr lang="en-US" altLang="ko-KR" sz="1700" b="1">
+                          <a:solidFill>
+                            <a:srgbClr val="000000"/>
+                          </a:solidFill>
+                        </a:rPr>
+                        <a:t>METHOD</a:t>
+                      </a:r>
+                      <a:endParaRPr lang="ko-KR" altLang="en-US" sz="1700" b="1">
+                        <a:solidFill>
+                          <a:srgbClr val="000000"/>
+                        </a:solidFill>
+                      </a:endParaRPr>
+                    </a:p>
+                  </a:txBody>
+                  <a:tcPr marL="91440" marR="91440">
+                    <a:lnL w="15240">
+                      <a:solidFill>
+                        <a:srgbClr val="000000">
+                          <a:alpha val="100000"/>
+                        </a:srgbClr>
+                      </a:solidFill>
+                      <a:prstDash val="solid"/>
+                    </a:lnL>
+                    <a:lnR w="15240">
+                      <a:solidFill>
+                        <a:srgbClr val="000000">
+                          <a:alpha val="100000"/>
+                        </a:srgbClr>
+                      </a:solidFill>
+                      <a:prstDash val="solid"/>
+                    </a:lnR>
+                    <a:lnT w="15240">
+                      <a:solidFill>
+                        <a:srgbClr val="000000">
+                          <a:alpha val="100000"/>
+                        </a:srgbClr>
+                      </a:solidFill>
+                      <a:prstDash val="solid"/>
+                    </a:lnT>
+                    <a:lnB w="15240">
+                      <a:solidFill>
+                        <a:srgbClr val="000000">
+                          <a:alpha val="100000"/>
+                        </a:srgbClr>
+                      </a:solidFill>
+                      <a:prstDash val="solid"/>
+                    </a:lnB>
+                    <a:solidFill>
+                      <a:schemeClr val="bg1">
+                        <a:alpha val="100000"/>
+                      </a:schemeClr>
+                    </a:solidFill>
+                  </a:tcPr>
+                </a:tc>
+              </a:tr>
+              <a:tr h="270210">
+                <a:tc>
+                  <a:txBody>
+                    <a:bodyPr/>
+                    <a:p>
+                      <a:pPr latinLnBrk="1">
+                        <a:defRPr/>
+                      </a:pPr>
+                      <a:r>
+                        <a:rPr lang="ko-KR" altLang="en-US" sz="1700">
+                          <a:solidFill>
+                            <a:srgbClr val="000000"/>
+                          </a:solidFill>
+                        </a:rPr>
+                        <a:t>홈</a:t>
+                      </a:r>
+                      <a:endParaRPr lang="ko-KR" altLang="en-US" sz="1700">
+                        <a:solidFill>
+                          <a:srgbClr val="000000"/>
+                        </a:solidFill>
+                      </a:endParaRPr>
+                    </a:p>
+                  </a:txBody>
+                  <a:tcPr marL="91440" marR="91440">
+                    <a:lnL w="15240">
+                      <a:solidFill>
+                        <a:srgbClr val="000000">
+                          <a:alpha val="100000"/>
+                        </a:srgbClr>
+                      </a:solidFill>
+                      <a:prstDash val="solid"/>
+                    </a:lnL>
+                    <a:lnR w="15240">
+                      <a:solidFill>
+                        <a:srgbClr val="000000">
+                          <a:alpha val="100000"/>
+                        </a:srgbClr>
+                      </a:solidFill>
+                      <a:prstDash val="solid"/>
+                    </a:lnR>
+                    <a:lnT w="15240">
+                      <a:solidFill>
+                        <a:srgbClr val="000000">
+                          <a:alpha val="100000"/>
+                        </a:srgbClr>
+                      </a:solidFill>
+                      <a:prstDash val="solid"/>
+                    </a:lnT>
+                    <a:lnB w="15240">
+                      <a:solidFill>
+                        <a:srgbClr val="000000">
+                          <a:alpha val="100000"/>
+                        </a:srgbClr>
+                      </a:solidFill>
+                      <a:prstDash val="solid"/>
+                    </a:lnB>
+                    <a:solidFill>
+                      <a:schemeClr val="bg1">
+                        <a:alpha val="100000"/>
+                      </a:schemeClr>
+                    </a:solidFill>
+                  </a:tcPr>
+                </a:tc>
+                <a:tc>
+                  <a:txBody>
+                    <a:bodyPr/>
+                    <a:p>
+                      <a:pPr latinLnBrk="1">
+                        <a:defRPr/>
+                      </a:pPr>
+                      <a:r>
+                        <a:rPr lang="en-US" altLang="ko-KR" sz="1700">
+                          <a:solidFill>
+                            <a:srgbClr val="000000"/>
+                          </a:solidFill>
+                        </a:rPr>
+                        <a:t>front/main</a:t>
+                      </a:r>
+                      <a:endParaRPr lang="en-US" altLang="ko-KR" sz="1700">
+                        <a:solidFill>
+                          <a:srgbClr val="000000"/>
+                        </a:solidFill>
+                      </a:endParaRPr>
+                    </a:p>
+                    <a:p>
+                      <a:pPr latinLnBrk="1">
+                        <a:defRPr/>
+                      </a:pPr>
+                      <a:r>
+                        <a:rPr lang="en-US" altLang="ko-KR" sz="1700">
+                          <a:solidFill>
+                            <a:srgbClr val="000000"/>
+                          </a:solidFill>
+                        </a:rPr>
+                        <a:t>./front.html</a:t>
+                      </a:r>
+                      <a:endParaRPr lang="ko-KR" altLang="en-US" sz="1700">
+                        <a:solidFill>
+                          <a:srgbClr val="000000"/>
+                        </a:solidFill>
+                      </a:endParaRPr>
+                    </a:p>
+                  </a:txBody>
+                  <a:tcPr marL="91440" marR="91440">
+                    <a:lnL w="15240">
+                      <a:solidFill>
+                        <a:srgbClr val="000000">
+                          <a:alpha val="100000"/>
+                        </a:srgbClr>
+                      </a:solidFill>
+                      <a:prstDash val="solid"/>
+                    </a:lnL>
+                    <a:lnR w="15240">
+                      <a:solidFill>
+                        <a:srgbClr val="000000">
+                          <a:alpha val="100000"/>
+                        </a:srgbClr>
+                      </a:solidFill>
+                      <a:prstDash val="solid"/>
+                    </a:lnR>
+                    <a:lnT w="15240">
+                      <a:solidFill>
+                        <a:srgbClr val="000000">
+                          <a:alpha val="100000"/>
+                        </a:srgbClr>
+                      </a:solidFill>
+                      <a:prstDash val="solid"/>
+                    </a:lnT>
+                    <a:lnB w="15240">
+                      <a:solidFill>
+                        <a:srgbClr val="000000">
+                          <a:alpha val="100000"/>
+                        </a:srgbClr>
+                      </a:solidFill>
+                      <a:prstDash val="solid"/>
+                    </a:lnB>
+                    <a:solidFill>
+                      <a:schemeClr val="bg1">
+                        <a:alpha val="100000"/>
+                      </a:schemeClr>
+                    </a:solidFill>
+                  </a:tcPr>
+                </a:tc>
+                <a:tc>
+                  <a:txBody>
+                    <a:bodyPr/>
+                    <a:p>
+                      <a:pPr latinLnBrk="1">
+                        <a:defRPr/>
+                      </a:pPr>
+                      <a:r>
+                        <a:rPr lang="en-US" altLang="ko-KR" sz="1700">
+                          <a:solidFill>
+                            <a:srgbClr val="000000"/>
+                          </a:solidFill>
+                        </a:rPr>
+                        <a:t>GET</a:t>
+                      </a:r>
+                      <a:endParaRPr lang="ko-KR" altLang="en-US" sz="1700">
+                        <a:solidFill>
+                          <a:srgbClr val="000000"/>
+                        </a:solidFill>
+                      </a:endParaRPr>
+                    </a:p>
+                  </a:txBody>
+                  <a:tcPr marL="91440" marR="91440">
+                    <a:lnL w="15240">
+                      <a:solidFill>
+                        <a:srgbClr val="000000">
+                          <a:alpha val="100000"/>
+                        </a:srgbClr>
+                      </a:solidFill>
+                      <a:prstDash val="solid"/>
+                    </a:lnL>
+                    <a:lnR w="15240">
+                      <a:solidFill>
+                        <a:srgbClr val="000000">
+                          <a:alpha val="100000"/>
+                        </a:srgbClr>
+                      </a:solidFill>
+                      <a:prstDash val="solid"/>
+                    </a:lnR>
+                    <a:lnT w="15240">
+                      <a:solidFill>
+                        <a:srgbClr val="000000">
+                          <a:alpha val="100000"/>
+                        </a:srgbClr>
+                      </a:solidFill>
+                      <a:prstDash val="solid"/>
+                    </a:lnT>
+                    <a:lnB w="15240">
+                      <a:solidFill>
+                        <a:srgbClr val="000000">
+                          <a:alpha val="100000"/>
+                        </a:srgbClr>
+                      </a:solidFill>
+                      <a:prstDash val="solid"/>
+                    </a:lnB>
+                    <a:solidFill>
+                      <a:schemeClr val="bg1">
+                        <a:alpha val="100000"/>
+                      </a:schemeClr>
+                    </a:solidFill>
+                  </a:tcPr>
+                </a:tc>
+              </a:tr>
+              <a:tr h="270210">
+                <a:tc>
+                  <a:txBody>
+                    <a:bodyPr/>
+                    <a:p>
+                      <a:pPr latinLnBrk="1">
+                        <a:defRPr/>
+                      </a:pPr>
+                      <a:r>
+                        <a:rPr lang="ko-KR" altLang="en-US" sz="1700">
+                          <a:solidFill>
+                            <a:srgbClr val="000000"/>
+                          </a:solidFill>
+                        </a:rPr>
+                        <a:t>정보수정</a:t>
+                      </a:r>
+                      <a:endParaRPr lang="ko-KR" altLang="en-US" sz="1700">
+                        <a:solidFill>
+                          <a:srgbClr val="000000"/>
+                        </a:solidFill>
+                      </a:endParaRPr>
+                    </a:p>
+                  </a:txBody>
+                  <a:tcPr marL="91440" marR="91440">
+                    <a:lnL w="15240">
+                      <a:solidFill>
+                        <a:srgbClr val="000000">
+                          <a:alpha val="100000"/>
+                        </a:srgbClr>
+                      </a:solidFill>
+                      <a:prstDash val="solid"/>
+                    </a:lnL>
+                    <a:lnR w="15240">
+                      <a:solidFill>
+                        <a:srgbClr val="000000">
+                          <a:alpha val="100000"/>
+                        </a:srgbClr>
+                      </a:solidFill>
+                      <a:prstDash val="solid"/>
+                    </a:lnR>
+                    <a:lnT w="15240">
+                      <a:solidFill>
+                        <a:srgbClr val="000000">
+                          <a:alpha val="100000"/>
+                        </a:srgbClr>
+                      </a:solidFill>
+                      <a:prstDash val="solid"/>
+                    </a:lnT>
+                    <a:lnB w="15240">
+                      <a:solidFill>
+                        <a:srgbClr val="000000">
+                          <a:alpha val="100000"/>
+                        </a:srgbClr>
+                      </a:solidFill>
+                      <a:prstDash val="solid"/>
+                    </a:lnB>
+                    <a:solidFill>
+                      <a:schemeClr val="bg1">
+                        <a:alpha val="100000"/>
+                      </a:schemeClr>
+                    </a:solidFill>
+                  </a:tcPr>
+                </a:tc>
+                <a:tc>
+                  <a:txBody>
+                    <a:bodyPr/>
+                    <a:p>
+                      <a:pPr latinLnBrk="1">
+                        <a:defRPr/>
+                      </a:pPr>
+                      <a:r>
+                        <a:rPr lang="en-US" altLang="ko-KR" sz="1700">
+                          <a:solidFill>
+                            <a:srgbClr val="000000"/>
+                          </a:solidFill>
+                        </a:rPr>
+                        <a:t>update/checkPass</a:t>
+                      </a:r>
+                      <a:endParaRPr lang="ko-KR" altLang="en-US" sz="1700">
+                        <a:solidFill>
+                          <a:srgbClr val="000000"/>
+                        </a:solidFill>
+                      </a:endParaRPr>
+                    </a:p>
+                  </a:txBody>
+                  <a:tcPr marL="91440" marR="91440">
+                    <a:lnL w="15240">
+                      <a:solidFill>
+                        <a:srgbClr val="000000">
+                          <a:alpha val="100000"/>
+                        </a:srgbClr>
+                      </a:solidFill>
+                      <a:prstDash val="solid"/>
+                    </a:lnL>
+                    <a:lnR w="15240">
+                      <a:solidFill>
+                        <a:srgbClr val="000000">
+                          <a:alpha val="100000"/>
+                        </a:srgbClr>
+                      </a:solidFill>
+                      <a:prstDash val="solid"/>
+                    </a:lnR>
+                    <a:lnT w="15240">
+                      <a:solidFill>
+                        <a:srgbClr val="000000">
+                          <a:alpha val="100000"/>
+                        </a:srgbClr>
+                      </a:solidFill>
+                      <a:prstDash val="solid"/>
+                    </a:lnT>
+                    <a:lnB w="15240">
+                      <a:solidFill>
+                        <a:srgbClr val="000000">
+                          <a:alpha val="100000"/>
+                        </a:srgbClr>
+                      </a:solidFill>
+                      <a:prstDash val="solid"/>
+                    </a:lnB>
+                    <a:solidFill>
+                      <a:schemeClr val="bg1">
+                        <a:alpha val="100000"/>
+                      </a:schemeClr>
+                    </a:solidFill>
+                  </a:tcPr>
+                </a:tc>
+                <a:tc>
+                  <a:txBody>
+                    <a:bodyPr/>
+                    <a:p>
+                      <a:pPr latinLnBrk="1">
+                        <a:defRPr/>
+                      </a:pPr>
+                      <a:r>
+                        <a:rPr lang="en-US" altLang="ko-KR" sz="1700">
+                          <a:solidFill>
+                            <a:srgbClr val="000000"/>
+                          </a:solidFill>
+                        </a:rPr>
+                        <a:t>GET</a:t>
+                      </a:r>
+                      <a:endParaRPr lang="ko-KR" altLang="en-US" sz="1700">
+                        <a:solidFill>
+                          <a:srgbClr val="000000"/>
+                        </a:solidFill>
+                      </a:endParaRPr>
+                    </a:p>
+                  </a:txBody>
+                  <a:tcPr marL="91440" marR="91440">
+                    <a:lnL w="15240">
+                      <a:solidFill>
+                        <a:srgbClr val="000000">
+                          <a:alpha val="100000"/>
+                        </a:srgbClr>
+                      </a:solidFill>
+                      <a:prstDash val="solid"/>
+                    </a:lnL>
+                    <a:lnR w="15240">
+                      <a:solidFill>
+                        <a:srgbClr val="000000">
+                          <a:alpha val="100000"/>
+                        </a:srgbClr>
+                      </a:solidFill>
+                      <a:prstDash val="solid"/>
+                    </a:lnR>
+                    <a:lnT w="15240">
+                      <a:solidFill>
+                        <a:srgbClr val="000000">
+                          <a:alpha val="100000"/>
+                        </a:srgbClr>
+                      </a:solidFill>
+                      <a:prstDash val="solid"/>
+                    </a:lnT>
+                    <a:lnB w="15240">
+                      <a:solidFill>
+                        <a:srgbClr val="000000">
+                          <a:alpha val="100000"/>
+                        </a:srgbClr>
+                      </a:solidFill>
+                      <a:prstDash val="solid"/>
+                    </a:lnB>
+                    <a:solidFill>
+                      <a:schemeClr val="bg1">
+                        <a:alpha val="100000"/>
+                      </a:schemeClr>
+                    </a:solidFill>
+                  </a:tcPr>
+                </a:tc>
+              </a:tr>
+              <a:tr h="270210">
+                <a:tc>
+                  <a:txBody>
+                    <a:bodyPr/>
+                    <a:p>
+                      <a:pPr latinLnBrk="1">
+                        <a:defRPr/>
+                      </a:pPr>
+                      <a:r>
+                        <a:rPr lang="ko-KR" altLang="en-US" sz="1700">
+                          <a:solidFill>
+                            <a:srgbClr val="000000"/>
+                          </a:solidFill>
+                        </a:rPr>
+                        <a:t>위</a:t>
+                      </a:r>
+                      <a:r>
+                        <a:rPr lang="en-US" altLang="ko-KR" sz="1700">
+                          <a:solidFill>
+                            <a:srgbClr val="000000"/>
+                          </a:solidFill>
+                        </a:rPr>
+                        <a:t> </a:t>
+                      </a:r>
+                      <a:r>
+                        <a:rPr lang="ko-KR" altLang="en-US" sz="1700">
+                          <a:solidFill>
+                            <a:srgbClr val="000000"/>
+                          </a:solidFill>
+                        </a:rPr>
+                        <a:t>도서관선택</a:t>
+                      </a:r>
+                      <a:endParaRPr lang="ko-KR" altLang="en-US" sz="1700">
+                        <a:solidFill>
+                          <a:srgbClr val="000000"/>
+                        </a:solidFill>
+                      </a:endParaRPr>
+                    </a:p>
+                  </a:txBody>
+                  <a:tcPr marL="91440" marR="91440">
+                    <a:lnL w="15240">
+                      <a:solidFill>
+                        <a:srgbClr val="000000">
+                          <a:alpha val="100000"/>
+                        </a:srgbClr>
+                      </a:solidFill>
+                      <a:prstDash val="solid"/>
+                    </a:lnL>
+                    <a:lnR w="15240">
+                      <a:solidFill>
+                        <a:srgbClr val="000000">
+                          <a:alpha val="100000"/>
+                        </a:srgbClr>
+                      </a:solidFill>
+                      <a:prstDash val="solid"/>
+                    </a:lnR>
+                    <a:lnT w="15240">
+                      <a:solidFill>
+                        <a:srgbClr val="000000">
+                          <a:alpha val="100000"/>
+                        </a:srgbClr>
+                      </a:solidFill>
+                      <a:prstDash val="solid"/>
+                    </a:lnT>
+                    <a:lnB w="15240">
+                      <a:solidFill>
+                        <a:srgbClr val="000000">
+                          <a:alpha val="100000"/>
+                        </a:srgbClr>
+                      </a:solidFill>
+                      <a:prstDash val="solid"/>
+                    </a:lnB>
+                    <a:solidFill>
+                      <a:schemeClr val="bg1">
+                        <a:alpha val="100000"/>
+                      </a:schemeClr>
+                    </a:solidFill>
+                  </a:tcPr>
+                </a:tc>
+                <a:tc>
+                  <a:txBody>
+                    <a:bodyPr/>
+                    <a:p>
+                      <a:pPr latinLnBrk="1">
+                        <a:defRPr/>
+                      </a:pPr>
+                      <a:r>
+                        <a:rPr lang="en-US" altLang="ko-KR" sz="1700">
+                          <a:solidFill>
+                            <a:srgbClr val="000000"/>
+                          </a:solidFill>
+                        </a:rPr>
+                        <a:t>introduction/{0}-pathvariable</a:t>
+                      </a:r>
+                      <a:endParaRPr lang="ko-KR" altLang="en-US" sz="1700">
+                        <a:solidFill>
+                          <a:srgbClr val="000000"/>
+                        </a:solidFill>
+                      </a:endParaRPr>
+                    </a:p>
+                  </a:txBody>
+                  <a:tcPr marL="91440" marR="91440">
+                    <a:lnL w="15240">
+                      <a:solidFill>
+                        <a:srgbClr val="000000">
+                          <a:alpha val="100000"/>
+                        </a:srgbClr>
+                      </a:solidFill>
+                      <a:prstDash val="solid"/>
+                    </a:lnL>
+                    <a:lnR w="15240">
+                      <a:solidFill>
+                        <a:srgbClr val="000000">
+                          <a:alpha val="100000"/>
+                        </a:srgbClr>
+                      </a:solidFill>
+                      <a:prstDash val="solid"/>
+                    </a:lnR>
+                    <a:lnT w="15240">
+                      <a:solidFill>
+                        <a:srgbClr val="000000">
+                          <a:alpha val="100000"/>
+                        </a:srgbClr>
+                      </a:solidFill>
+                      <a:prstDash val="solid"/>
+                    </a:lnT>
+                    <a:lnB w="15240">
+                      <a:solidFill>
+                        <a:srgbClr val="000000">
+                          <a:alpha val="100000"/>
+                        </a:srgbClr>
+                      </a:solidFill>
+                      <a:prstDash val="solid"/>
+                    </a:lnB>
+                    <a:solidFill>
+                      <a:schemeClr val="bg1">
+                        <a:alpha val="100000"/>
+                      </a:schemeClr>
+                    </a:solidFill>
+                  </a:tcPr>
+                </a:tc>
+                <a:tc>
+                  <a:txBody>
+                    <a:bodyPr/>
+                    <a:p>
+                      <a:pPr latinLnBrk="1">
+                        <a:defRPr/>
+                      </a:pPr>
+                      <a:r>
+                        <a:rPr lang="en-US" altLang="ko-KR" sz="1700">
+                          <a:solidFill>
+                            <a:srgbClr val="000000"/>
+                          </a:solidFill>
+                        </a:rPr>
+                        <a:t>GET</a:t>
+                      </a:r>
+                      <a:endParaRPr lang="ko-KR" altLang="en-US" sz="1700">
+                        <a:solidFill>
+                          <a:srgbClr val="000000"/>
+                        </a:solidFill>
+                      </a:endParaRPr>
+                    </a:p>
+                  </a:txBody>
+                  <a:tcPr marL="91440" marR="91440">
+                    <a:lnL w="15240">
+                      <a:solidFill>
+                        <a:srgbClr val="000000">
+                          <a:alpha val="100000"/>
+                        </a:srgbClr>
+                      </a:solidFill>
+                      <a:prstDash val="solid"/>
+                    </a:lnL>
+                    <a:lnR w="15240">
+                      <a:solidFill>
+                        <a:srgbClr val="000000">
+                          <a:alpha val="100000"/>
+                        </a:srgbClr>
+                      </a:solidFill>
+                      <a:prstDash val="solid"/>
+                    </a:lnR>
+                    <a:lnT w="15240">
+                      <a:solidFill>
+                        <a:srgbClr val="000000">
+                          <a:alpha val="100000"/>
+                        </a:srgbClr>
+                      </a:solidFill>
+                      <a:prstDash val="solid"/>
+                    </a:lnT>
+                    <a:lnB w="15240">
+                      <a:solidFill>
+                        <a:srgbClr val="000000">
+                          <a:alpha val="100000"/>
+                        </a:srgbClr>
+                      </a:solidFill>
+                      <a:prstDash val="solid"/>
+                    </a:lnB>
+                    <a:solidFill>
+                      <a:schemeClr val="bg1">
+                        <a:alpha val="100000"/>
+                      </a:schemeClr>
+                    </a:solidFill>
+                  </a:tcPr>
+                </a:tc>
+              </a:tr>
+            </a:tbl>
+          </a:graphicData>
+        </a:graphic>
+      </p:graphicFrame>
+    </p:spTree>
+    <p:extLst>
+      <p:ext uri="{BB962C8B-B14F-4D97-AF65-F5344CB8AC3E}">
+        <p14:creationId xmlns:p14="http://schemas.microsoft.com/office/powerpoint/2010/main" val="3956941906"/>
+      </p:ext>
+    </p:extLst>
+  </p:cSld>
+  <p:clrMapOvr>
+    <a:masterClrMapping/>
+  </p:clrMapOvr>
+</p:sld>
+</file>
+
+<file path=ppt/slides/slide31.xml><?xml version="1.0" encoding="utf-8"?>
+<p:sld xmlns:r="http://schemas.openxmlformats.org/officeDocument/2006/relationships" xmlns:c="http://schemas.openxmlformats.org/drawingml/2006/chart" xmlns:a="http://schemas.openxmlformats.org/drawingml/2006/main" xmlns:dgm="http://schemas.openxmlformats.org/drawingml/2006/diagram" xmlns:dsp="http://schemas.microsoft.com/office/drawing/2008/diagram" xmlns:p="http://schemas.openxmlformats.org/presentationml/2006/main">
+  <p:cSld>
+    <p:spTree>
+      <p:nvGrpSpPr>
+        <p:cNvPr id="1" name=""/>
+        <p:cNvGrpSpPr/>
+        <p:nvPr/>
+      </p:nvGrpSpPr>
+      <p:grpSpPr>
+        <a:xfrm>
+          <a:off x="0" y="0"/>
+          <a:ext cx="0" cy="0"/>
+          <a:chOff x="0" y="0"/>
+          <a:chExt cx="0" cy="0"/>
+        </a:xfrm>
+      </p:grpSpPr>
       <p:sp>
         <p:nvSpPr>
           <p:cNvPr id="2" name="prstName"/>
@@ -34864,7 +36799,7 @@
                             <a:srgbClr val="000000"/>
                           </a:solidFill>
                         </a:rPr>
-                        <a:t>예약환황</a:t>
+                        <a:t>예약현황</a:t>
                       </a:r>
                       <a:endParaRPr lang="ko-KR" altLang="en-US" b="0">
                         <a:solidFill>
@@ -35559,8 +37494,8 @@
                 <a:tableStyleId>{01A66EDD-3DAB-4C5B-A090-DC80EC1FD486}</a:tableStyleId>
               </a:tblPr>
               <a:tblGrid>
-                <a:gridCol w="1625143"/>
-                <a:gridCol w="1625143"/>
+                <a:gridCol w="2045335"/>
+                <a:gridCol w="1204951"/>
                 <a:gridCol w="1625905"/>
                 <a:gridCol w="2149449"/>
                 <a:gridCol w="1102361"/>
@@ -37528,7 +39463,7 @@
 </p:sld>
 </file>
 
-<file path=ppt/slides/slide31.xml><?xml version="1.0" encoding="utf-8"?>
+<file path=ppt/slides/slide32.xml><?xml version="1.0" encoding="utf-8"?>
 <p:sld xmlns:r="http://schemas.openxmlformats.org/officeDocument/2006/relationships" xmlns:c="http://schemas.openxmlformats.org/drawingml/2006/chart" xmlns:a="http://schemas.openxmlformats.org/drawingml/2006/main" xmlns:dgm="http://schemas.openxmlformats.org/drawingml/2006/diagram" xmlns:dsp="http://schemas.microsoft.com/office/drawing/2008/diagram" xmlns:p="http://schemas.openxmlformats.org/presentationml/2006/main">
   <p:cSld>
     <p:spTree>
@@ -38006,6 +39941,24 @@
                         </a:rPr>
                         <a:t>front/main</a:t>
                       </a:r>
+                      <a:endParaRPr lang="en-US" altLang="ko-KR" sz="1700">
+                        <a:solidFill>
+                          <a:srgbClr val="000000"/>
+                        </a:solidFill>
+                      </a:endParaRPr>
+                    </a:p>
+                    <a:p>
+                      <a:pPr latinLnBrk="1">
+                        <a:defRPr/>
+                      </a:pPr>
+                      <a:r>
+                        <a:rPr lang="en-US" altLang="ko-KR" sz="1700">
+                          <a:solidFill>
+                            <a:srgbClr val="000000"/>
+                          </a:solidFill>
+                        </a:rPr>
+                        <a:t>./front.html</a:t>
+                      </a:r>
                       <a:endParaRPr lang="ko-KR" altLang="en-US" sz="1700">
                         <a:solidFill>
                           <a:srgbClr val="000000"/>
@@ -38192,7 +40145,7 @@
                             <a:srgbClr val="000000"/>
                           </a:solidFill>
                         </a:rPr>
-                        <a:t>update/main</a:t>
+                        <a:t>update/checkPass</a:t>
                       </a:r>
                       <a:endParaRPr lang="ko-KR" altLang="en-US" sz="1700">
                         <a:solidFill>
@@ -38254,7 +40207,7 @@
                             <a:srgbClr val="000000"/>
                           </a:solidFill>
                         </a:rPr>
-                        <a:t>PATCH</a:t>
+                        <a:t>GET</a:t>
                       </a:r>
                       <a:endParaRPr lang="ko-KR" altLang="en-US" sz="1700">
                         <a:solidFill>
@@ -38713,7 +40666,7 @@
 </p:sld>
 </file>
 
-<file path=ppt/slides/slide32.xml><?xml version="1.0" encoding="utf-8"?>
+<file path=ppt/slides/slide33.xml><?xml version="1.0" encoding="utf-8"?>
 <p:sld xmlns:r="http://schemas.openxmlformats.org/officeDocument/2006/relationships" xmlns:c="http://schemas.openxmlformats.org/drawingml/2006/chart" xmlns:a="http://schemas.openxmlformats.org/drawingml/2006/main" xmlns:dgm="http://schemas.openxmlformats.org/drawingml/2006/diagram" xmlns:dsp="http://schemas.microsoft.com/office/drawing/2008/diagram" xmlns:p="http://schemas.openxmlformats.org/presentationml/2006/main">
   <p:cSld>
     <p:spTree>
@@ -39010,7 +40963,7 @@
                   <a:srgbClr val="000000"/>
                 </a:solidFill>
               </a:rPr>
-              <a:t>확인</a:t>
+              <a:t>입력</a:t>
             </a:r>
             <a:endParaRPr lang="ko-KR" altLang="en-US">
               <a:solidFill>
@@ -39271,7 +41224,7 @@
 </p:sld>
 </file>
 
-<file path=ppt/slides/slide33.xml><?xml version="1.0" encoding="utf-8"?>
+<file path=ppt/slides/slide34.xml><?xml version="1.0" encoding="utf-8"?>
 <p:sld xmlns:r="http://schemas.openxmlformats.org/officeDocument/2006/relationships" xmlns:c="http://schemas.openxmlformats.org/drawingml/2006/chart" xmlns:a="http://schemas.openxmlformats.org/drawingml/2006/main" xmlns:dgm="http://schemas.openxmlformats.org/drawingml/2006/diagram" xmlns:dsp="http://schemas.microsoft.com/office/drawing/2008/diagram" xmlns:p="http://schemas.openxmlformats.org/presentationml/2006/main">
   <p:cSld>
     <p:spTree>
@@ -39749,6 +41702,24 @@
                         </a:rPr>
                         <a:t>front/main</a:t>
                       </a:r>
+                      <a:endParaRPr lang="en-US" altLang="ko-KR" sz="1700">
+                        <a:solidFill>
+                          <a:srgbClr val="000000"/>
+                        </a:solidFill>
+                      </a:endParaRPr>
+                    </a:p>
+                    <a:p>
+                      <a:pPr latinLnBrk="1">
+                        <a:defRPr/>
+                      </a:pPr>
+                      <a:r>
+                        <a:rPr lang="en-US" altLang="ko-KR" sz="1700">
+                          <a:solidFill>
+                            <a:srgbClr val="000000"/>
+                          </a:solidFill>
+                        </a:rPr>
+                        <a:t>./front.html</a:t>
+                      </a:r>
                       <a:endParaRPr lang="ko-KR" altLang="en-US" sz="1700">
                         <a:solidFill>
                           <a:srgbClr val="000000"/>
@@ -39935,7 +41906,7 @@
                             <a:srgbClr val="000000"/>
                           </a:solidFill>
                         </a:rPr>
-                        <a:t>update/main</a:t>
+                        <a:t>update/checkPass</a:t>
                       </a:r>
                       <a:endParaRPr lang="ko-KR" altLang="en-US" sz="1700">
                         <a:solidFill>
@@ -39997,7 +41968,7 @@
                             <a:srgbClr val="000000"/>
                           </a:solidFill>
                         </a:rPr>
-                        <a:t>PATCH</a:t>
+                        <a:t>GET</a:t>
                       </a:r>
                       <a:endParaRPr lang="ko-KR" altLang="en-US" sz="1700">
                         <a:solidFill>
@@ -40252,7 +42223,7 @@
 </p:sld>
 </file>
 
-<file path=ppt/slides/slide34.xml><?xml version="1.0" encoding="utf-8"?>
+<file path=ppt/slides/slide35.xml><?xml version="1.0" encoding="utf-8"?>
 <p:sld xmlns:r="http://schemas.openxmlformats.org/officeDocument/2006/relationships" xmlns:c="http://schemas.openxmlformats.org/drawingml/2006/chart" xmlns:a="http://schemas.openxmlformats.org/drawingml/2006/main" xmlns:dgm="http://schemas.openxmlformats.org/drawingml/2006/diagram" xmlns:dsp="http://schemas.microsoft.com/office/drawing/2008/diagram" xmlns:p="http://schemas.openxmlformats.org/presentationml/2006/main">
   <p:cSld>
     <p:spTree>
@@ -40277,7 +42248,7 @@
         </p:nvSpPr>
         <p:spPr>
           <a:xfrm>
-            <a:off x="4008943" y="1311402"/>
+            <a:off x="4006403" y="1793367"/>
             <a:ext cx="1334633" cy="569719"/>
           </a:xfrm>
           <a:prstGeom prst="rect">
@@ -40331,7 +42302,7 @@
         </p:nvSpPr>
         <p:spPr>
           <a:xfrm>
-            <a:off x="4009067" y="1994864"/>
+            <a:off x="4006527" y="2476829"/>
             <a:ext cx="1334633" cy="569719"/>
           </a:xfrm>
           <a:prstGeom prst="rect">
@@ -40385,7 +42356,7 @@
         </p:nvSpPr>
         <p:spPr>
           <a:xfrm>
-            <a:off x="4009299" y="628066"/>
+            <a:off x="4006759" y="1110031"/>
             <a:ext cx="1334633" cy="569719"/>
           </a:xfrm>
           <a:prstGeom prst="rect">
@@ -40439,7 +42410,7 @@
         </p:nvSpPr>
         <p:spPr>
           <a:xfrm>
-            <a:off x="4009656" y="2678217"/>
+            <a:off x="4007116" y="3160182"/>
             <a:ext cx="1334633" cy="569719"/>
           </a:xfrm>
           <a:prstGeom prst="rect">
@@ -40487,67 +42458,13 @@
       </p:sp>
       <p:sp>
         <p:nvSpPr>
-          <p:cNvPr id="6" name="prstName"/>
-          <p:cNvSpPr/>
-          <p:nvPr/>
-        </p:nvSpPr>
-        <p:spPr>
-          <a:xfrm>
-            <a:off x="4009021" y="3361634"/>
-            <a:ext cx="1334633" cy="569719"/>
-          </a:xfrm>
-          <a:prstGeom prst="rect">
-            <a:avLst/>
-          </a:prstGeom>
-          <a:noFill/>
-        </p:spPr>
-        <p:style>
-          <a:lnRef idx="2">
-            <a:schemeClr val="accent1">
-              <a:shade val="20000"/>
-            </a:schemeClr>
-          </a:lnRef>
-          <a:fillRef idx="1">
-            <a:schemeClr val="accent1"/>
-          </a:fillRef>
-          <a:effectRef idx="0">
-            <a:schemeClr val="accent1"/>
-          </a:effectRef>
-          <a:fontRef idx="minor">
-            <a:schemeClr val="lt1"/>
-          </a:fontRef>
-        </p:style>
-        <p:txBody>
-          <a:bodyPr anchor="ctr"/>
-          <a:p>
-            <a:pPr algn="ctr">
-              <a:defRPr/>
-            </a:pPr>
-            <a:r>
-              <a:rPr lang="ko-KR" altLang="en-US">
-                <a:solidFill>
-                  <a:srgbClr val="000000"/>
-                </a:solidFill>
-              </a:rPr>
-              <a:t>아이디</a:t>
-            </a:r>
-            <a:endParaRPr lang="ko-KR" altLang="en-US">
-              <a:solidFill>
-                <a:srgbClr val="000000"/>
-              </a:solidFill>
-            </a:endParaRPr>
-          </a:p>
-        </p:txBody>
-      </p:sp>
-      <p:sp>
-        <p:nvSpPr>
           <p:cNvPr id="7" name="prstName"/>
           <p:cNvSpPr/>
           <p:nvPr/>
         </p:nvSpPr>
         <p:spPr>
           <a:xfrm>
-            <a:off x="4009656" y="4045529"/>
+            <a:off x="4008386" y="3847821"/>
             <a:ext cx="1334633" cy="569719"/>
           </a:xfrm>
           <a:prstGeom prst="rect">
@@ -40601,7 +42518,7 @@
         </p:nvSpPr>
         <p:spPr>
           <a:xfrm>
-            <a:off x="4009021" y="4728154"/>
+            <a:off x="4007751" y="4530446"/>
             <a:ext cx="1334633" cy="569719"/>
           </a:xfrm>
           <a:prstGeom prst="rect">
@@ -40655,7 +42572,7 @@
         </p:nvSpPr>
         <p:spPr>
           <a:xfrm>
-            <a:off x="5344630" y="628034"/>
+            <a:off x="5342090" y="1109999"/>
             <a:ext cx="3336991" cy="570121"/>
           </a:xfrm>
           <a:prstGeom prst="rect">
@@ -40697,7 +42614,7 @@
         </p:nvSpPr>
         <p:spPr>
           <a:xfrm>
-            <a:off x="5343979" y="1311294"/>
+            <a:off x="5341439" y="1793259"/>
             <a:ext cx="3336991" cy="570121"/>
           </a:xfrm>
           <a:prstGeom prst="rect">
@@ -40739,7 +42656,7 @@
         </p:nvSpPr>
         <p:spPr>
           <a:xfrm>
-            <a:off x="5344614" y="1994554"/>
+            <a:off x="5342074" y="2476519"/>
             <a:ext cx="3336991" cy="570121"/>
           </a:xfrm>
           <a:prstGeom prst="rect">
@@ -40781,49 +42698,7 @@
         </p:nvSpPr>
         <p:spPr>
           <a:xfrm>
-            <a:off x="5343344" y="2677814"/>
-            <a:ext cx="3336991" cy="570121"/>
-          </a:xfrm>
-          <a:prstGeom prst="rect">
-            <a:avLst/>
-          </a:prstGeom>
-          <a:noFill/>
-        </p:spPr>
-        <p:style>
-          <a:lnRef idx="2">
-            <a:schemeClr val="accent1">
-              <a:shade val="20000"/>
-            </a:schemeClr>
-          </a:lnRef>
-          <a:fillRef idx="1">
-            <a:schemeClr val="accent1"/>
-          </a:fillRef>
-          <a:effectRef idx="0">
-            <a:schemeClr val="accent1"/>
-          </a:effectRef>
-          <a:fontRef idx="minor">
-            <a:schemeClr val="lt1"/>
-          </a:fontRef>
-        </p:style>
-        <p:txBody>
-          <a:bodyPr anchor="ctr"/>
-          <a:p>
-            <a:pPr algn="ctr">
-              <a:defRPr/>
-            </a:pPr>
-            <a:endParaRPr lang="ko-KR" altLang="en-US"/>
-          </a:p>
-        </p:txBody>
-      </p:sp>
-      <p:sp>
-        <p:nvSpPr>
-          <p:cNvPr id="13" name="prstName"/>
-          <p:cNvSpPr/>
-          <p:nvPr/>
-        </p:nvSpPr>
-        <p:spPr>
-          <a:xfrm>
-            <a:off x="5343344" y="3362979"/>
+            <a:off x="5340804" y="3159779"/>
             <a:ext cx="3336991" cy="570121"/>
           </a:xfrm>
           <a:prstGeom prst="rect">
@@ -40865,7 +42740,7 @@
         </p:nvSpPr>
         <p:spPr>
           <a:xfrm>
-            <a:off x="5344614" y="4044334"/>
+            <a:off x="5343344" y="3846626"/>
             <a:ext cx="3336991" cy="570121"/>
           </a:xfrm>
           <a:prstGeom prst="rect">
@@ -40907,7 +42782,7 @@
         </p:nvSpPr>
         <p:spPr>
           <a:xfrm>
-            <a:off x="5343344" y="4731404"/>
+            <a:off x="5342074" y="4533696"/>
             <a:ext cx="3336991" cy="570121"/>
           </a:xfrm>
           <a:prstGeom prst="rect">
@@ -41378,7 +43253,7 @@
 </p:sld>
 </file>
 
-<file path=ppt/slides/slide35.xml><?xml version="1.0" encoding="utf-8"?>
+<file path=ppt/slides/slide36.xml><?xml version="1.0" encoding="utf-8"?>
 <p:sld xmlns:r="http://schemas.openxmlformats.org/officeDocument/2006/relationships" xmlns:c="http://schemas.openxmlformats.org/drawingml/2006/chart" xmlns:a="http://schemas.openxmlformats.org/drawingml/2006/main" xmlns:dgm="http://schemas.openxmlformats.org/drawingml/2006/diagram" xmlns:dsp="http://schemas.microsoft.com/office/drawing/2008/diagram" xmlns:p="http://schemas.openxmlformats.org/presentationml/2006/main">
   <p:cSld>
     <p:spTree>
@@ -41856,6 +43731,24 @@
                         </a:rPr>
                         <a:t>front/main</a:t>
                       </a:r>
+                      <a:endParaRPr lang="en-US" altLang="ko-KR" sz="1700">
+                        <a:solidFill>
+                          <a:srgbClr val="000000"/>
+                        </a:solidFill>
+                      </a:endParaRPr>
+                    </a:p>
+                    <a:p>
+                      <a:pPr latinLnBrk="1">
+                        <a:defRPr/>
+                      </a:pPr>
+                      <a:r>
+                        <a:rPr lang="en-US" altLang="ko-KR" sz="1700">
+                          <a:solidFill>
+                            <a:srgbClr val="000000"/>
+                          </a:solidFill>
+                        </a:rPr>
+                        <a:t>./front.html</a:t>
+                      </a:r>
                       <a:endParaRPr lang="ko-KR" altLang="en-US" sz="1700">
                         <a:solidFill>
                           <a:srgbClr val="000000"/>
@@ -42042,7 +43935,7 @@
                             <a:srgbClr val="000000"/>
                           </a:solidFill>
                         </a:rPr>
-                        <a:t>update/main</a:t>
+                        <a:t>update/checkPass</a:t>
                       </a:r>
                       <a:endParaRPr lang="ko-KR" altLang="en-US" sz="1700">
                         <a:solidFill>
@@ -42104,7 +43997,7 @@
                             <a:srgbClr val="000000"/>
                           </a:solidFill>
                         </a:rPr>
-                        <a:t>PATCH</a:t>
+                        <a:t>GET</a:t>
                       </a:r>
                       <a:endParaRPr lang="ko-KR" altLang="en-US" sz="1700">
                         <a:solidFill>
@@ -42419,6 +44312,24 @@
                           </a:solidFill>
                         </a:rPr>
                         <a:t>front/main</a:t>
+                      </a:r>
+                      <a:endParaRPr lang="en-US" altLang="ko-KR" sz="1700">
+                        <a:solidFill>
+                          <a:srgbClr val="000000"/>
+                        </a:solidFill>
+                      </a:endParaRPr>
+                    </a:p>
+                    <a:p>
+                      <a:pPr latinLnBrk="1">
+                        <a:defRPr/>
+                      </a:pPr>
+                      <a:r>
+                        <a:rPr lang="en-US" altLang="ko-KR" sz="1700">
+                          <a:solidFill>
+                            <a:srgbClr val="000000"/>
+                          </a:solidFill>
+                        </a:rPr>
+                        <a:t>./front.html</a:t>
                       </a:r>
                       <a:endParaRPr lang="ko-KR" altLang="en-US" sz="1700">
                         <a:solidFill>
@@ -43025,6 +44936,24 @@
                         </a:rPr>
                         <a:t>front/main</a:t>
                       </a:r>
+                      <a:endParaRPr lang="en-US" altLang="ko-KR" sz="1700">
+                        <a:solidFill>
+                          <a:srgbClr val="000000"/>
+                        </a:solidFill>
+                      </a:endParaRPr>
+                    </a:p>
+                    <a:p>
+                      <a:pPr latinLnBrk="1">
+                        <a:defRPr/>
+                      </a:pPr>
+                      <a:r>
+                        <a:rPr lang="en-US" altLang="ko-KR" sz="1700">
+                          <a:solidFill>
+                            <a:srgbClr val="000000"/>
+                          </a:solidFill>
+                        </a:rPr>
+                        <a:t>./front.html</a:t>
+                      </a:r>
                       <a:endParaRPr lang="ko-KR" altLang="en-US" sz="1700">
                         <a:solidFill>
                           <a:srgbClr val="000000"/>
@@ -43144,6 +45073,14 @@
                         <a:defRPr/>
                       </a:pPr>
                       <a:r>
+                        <a:rPr lang="en-US" altLang="ko-KR" sz="1700">
+                          <a:solidFill>
+                            <a:srgbClr val="000000"/>
+                          </a:solidFill>
+                        </a:rPr>
+                        <a:t>HEADER </a:t>
+                      </a:r>
+                      <a:r>
                         <a:rPr lang="ko-KR" altLang="en-US" sz="1700">
                           <a:solidFill>
                             <a:srgbClr val="000000"/>
@@ -43212,6 +45149,24 @@
                           </a:solidFill>
                         </a:rPr>
                         <a:t>login/main</a:t>
+                      </a:r>
+                      <a:endParaRPr lang="en-US" altLang="ko-KR" sz="1700">
+                        <a:solidFill>
+                          <a:srgbClr val="000000"/>
+                        </a:solidFill>
+                      </a:endParaRPr>
+                    </a:p>
+                    <a:p>
+                      <a:pPr latinLnBrk="1">
+                        <a:defRPr/>
+                      </a:pPr>
+                      <a:r>
+                        <a:rPr lang="en-US" altLang="ko-KR" sz="1700">
+                          <a:solidFill>
+                            <a:srgbClr val="000000"/>
+                          </a:solidFill>
+                        </a:rPr>
+                        <a:t>./login.html</a:t>
                       </a:r>
                       <a:endParaRPr lang="ko-KR" altLang="en-US" sz="1700">
                         <a:solidFill>
@@ -43401,6 +45356,24 @@
                         </a:rPr>
                         <a:t>join/main</a:t>
                       </a:r>
+                      <a:endParaRPr lang="en-US" altLang="ko-KR" sz="1700">
+                        <a:solidFill>
+                          <a:srgbClr val="000000"/>
+                        </a:solidFill>
+                      </a:endParaRPr>
+                    </a:p>
+                    <a:p>
+                      <a:pPr latinLnBrk="1">
+                        <a:defRPr/>
+                      </a:pPr>
+                      <a:r>
+                        <a:rPr lang="en-US" altLang="ko-KR" sz="1700">
+                          <a:solidFill>
+                            <a:srgbClr val="000000"/>
+                          </a:solidFill>
+                        </a:rPr>
+                        <a:t>./signUp.html</a:t>
+                      </a:r>
                       <a:endParaRPr lang="ko-KR" altLang="en-US" sz="1700">
                         <a:solidFill>
                           <a:srgbClr val="000000"/>
@@ -43519,6 +45492,14 @@
                       <a:pPr latinLnBrk="1">
                         <a:defRPr/>
                       </a:pPr>
+                      <a:r>
+                        <a:rPr lang="en-US" altLang="ko-KR" sz="1700">
+                          <a:solidFill>
+                            <a:srgbClr val="000000"/>
+                          </a:solidFill>
+                        </a:rPr>
+                        <a:t>SECTION </a:t>
+                      </a:r>
                       <a:r>
                         <a:rPr lang="ko-KR" altLang="en-US" sz="1700">
                           <a:solidFill>
@@ -44766,6 +46747,24 @@
                         </a:rPr>
                         <a:t>front/main</a:t>
                       </a:r>
+                      <a:endParaRPr lang="en-US" altLang="ko-KR" sz="1700">
+                        <a:solidFill>
+                          <a:srgbClr val="000000"/>
+                        </a:solidFill>
+                      </a:endParaRPr>
+                    </a:p>
+                    <a:p>
+                      <a:pPr latinLnBrk="1">
+                        <a:defRPr/>
+                      </a:pPr>
+                      <a:r>
+                        <a:rPr lang="en-US" altLang="ko-KR" sz="1700">
+                          <a:solidFill>
+                            <a:srgbClr val="000000"/>
+                          </a:solidFill>
+                        </a:rPr>
+                        <a:t>./front.html</a:t>
+                      </a:r>
                       <a:endParaRPr lang="ko-KR" altLang="en-US" sz="1700">
                         <a:solidFill>
                           <a:srgbClr val="000000"/>
@@ -44952,7 +46951,7 @@
                             <a:srgbClr val="000000"/>
                           </a:solidFill>
                         </a:rPr>
-                        <a:t>update/main</a:t>
+                        <a:t>update/checkPass</a:t>
                       </a:r>
                       <a:endParaRPr lang="ko-KR" altLang="en-US" sz="1700">
                         <a:solidFill>
@@ -45014,7 +47013,7 @@
                             <a:srgbClr val="000000"/>
                           </a:solidFill>
                         </a:rPr>
-                        <a:t>PATCH</a:t>
+                        <a:t>GET</a:t>
                       </a:r>
                       <a:endParaRPr lang="ko-KR" altLang="en-US" sz="1700">
                         <a:solidFill>
@@ -46136,7 +48135,7 @@
         </p:nvSpPr>
         <p:spPr>
           <a:xfrm>
-            <a:off x="3389079" y="1657477"/>
+            <a:off x="3439244" y="2043282"/>
             <a:ext cx="1334633" cy="569719"/>
           </a:xfrm>
           <a:prstGeom prst="rect">
@@ -46190,7 +48189,7 @@
         </p:nvSpPr>
         <p:spPr>
           <a:xfrm>
-            <a:off x="3389203" y="2340939"/>
+            <a:off x="3439368" y="2726744"/>
             <a:ext cx="1334633" cy="569719"/>
           </a:xfrm>
           <a:prstGeom prst="rect">
@@ -46244,7 +48243,7 @@
         </p:nvSpPr>
         <p:spPr>
           <a:xfrm>
-            <a:off x="3389435" y="974141"/>
+            <a:off x="3439600" y="1359946"/>
             <a:ext cx="1334633" cy="569719"/>
           </a:xfrm>
           <a:prstGeom prst="rect">
@@ -46298,7 +48297,7 @@
         </p:nvSpPr>
         <p:spPr>
           <a:xfrm>
-            <a:off x="3389792" y="3024292"/>
+            <a:off x="3439957" y="3410097"/>
             <a:ext cx="1334633" cy="569719"/>
           </a:xfrm>
           <a:prstGeom prst="rect">
@@ -46346,67 +48345,13 @@
       </p:sp>
       <p:sp>
         <p:nvSpPr>
-          <p:cNvPr id="8" name="prstName"/>
-          <p:cNvSpPr/>
-          <p:nvPr/>
-        </p:nvSpPr>
-        <p:spPr>
-          <a:xfrm>
-            <a:off x="3389157" y="3707709"/>
-            <a:ext cx="1334633" cy="569719"/>
-          </a:xfrm>
-          <a:prstGeom prst="rect">
-            <a:avLst/>
-          </a:prstGeom>
-          <a:noFill/>
-        </p:spPr>
-        <p:style>
-          <a:lnRef idx="2">
-            <a:schemeClr val="accent1">
-              <a:shade val="20000"/>
-            </a:schemeClr>
-          </a:lnRef>
-          <a:fillRef idx="1">
-            <a:schemeClr val="accent1"/>
-          </a:fillRef>
-          <a:effectRef idx="0">
-            <a:schemeClr val="accent1"/>
-          </a:effectRef>
-          <a:fontRef idx="minor">
-            <a:schemeClr val="lt1"/>
-          </a:fontRef>
-        </p:style>
-        <p:txBody>
-          <a:bodyPr anchor="ctr"/>
-          <a:p>
-            <a:pPr algn="ctr">
-              <a:defRPr/>
-            </a:pPr>
-            <a:r>
-              <a:rPr lang="ko-KR" altLang="en-US">
-                <a:solidFill>
-                  <a:srgbClr val="000000"/>
-                </a:solidFill>
-              </a:rPr>
-              <a:t>아이디</a:t>
-            </a:r>
-            <a:endParaRPr lang="ko-KR" altLang="en-US">
-              <a:solidFill>
-                <a:srgbClr val="000000"/>
-              </a:solidFill>
-            </a:endParaRPr>
-          </a:p>
-        </p:txBody>
-      </p:sp>
-      <p:sp>
-        <p:nvSpPr>
           <p:cNvPr id="9" name="prstName"/>
           <p:cNvSpPr/>
           <p:nvPr/>
         </p:nvSpPr>
         <p:spPr>
           <a:xfrm>
-            <a:off x="3389792" y="4391604"/>
+            <a:off x="3439322" y="4097959"/>
             <a:ext cx="1334633" cy="569719"/>
           </a:xfrm>
           <a:prstGeom prst="rect">
@@ -46460,7 +48405,7 @@
         </p:nvSpPr>
         <p:spPr>
           <a:xfrm>
-            <a:off x="3389157" y="5074229"/>
+            <a:off x="3438687" y="4780584"/>
             <a:ext cx="1334633" cy="569719"/>
           </a:xfrm>
           <a:prstGeom prst="rect">
@@ -46514,7 +48459,7 @@
         </p:nvSpPr>
         <p:spPr>
           <a:xfrm>
-            <a:off x="4724766" y="974109"/>
+            <a:off x="4774931" y="1359914"/>
             <a:ext cx="3336991" cy="570121"/>
           </a:xfrm>
           <a:prstGeom prst="rect">
@@ -46556,7 +48501,7 @@
         </p:nvSpPr>
         <p:spPr>
           <a:xfrm>
-            <a:off x="4724115" y="1657369"/>
+            <a:off x="4774280" y="2043174"/>
             <a:ext cx="3336991" cy="570121"/>
           </a:xfrm>
           <a:prstGeom prst="rect">
@@ -46598,7 +48543,7 @@
         </p:nvSpPr>
         <p:spPr>
           <a:xfrm>
-            <a:off x="4724750" y="2340629"/>
+            <a:off x="4774915" y="2726434"/>
             <a:ext cx="3336991" cy="570121"/>
           </a:xfrm>
           <a:prstGeom prst="rect">
@@ -46640,49 +48585,7 @@
         </p:nvSpPr>
         <p:spPr>
           <a:xfrm>
-            <a:off x="4723480" y="3023889"/>
-            <a:ext cx="3336991" cy="570121"/>
-          </a:xfrm>
-          <a:prstGeom prst="rect">
-            <a:avLst/>
-          </a:prstGeom>
-          <a:noFill/>
-        </p:spPr>
-        <p:style>
-          <a:lnRef idx="2">
-            <a:schemeClr val="accent1">
-              <a:shade val="20000"/>
-            </a:schemeClr>
-          </a:lnRef>
-          <a:fillRef idx="1">
-            <a:schemeClr val="accent1"/>
-          </a:fillRef>
-          <a:effectRef idx="0">
-            <a:schemeClr val="accent1"/>
-          </a:effectRef>
-          <a:fontRef idx="minor">
-            <a:schemeClr val="lt1"/>
-          </a:fontRef>
-        </p:style>
-        <p:txBody>
-          <a:bodyPr anchor="ctr"/>
-          <a:p>
-            <a:pPr algn="ctr">
-              <a:defRPr/>
-            </a:pPr>
-            <a:endParaRPr lang="ko-KR" altLang="en-US"/>
-          </a:p>
-        </p:txBody>
-      </p:sp>
-      <p:sp>
-        <p:nvSpPr>
-          <p:cNvPr id="15" name="prstName"/>
-          <p:cNvSpPr/>
-          <p:nvPr/>
-        </p:nvSpPr>
-        <p:spPr>
-          <a:xfrm>
-            <a:off x="4723480" y="3709054"/>
+            <a:off x="4773645" y="3409694"/>
             <a:ext cx="3336991" cy="570121"/>
           </a:xfrm>
           <a:prstGeom prst="rect">
@@ -46724,7 +48627,7 @@
         </p:nvSpPr>
         <p:spPr>
           <a:xfrm>
-            <a:off x="4724750" y="4390409"/>
+            <a:off x="4774280" y="4096764"/>
             <a:ext cx="3336991" cy="570121"/>
           </a:xfrm>
           <a:prstGeom prst="rect">
@@ -46766,7 +48669,7 @@
         </p:nvSpPr>
         <p:spPr>
           <a:xfrm>
-            <a:off x="4723480" y="5077479"/>
+            <a:off x="4773010" y="4783834"/>
             <a:ext cx="3336991" cy="570121"/>
           </a:xfrm>
           <a:prstGeom prst="rect">
@@ -47046,7 +48949,7 @@
         </p:nvSpPr>
         <p:spPr>
           <a:xfrm>
-            <a:off x="4724411" y="5923394"/>
+            <a:off x="4721871" y="5752047"/>
             <a:ext cx="2180709" cy="569371"/>
           </a:xfrm>
           <a:prstGeom prst="roundRect">
@@ -47585,6 +49488,24 @@
                         </a:rPr>
                         <a:t>front/main</a:t>
                       </a:r>
+                      <a:endParaRPr lang="en-US" altLang="ko-KR" sz="1700">
+                        <a:solidFill>
+                          <a:srgbClr val="000000"/>
+                        </a:solidFill>
+                      </a:endParaRPr>
+                    </a:p>
+                    <a:p>
+                      <a:pPr latinLnBrk="1">
+                        <a:defRPr/>
+                      </a:pPr>
+                      <a:r>
+                        <a:rPr lang="en-US" altLang="ko-KR" sz="1700">
+                          <a:solidFill>
+                            <a:srgbClr val="000000"/>
+                          </a:solidFill>
+                        </a:rPr>
+                        <a:t>./front.html</a:t>
+                      </a:r>
                       <a:endParaRPr lang="ko-KR" altLang="en-US" sz="1700">
                         <a:solidFill>
                           <a:srgbClr val="000000"/>
@@ -47773,6 +49694,24 @@
                         </a:rPr>
                         <a:t>login/main</a:t>
                       </a:r>
+                      <a:endParaRPr lang="en-US" altLang="ko-KR" sz="1700">
+                        <a:solidFill>
+                          <a:srgbClr val="000000"/>
+                        </a:solidFill>
+                      </a:endParaRPr>
+                    </a:p>
+                    <a:p>
+                      <a:pPr latinLnBrk="1">
+                        <a:defRPr/>
+                      </a:pPr>
+                      <a:r>
+                        <a:rPr lang="en-US" altLang="ko-KR" sz="1700">
+                          <a:solidFill>
+                            <a:srgbClr val="000000"/>
+                          </a:solidFill>
+                        </a:rPr>
+                        <a:t>./login.html</a:t>
+                      </a:r>
                       <a:endParaRPr lang="ko-KR" altLang="en-US" sz="1700">
                         <a:solidFill>
                           <a:srgbClr val="000000"/>
@@ -47960,6 +49899,24 @@
                           </a:solidFill>
                         </a:rPr>
                         <a:t>join/main</a:t>
+                      </a:r>
+                      <a:endParaRPr lang="en-US" altLang="ko-KR" sz="1700">
+                        <a:solidFill>
+                          <a:srgbClr val="000000"/>
+                        </a:solidFill>
+                      </a:endParaRPr>
+                    </a:p>
+                    <a:p>
+                      <a:pPr latinLnBrk="1">
+                        <a:defRPr/>
+                      </a:pPr>
+                      <a:r>
+                        <a:rPr lang="en-US" altLang="ko-KR" sz="1700">
+                          <a:solidFill>
+                            <a:srgbClr val="000000"/>
+                          </a:solidFill>
+                        </a:rPr>
+                        <a:t>./signUp.html</a:t>
                       </a:r>
                       <a:endParaRPr lang="ko-KR" altLang="en-US" sz="1700">
                         <a:solidFill>
@@ -48584,70 +50541,6 @@
               <a:tblGrid>
                 <a:gridCol w="1002160"/>
               </a:tblGrid>
-              <a:tr h="698577">
-                <a:tc>
-                  <a:txBody>
-                    <a:bodyPr/>
-                    <a:p>
-                      <a:pPr algn="ctr" latinLnBrk="1">
-                        <a:defRPr/>
-                      </a:pPr>
-                      <a:r>
-                        <a:rPr lang="ko-KR" altLang="en-US" b="0">
-                          <a:solidFill>
-                            <a:srgbClr val="000000"/>
-                          </a:solidFill>
-                        </a:rPr>
-                        <a:t>전체</a:t>
-                      </a:r>
-                      <a:endParaRPr lang="ko-KR" altLang="en-US" b="0">
-                        <a:solidFill>
-                          <a:srgbClr val="000000"/>
-                        </a:solidFill>
-                      </a:endParaRPr>
-                    </a:p>
-                  </a:txBody>
-                  <a:tcPr marL="91440" marR="91440" anchor="ctr" anchorCtr="1">
-                    <a:lnL w="15240">
-                      <a:solidFill>
-                        <a:srgbClr val="000000">
-                          <a:alpha val="100000"/>
-                        </a:srgbClr>
-                      </a:solidFill>
-                      <a:prstDash val="solid"/>
-                    </a:lnL>
-                    <a:lnR w="15240">
-                      <a:solidFill>
-                        <a:srgbClr val="000000">
-                          <a:alpha val="100000"/>
-                        </a:srgbClr>
-                      </a:solidFill>
-                      <a:prstDash val="solid"/>
-                    </a:lnR>
-                    <a:lnT w="15240">
-                      <a:solidFill>
-                        <a:srgbClr val="000000">
-                          <a:alpha val="100000"/>
-                        </a:srgbClr>
-                      </a:solidFill>
-                      <a:prstDash val="solid"/>
-                    </a:lnT>
-                    <a:lnB w="15240">
-                      <a:solidFill>
-                        <a:srgbClr val="000000">
-                          <a:alpha val="100000"/>
-                        </a:srgbClr>
-                      </a:solidFill>
-                      <a:prstDash val="solid"/>
-                    </a:lnB>
-                    <a:solidFill>
-                      <a:schemeClr val="bg1">
-                        <a:alpha val="100000"/>
-                      </a:schemeClr>
-                    </a:solidFill>
-                  </a:tcPr>
-                </a:tc>
-              </a:tr>
               <a:tr h="698577">
                 <a:tc>
                   <a:txBody>
